--- a/docs/presentation/presentation.pptx
+++ b/docs/presentation/presentation.pptx
@@ -2,25 +2,25 @@
 <file path=ppt/presentation.xml><?xml version="1.0" encoding="utf-8"?>
 <p:presentation xmlns:p="http://schemas.openxmlformats.org/presentationml/2006/main">
   <p:sldMasterIdLst>
-    <p:sldMasterId xmlns:r="http://schemas.openxmlformats.org/officeDocument/2006/relationships" id="2147483648" r:id="Ra7b89bb997274728"/>
+    <p:sldMasterId xmlns:r="http://schemas.openxmlformats.org/officeDocument/2006/relationships" id="2147483648" r:id="R4da13af65beb4678"/>
   </p:sldMasterIdLst>
   <p:notesMasterIdLst>
-    <p:notesMasterId xmlns:r="http://schemas.openxmlformats.org/officeDocument/2006/relationships" r:id="R529f871e470f4591"/>
+    <p:notesMasterId xmlns:r="http://schemas.openxmlformats.org/officeDocument/2006/relationships" r:id="R4355ff762a1440ec"/>
   </p:notesMasterIdLst>
   <p:sldIdLst>
-    <p:sldId xmlns:r="http://schemas.openxmlformats.org/officeDocument/2006/relationships" id="256" r:id="Rce9f712c6ab84007"/>
-    <p:sldId xmlns:r="http://schemas.openxmlformats.org/officeDocument/2006/relationships" id="257" r:id="R5fc2fdcbffd44ffa"/>
-    <p:sldId xmlns:r="http://schemas.openxmlformats.org/officeDocument/2006/relationships" id="258" r:id="R51ae7673fe1f4c51"/>
-    <p:sldId xmlns:r="http://schemas.openxmlformats.org/officeDocument/2006/relationships" id="259" r:id="Rcf7695903a2d4601"/>
-    <p:sldId xmlns:r="http://schemas.openxmlformats.org/officeDocument/2006/relationships" id="260" r:id="Ra70135c567e94223"/>
-    <p:sldId xmlns:r="http://schemas.openxmlformats.org/officeDocument/2006/relationships" id="261" r:id="R7ad4b8a5a39144cc"/>
-    <p:sldId xmlns:r="http://schemas.openxmlformats.org/officeDocument/2006/relationships" id="262" r:id="Rd0067c3ea4634210"/>
-    <p:sldId xmlns:r="http://schemas.openxmlformats.org/officeDocument/2006/relationships" id="263" r:id="Rb549ea9a5e474da6"/>
-    <p:sldId xmlns:r="http://schemas.openxmlformats.org/officeDocument/2006/relationships" id="264" r:id="R50173011594f4af2"/>
-    <p:sldId xmlns:r="http://schemas.openxmlformats.org/officeDocument/2006/relationships" id="265" r:id="R080783d760e54e08"/>
-    <p:sldId xmlns:r="http://schemas.openxmlformats.org/officeDocument/2006/relationships" id="266" r:id="Re87f7ea4924c4890"/>
-    <p:sldId xmlns:r="http://schemas.openxmlformats.org/officeDocument/2006/relationships" id="267" r:id="Raa29610225e0466c"/>
-    <p:sldId xmlns:r="http://schemas.openxmlformats.org/officeDocument/2006/relationships" id="268" r:id="R7aabcbd06aaf4585"/>
+    <p:sldId xmlns:r="http://schemas.openxmlformats.org/officeDocument/2006/relationships" id="256" r:id="R106b14b5cccd4235"/>
+    <p:sldId xmlns:r="http://schemas.openxmlformats.org/officeDocument/2006/relationships" id="257" r:id="Re1643bbed6804875"/>
+    <p:sldId xmlns:r="http://schemas.openxmlformats.org/officeDocument/2006/relationships" id="258" r:id="R6b623cab93a942a0"/>
+    <p:sldId xmlns:r="http://schemas.openxmlformats.org/officeDocument/2006/relationships" id="259" r:id="R0d3d9d41c4c34566"/>
+    <p:sldId xmlns:r="http://schemas.openxmlformats.org/officeDocument/2006/relationships" id="260" r:id="Rfd1929290b0a440e"/>
+    <p:sldId xmlns:r="http://schemas.openxmlformats.org/officeDocument/2006/relationships" id="261" r:id="Rbfeb5b8aa25540a4"/>
+    <p:sldId xmlns:r="http://schemas.openxmlformats.org/officeDocument/2006/relationships" id="262" r:id="R6412bce29504498b"/>
+    <p:sldId xmlns:r="http://schemas.openxmlformats.org/officeDocument/2006/relationships" id="263" r:id="R71bb13d8a5dc409e"/>
+    <p:sldId xmlns:r="http://schemas.openxmlformats.org/officeDocument/2006/relationships" id="264" r:id="R3086453580354398"/>
+    <p:sldId xmlns:r="http://schemas.openxmlformats.org/officeDocument/2006/relationships" id="265" r:id="R352cd019573d449d"/>
+    <p:sldId xmlns:r="http://schemas.openxmlformats.org/officeDocument/2006/relationships" id="266" r:id="R6f29bfa3630d4487"/>
+    <p:sldId xmlns:r="http://schemas.openxmlformats.org/officeDocument/2006/relationships" id="267" r:id="Rc979b5b8602e49e4"/>
+    <p:sldId xmlns:r="http://schemas.openxmlformats.org/officeDocument/2006/relationships" id="268" r:id="R427906fdf21f42cf"/>
   </p:sldIdLst>
   <p:sldSz cx="12192000" cy="6858000"/>
   <p:notesSz cx="6858000" cy="9144000"/>
@@ -3802,12 +3802,12 @@
   </p:cSld>
   <p:clrMap bg1="lt1" tx1="dk1" bg2="lt2" tx2="dk2" accent1="accent1" accent2="accent2" accent3="accent3" accent4="accent4" accent5="accent5" accent6="accent6" hlink="hlink" folHlink="folHlink"/>
   <p:sldLayoutIdLst>
-    <p:sldLayoutId xmlns:r="http://schemas.openxmlformats.org/officeDocument/2006/relationships" id="2147483649" r:id="Rbdb35f466f3245da"/>
-    <p:sldLayoutId xmlns:r="http://schemas.openxmlformats.org/officeDocument/2006/relationships" id="2147483650" r:id="R030c73abc10647e1"/>
-    <p:sldLayoutId xmlns:r="http://schemas.openxmlformats.org/officeDocument/2006/relationships" id="2147483651" r:id="Rba1fe201f1fa46fb"/>
-    <p:sldLayoutId xmlns:r="http://schemas.openxmlformats.org/officeDocument/2006/relationships" id="2147483652" r:id="Rf598835264484280"/>
-    <p:sldLayoutId xmlns:r="http://schemas.openxmlformats.org/officeDocument/2006/relationships" id="2147483653" r:id="Ra83be720b6ec46c7"/>
-    <p:sldLayoutId xmlns:r="http://schemas.openxmlformats.org/officeDocument/2006/relationships" id="2147483654" r:id="R13108961387f4916"/>
+    <p:sldLayoutId xmlns:r="http://schemas.openxmlformats.org/officeDocument/2006/relationships" id="2147483649" r:id="R0d9003992f864c7f"/>
+    <p:sldLayoutId xmlns:r="http://schemas.openxmlformats.org/officeDocument/2006/relationships" id="2147483650" r:id="R3fcb98c018f5447a"/>
+    <p:sldLayoutId xmlns:r="http://schemas.openxmlformats.org/officeDocument/2006/relationships" id="2147483651" r:id="R27eaf4a6897d4ee9"/>
+    <p:sldLayoutId xmlns:r="http://schemas.openxmlformats.org/officeDocument/2006/relationships" id="2147483652" r:id="R7cdb0962858149f1"/>
+    <p:sldLayoutId xmlns:r="http://schemas.openxmlformats.org/officeDocument/2006/relationships" id="2147483653" r:id="R570fd0e274094010"/>
+    <p:sldLayoutId xmlns:r="http://schemas.openxmlformats.org/officeDocument/2006/relationships" id="2147483654" r:id="Rbbbca8813f604274"/>
   </p:sldLayoutIdLst>
   <p:txStyles>
     <p:titleStyle>
@@ -4397,6 +4397,7 @@
               </a:defRPr>
             </a:defPPr>
             <a:lvl1pPr algn="l">
+              <a:buNone/>
               <a:defRPr sz="3300" b="1">
                 <a:solidFill>
                   <a:srgbClr val="152B4B"/>
@@ -4407,6 +4408,7 @@
               </a:defRPr>
             </a:lvl1pPr>
             <a:lvl2pPr algn="l">
+              <a:buNone/>
               <a:defRPr sz="3300" b="1">
                 <a:solidFill>
                   <a:srgbClr val="152B4B"/>
@@ -4417,6 +4419,7 @@
               </a:defRPr>
             </a:lvl2pPr>
             <a:lvl3pPr algn="l">
+              <a:buNone/>
               <a:defRPr sz="3300" b="1">
                 <a:solidFill>
                   <a:srgbClr val="152B4B"/>
@@ -4427,6 +4430,7 @@
               </a:defRPr>
             </a:lvl3pPr>
             <a:lvl4pPr algn="l">
+              <a:buNone/>
               <a:defRPr sz="3300" b="1">
                 <a:solidFill>
                   <a:srgbClr val="152B4B"/>
@@ -4437,6 +4441,7 @@
               </a:defRPr>
             </a:lvl4pPr>
             <a:lvl5pPr algn="l">
+              <a:buNone/>
               <a:defRPr sz="3300" b="1">
                 <a:solidFill>
                   <a:srgbClr val="152B4B"/>
@@ -4447,6 +4452,7 @@
               </a:defRPr>
             </a:lvl5pPr>
             <a:lvl6pPr algn="l">
+              <a:buNone/>
               <a:defRPr sz="3300" b="1">
                 <a:solidFill>
                   <a:srgbClr val="152B4B"/>
@@ -4457,6 +4463,7 @@
               </a:defRPr>
             </a:lvl6pPr>
             <a:lvl7pPr algn="l">
+              <a:buNone/>
               <a:defRPr sz="3300" b="1">
                 <a:solidFill>
                   <a:srgbClr val="152B4B"/>
@@ -4467,6 +4474,7 @@
               </a:defRPr>
             </a:lvl7pPr>
             <a:lvl8pPr algn="l">
+              <a:buNone/>
               <a:defRPr sz="3300" b="1">
                 <a:solidFill>
                   <a:srgbClr val="152B4B"/>
@@ -4477,6 +4485,7 @@
               </a:defRPr>
             </a:lvl8pPr>
             <a:lvl9pPr algn="l">
+              <a:buNone/>
               <a:defRPr sz="3300" b="1">
                 <a:solidFill>
                   <a:srgbClr val="152B4B"/>
@@ -4538,6 +4547,7 @@
               </a:defRPr>
             </a:defPPr>
             <a:lvl1pPr algn="l">
+              <a:buNone/>
               <a:defRPr sz="1275" b="0">
                 <a:solidFill>
                   <a:srgbClr val="B9C9E7"/>
@@ -4548,6 +4558,7 @@
               </a:defRPr>
             </a:lvl1pPr>
             <a:lvl2pPr algn="l">
+              <a:buNone/>
               <a:defRPr sz="1275" b="0">
                 <a:solidFill>
                   <a:srgbClr val="B9C9E7"/>
@@ -4558,6 +4569,7 @@
               </a:defRPr>
             </a:lvl2pPr>
             <a:lvl3pPr algn="l">
+              <a:buNone/>
               <a:defRPr sz="1275" b="0">
                 <a:solidFill>
                   <a:srgbClr val="B9C9E7"/>
@@ -4568,6 +4580,7 @@
               </a:defRPr>
             </a:lvl3pPr>
             <a:lvl4pPr algn="l">
+              <a:buNone/>
               <a:defRPr sz="1275" b="0">
                 <a:solidFill>
                   <a:srgbClr val="B9C9E7"/>
@@ -4578,6 +4591,7 @@
               </a:defRPr>
             </a:lvl4pPr>
             <a:lvl5pPr algn="l">
+              <a:buNone/>
               <a:defRPr sz="1275" b="0">
                 <a:solidFill>
                   <a:srgbClr val="B9C9E7"/>
@@ -4588,6 +4602,7 @@
               </a:defRPr>
             </a:lvl5pPr>
             <a:lvl6pPr algn="l">
+              <a:buNone/>
               <a:defRPr sz="1275" b="0">
                 <a:solidFill>
                   <a:srgbClr val="B9C9E7"/>
@@ -4598,6 +4613,7 @@
               </a:defRPr>
             </a:lvl6pPr>
             <a:lvl7pPr algn="l">
+              <a:buNone/>
               <a:defRPr sz="1275" b="0">
                 <a:solidFill>
                   <a:srgbClr val="B9C9E7"/>
@@ -4608,6 +4624,7 @@
               </a:defRPr>
             </a:lvl7pPr>
             <a:lvl8pPr algn="l">
+              <a:buNone/>
               <a:defRPr sz="1275" b="0">
                 <a:solidFill>
                   <a:srgbClr val="B9C9E7"/>
@@ -4618,6 +4635,7 @@
               </a:defRPr>
             </a:lvl8pPr>
             <a:lvl9pPr algn="l">
+              <a:buNone/>
               <a:defRPr sz="1275" b="0">
                 <a:solidFill>
                   <a:srgbClr val="B9C9E7"/>
@@ -4630,6 +4648,7 @@
           </a:lstStyle>
           <a:p xmlns:a="http://schemas.openxmlformats.org/drawingml/2006/main">
             <a:pPr algn="l">
+              <a:buNone/>
               <a:defRPr sz="1275" b="0">
                 <a:solidFill>
                   <a:srgbClr val="53647C"/>
@@ -4697,6 +4716,7 @@
               </a:defRPr>
             </a:defPPr>
             <a:lvl1pPr algn="r">
+              <a:buNone/>
               <a:defRPr sz="1350" b="0">
                 <a:solidFill>
                   <a:srgbClr val="B9C9E7"/>
@@ -4707,6 +4727,7 @@
               </a:defRPr>
             </a:lvl1pPr>
             <a:lvl2pPr algn="r">
+              <a:buNone/>
               <a:defRPr sz="1350" b="0">
                 <a:solidFill>
                   <a:srgbClr val="B9C9E7"/>
@@ -4717,6 +4738,7 @@
               </a:defRPr>
             </a:lvl2pPr>
             <a:lvl3pPr algn="r">
+              <a:buNone/>
               <a:defRPr sz="1350" b="0">
                 <a:solidFill>
                   <a:srgbClr val="B9C9E7"/>
@@ -4727,6 +4749,7 @@
               </a:defRPr>
             </a:lvl3pPr>
             <a:lvl4pPr algn="r">
+              <a:buNone/>
               <a:defRPr sz="1350" b="0">
                 <a:solidFill>
                   <a:srgbClr val="B9C9E7"/>
@@ -4737,6 +4760,7 @@
               </a:defRPr>
             </a:lvl4pPr>
             <a:lvl5pPr algn="r">
+              <a:buNone/>
               <a:defRPr sz="1350" b="0">
                 <a:solidFill>
                   <a:srgbClr val="B9C9E7"/>
@@ -4747,6 +4771,7 @@
               </a:defRPr>
             </a:lvl5pPr>
             <a:lvl6pPr algn="r">
+              <a:buNone/>
               <a:defRPr sz="1350" b="0">
                 <a:solidFill>
                   <a:srgbClr val="B9C9E7"/>
@@ -4757,6 +4782,7 @@
               </a:defRPr>
             </a:lvl6pPr>
             <a:lvl7pPr algn="r">
+              <a:buNone/>
               <a:defRPr sz="1350" b="0">
                 <a:solidFill>
                   <a:srgbClr val="B9C9E7"/>
@@ -4767,6 +4793,7 @@
               </a:defRPr>
             </a:lvl7pPr>
             <a:lvl8pPr algn="r">
+              <a:buNone/>
               <a:defRPr sz="1350" b="0">
                 <a:solidFill>
                   <a:srgbClr val="B9C9E7"/>
@@ -4777,6 +4804,7 @@
               </a:defRPr>
             </a:lvl8pPr>
             <a:lvl9pPr algn="r">
+              <a:buNone/>
               <a:defRPr sz="1350" b="0">
                 <a:solidFill>
                   <a:srgbClr val="B9C9E7"/>
@@ -4789,6 +4817,7 @@
           </a:lstStyle>
           <a:p xmlns:a="http://schemas.openxmlformats.org/drawingml/2006/main">
             <a:pPr algn="r">
+              <a:buNone/>
               <a:defRPr sz="1350" b="0">
                 <a:solidFill>
                   <a:srgbClr val="285AD6"/>
@@ -4856,6 +4885,7 @@
               </a:defRPr>
             </a:defPPr>
             <a:lvl1pPr algn="l">
+              <a:buNone/>
               <a:defRPr sz="6300" b="1">
                 <a:solidFill>
                   <a:srgbClr val="FFFFFF"/>
@@ -4866,6 +4896,7 @@
               </a:defRPr>
             </a:lvl1pPr>
             <a:lvl2pPr algn="l">
+              <a:buNone/>
               <a:defRPr sz="6300" b="1">
                 <a:solidFill>
                   <a:srgbClr val="FFFFFF"/>
@@ -4876,6 +4907,7 @@
               </a:defRPr>
             </a:lvl2pPr>
             <a:lvl3pPr algn="l">
+              <a:buNone/>
               <a:defRPr sz="6300" b="1">
                 <a:solidFill>
                   <a:srgbClr val="FFFFFF"/>
@@ -4886,6 +4918,7 @@
               </a:defRPr>
             </a:lvl3pPr>
             <a:lvl4pPr algn="l">
+              <a:buNone/>
               <a:defRPr sz="6300" b="1">
                 <a:solidFill>
                   <a:srgbClr val="FFFFFF"/>
@@ -4896,6 +4929,7 @@
               </a:defRPr>
             </a:lvl4pPr>
             <a:lvl5pPr algn="l">
+              <a:buNone/>
               <a:defRPr sz="6300" b="1">
                 <a:solidFill>
                   <a:srgbClr val="FFFFFF"/>
@@ -4906,6 +4940,7 @@
               </a:defRPr>
             </a:lvl5pPr>
             <a:lvl6pPr algn="l">
+              <a:buNone/>
               <a:defRPr sz="6300" b="1">
                 <a:solidFill>
                   <a:srgbClr val="FFFFFF"/>
@@ -4916,6 +4951,7 @@
               </a:defRPr>
             </a:lvl6pPr>
             <a:lvl7pPr algn="l">
+              <a:buNone/>
               <a:defRPr sz="6300" b="1">
                 <a:solidFill>
                   <a:srgbClr val="FFFFFF"/>
@@ -4926,6 +4962,7 @@
               </a:defRPr>
             </a:lvl7pPr>
             <a:lvl8pPr algn="l">
+              <a:buNone/>
               <a:defRPr sz="6300" b="1">
                 <a:solidFill>
                   <a:srgbClr val="FFFFFF"/>
@@ -4936,6 +4973,7 @@
               </a:defRPr>
             </a:lvl8pPr>
             <a:lvl9pPr algn="l">
+              <a:buNone/>
               <a:defRPr sz="6300" b="1">
                 <a:solidFill>
                   <a:srgbClr val="FFFFFF"/>
@@ -4948,6 +4986,7 @@
           </a:lstStyle>
           <a:p xmlns:a="http://schemas.openxmlformats.org/drawingml/2006/main">
             <a:pPr algn="l">
+              <a:buNone/>
               <a:defRPr sz="6300" b="1">
                 <a:solidFill>
                   <a:srgbClr val="FFFFFF"/>
@@ -5015,6 +5054,7 @@
               </a:defRPr>
             </a:defPPr>
             <a:lvl1pPr algn="l">
+              <a:buNone/>
               <a:defRPr sz="2550" b="0">
                 <a:solidFill>
                   <a:srgbClr val="DCE7FF"/>
@@ -5025,6 +5065,7 @@
               </a:defRPr>
             </a:lvl1pPr>
             <a:lvl2pPr algn="l">
+              <a:buNone/>
               <a:defRPr sz="2550" b="0">
                 <a:solidFill>
                   <a:srgbClr val="DCE7FF"/>
@@ -5035,6 +5076,7 @@
               </a:defRPr>
             </a:lvl2pPr>
             <a:lvl3pPr algn="l">
+              <a:buNone/>
               <a:defRPr sz="2550" b="0">
                 <a:solidFill>
                   <a:srgbClr val="DCE7FF"/>
@@ -5045,6 +5087,7 @@
               </a:defRPr>
             </a:lvl3pPr>
             <a:lvl4pPr algn="l">
+              <a:buNone/>
               <a:defRPr sz="2550" b="0">
                 <a:solidFill>
                   <a:srgbClr val="DCE7FF"/>
@@ -5055,6 +5098,7 @@
               </a:defRPr>
             </a:lvl4pPr>
             <a:lvl5pPr algn="l">
+              <a:buNone/>
               <a:defRPr sz="2550" b="0">
                 <a:solidFill>
                   <a:srgbClr val="DCE7FF"/>
@@ -5065,6 +5109,7 @@
               </a:defRPr>
             </a:lvl5pPr>
             <a:lvl6pPr algn="l">
+              <a:buNone/>
               <a:defRPr sz="2550" b="0">
                 <a:solidFill>
                   <a:srgbClr val="DCE7FF"/>
@@ -5075,6 +5120,7 @@
               </a:defRPr>
             </a:lvl6pPr>
             <a:lvl7pPr algn="l">
+              <a:buNone/>
               <a:defRPr sz="2550" b="0">
                 <a:solidFill>
                   <a:srgbClr val="DCE7FF"/>
@@ -5085,6 +5131,7 @@
               </a:defRPr>
             </a:lvl7pPr>
             <a:lvl8pPr algn="l">
+              <a:buNone/>
               <a:defRPr sz="2550" b="0">
                 <a:solidFill>
                   <a:srgbClr val="DCE7FF"/>
@@ -5095,6 +5142,7 @@
               </a:defRPr>
             </a:lvl8pPr>
             <a:lvl9pPr algn="l">
+              <a:buNone/>
               <a:defRPr sz="2550" b="0">
                 <a:solidFill>
                   <a:srgbClr val="DCE7FF"/>
@@ -5107,6 +5155,7 @@
           </a:lstStyle>
           <a:p xmlns:a="http://schemas.openxmlformats.org/drawingml/2006/main">
             <a:pPr algn="l">
+              <a:buNone/>
               <a:defRPr sz="2550" b="0">
                 <a:solidFill>
                   <a:srgbClr val="DCE7FF"/>
@@ -5174,6 +5223,7 @@
               </a:defRPr>
             </a:defPPr>
             <a:lvl1pPr algn="l">
+              <a:buNone/>
               <a:defRPr sz="2100" b="0">
                 <a:solidFill>
                   <a:srgbClr val="FFFFFF"/>
@@ -5184,6 +5234,7 @@
               </a:defRPr>
             </a:lvl1pPr>
             <a:lvl2pPr algn="l">
+              <a:buNone/>
               <a:defRPr sz="2100" b="0">
                 <a:solidFill>
                   <a:srgbClr val="FFFFFF"/>
@@ -5194,6 +5245,7 @@
               </a:defRPr>
             </a:lvl2pPr>
             <a:lvl3pPr algn="l">
+              <a:buNone/>
               <a:defRPr sz="2100" b="0">
                 <a:solidFill>
                   <a:srgbClr val="FFFFFF"/>
@@ -5204,6 +5256,7 @@
               </a:defRPr>
             </a:lvl3pPr>
             <a:lvl4pPr algn="l">
+              <a:buNone/>
               <a:defRPr sz="2100" b="0">
                 <a:solidFill>
                   <a:srgbClr val="FFFFFF"/>
@@ -5214,6 +5267,7 @@
               </a:defRPr>
             </a:lvl4pPr>
             <a:lvl5pPr algn="l">
+              <a:buNone/>
               <a:defRPr sz="2100" b="0">
                 <a:solidFill>
                   <a:srgbClr val="FFFFFF"/>
@@ -5224,6 +5278,7 @@
               </a:defRPr>
             </a:lvl5pPr>
             <a:lvl6pPr algn="l">
+              <a:buNone/>
               <a:defRPr sz="2100" b="0">
                 <a:solidFill>
                   <a:srgbClr val="FFFFFF"/>
@@ -5234,6 +5289,7 @@
               </a:defRPr>
             </a:lvl6pPr>
             <a:lvl7pPr algn="l">
+              <a:buNone/>
               <a:defRPr sz="2100" b="0">
                 <a:solidFill>
                   <a:srgbClr val="FFFFFF"/>
@@ -5244,6 +5300,7 @@
               </a:defRPr>
             </a:lvl7pPr>
             <a:lvl8pPr algn="l">
+              <a:buNone/>
               <a:defRPr sz="2100" b="0">
                 <a:solidFill>
                   <a:srgbClr val="FFFFFF"/>
@@ -5254,6 +5311,7 @@
               </a:defRPr>
             </a:lvl8pPr>
             <a:lvl9pPr algn="l">
+              <a:buNone/>
               <a:defRPr sz="2100" b="0">
                 <a:solidFill>
                   <a:srgbClr val="FFFFFF"/>
@@ -5266,6 +5324,7 @@
           </a:lstStyle>
           <a:p xmlns:a="http://schemas.openxmlformats.org/drawingml/2006/main">
             <a:pPr algn="l">
+              <a:buNone/>
               <a:defRPr sz="2100" b="0">
                 <a:solidFill>
                   <a:srgbClr val="FFFFFF"/>
@@ -5333,6 +5392,7 @@
               </a:defRPr>
             </a:defPPr>
             <a:lvl1pPr algn="l">
+              <a:buNone/>
               <a:defRPr sz="1650" b="0">
                 <a:solidFill>
                   <a:srgbClr val="B9C9E7"/>
@@ -5343,6 +5403,7 @@
               </a:defRPr>
             </a:lvl1pPr>
             <a:lvl2pPr algn="l">
+              <a:buNone/>
               <a:defRPr sz="1650" b="0">
                 <a:solidFill>
                   <a:srgbClr val="B9C9E7"/>
@@ -5353,6 +5414,7 @@
               </a:defRPr>
             </a:lvl2pPr>
             <a:lvl3pPr algn="l">
+              <a:buNone/>
               <a:defRPr sz="1650" b="0">
                 <a:solidFill>
                   <a:srgbClr val="B9C9E7"/>
@@ -5363,6 +5425,7 @@
               </a:defRPr>
             </a:lvl3pPr>
             <a:lvl4pPr algn="l">
+              <a:buNone/>
               <a:defRPr sz="1650" b="0">
                 <a:solidFill>
                   <a:srgbClr val="B9C9E7"/>
@@ -5373,6 +5436,7 @@
               </a:defRPr>
             </a:lvl4pPr>
             <a:lvl5pPr algn="l">
+              <a:buNone/>
               <a:defRPr sz="1650" b="0">
                 <a:solidFill>
                   <a:srgbClr val="B9C9E7"/>
@@ -5383,6 +5447,7 @@
               </a:defRPr>
             </a:lvl5pPr>
             <a:lvl6pPr algn="l">
+              <a:buNone/>
               <a:defRPr sz="1650" b="0">
                 <a:solidFill>
                   <a:srgbClr val="B9C9E7"/>
@@ -5393,6 +5458,7 @@
               </a:defRPr>
             </a:lvl6pPr>
             <a:lvl7pPr algn="l">
+              <a:buNone/>
               <a:defRPr sz="1650" b="0">
                 <a:solidFill>
                   <a:srgbClr val="B9C9E7"/>
@@ -5403,6 +5469,7 @@
               </a:defRPr>
             </a:lvl7pPr>
             <a:lvl8pPr algn="l">
+              <a:buNone/>
               <a:defRPr sz="1650" b="0">
                 <a:solidFill>
                   <a:srgbClr val="B9C9E7"/>
@@ -5413,6 +5480,7 @@
               </a:defRPr>
             </a:lvl8pPr>
             <a:lvl9pPr algn="l">
+              <a:buNone/>
               <a:defRPr sz="1650" b="0">
                 <a:solidFill>
                   <a:srgbClr val="B9C9E7"/>
@@ -5425,6 +5493,7 @@
           </a:lstStyle>
           <a:p xmlns:a="http://schemas.openxmlformats.org/drawingml/2006/main">
             <a:pPr algn="l">
+              <a:buNone/>
               <a:defRPr sz="1650" b="0">
                 <a:solidFill>
                   <a:srgbClr val="B9C9E7"/>
@@ -5492,6 +5561,7 @@
               </a:defRPr>
             </a:defPPr>
             <a:lvl1pPr algn="l">
+              <a:buNone/>
               <a:defRPr sz="1875" b="0">
                 <a:solidFill>
                   <a:srgbClr val="DCE7FF"/>
@@ -5502,6 +5572,7 @@
               </a:defRPr>
             </a:lvl1pPr>
             <a:lvl2pPr algn="l">
+              <a:buNone/>
               <a:defRPr sz="1875" b="0">
                 <a:solidFill>
                   <a:srgbClr val="DCE7FF"/>
@@ -5512,6 +5583,7 @@
               </a:defRPr>
             </a:lvl2pPr>
             <a:lvl3pPr algn="l">
+              <a:buNone/>
               <a:defRPr sz="1875" b="0">
                 <a:solidFill>
                   <a:srgbClr val="DCE7FF"/>
@@ -5522,6 +5594,7 @@
               </a:defRPr>
             </a:lvl3pPr>
             <a:lvl4pPr algn="l">
+              <a:buNone/>
               <a:defRPr sz="1875" b="0">
                 <a:solidFill>
                   <a:srgbClr val="DCE7FF"/>
@@ -5532,6 +5605,7 @@
               </a:defRPr>
             </a:lvl4pPr>
             <a:lvl5pPr algn="l">
+              <a:buNone/>
               <a:defRPr sz="1875" b="0">
                 <a:solidFill>
                   <a:srgbClr val="DCE7FF"/>
@@ -5542,6 +5616,7 @@
               </a:defRPr>
             </a:lvl5pPr>
             <a:lvl6pPr algn="l">
+              <a:buNone/>
               <a:defRPr sz="1875" b="0">
                 <a:solidFill>
                   <a:srgbClr val="DCE7FF"/>
@@ -5552,6 +5627,7 @@
               </a:defRPr>
             </a:lvl6pPr>
             <a:lvl7pPr algn="l">
+              <a:buNone/>
               <a:defRPr sz="1875" b="0">
                 <a:solidFill>
                   <a:srgbClr val="DCE7FF"/>
@@ -5562,6 +5638,7 @@
               </a:defRPr>
             </a:lvl7pPr>
             <a:lvl8pPr algn="l">
+              <a:buNone/>
               <a:defRPr sz="1875" b="0">
                 <a:solidFill>
                   <a:srgbClr val="DCE7FF"/>
@@ -5572,6 +5649,7 @@
               </a:defRPr>
             </a:lvl8pPr>
             <a:lvl9pPr algn="l">
+              <a:buNone/>
               <a:defRPr sz="1875" b="0">
                 <a:solidFill>
                   <a:srgbClr val="DCE7FF"/>
@@ -5584,6 +5662,7 @@
           </a:lstStyle>
           <a:p xmlns:a="http://schemas.openxmlformats.org/drawingml/2006/main">
             <a:pPr algn="l">
+              <a:buNone/>
               <a:defRPr sz="1875" b="0">
                 <a:solidFill>
                   <a:srgbClr val="DCE7FF"/>
@@ -5680,6 +5759,7 @@
               </a:defRPr>
             </a:defPPr>
             <a:lvl1pPr algn="l">
+              <a:buNone/>
               <a:defRPr sz="3300" b="1">
                 <a:solidFill>
                   <a:srgbClr val="152B4B"/>
@@ -5690,6 +5770,7 @@
               </a:defRPr>
             </a:lvl1pPr>
             <a:lvl2pPr algn="l">
+              <a:buNone/>
               <a:defRPr sz="3300" b="1">
                 <a:solidFill>
                   <a:srgbClr val="152B4B"/>
@@ -5700,6 +5781,7 @@
               </a:defRPr>
             </a:lvl2pPr>
             <a:lvl3pPr algn="l">
+              <a:buNone/>
               <a:defRPr sz="3300" b="1">
                 <a:solidFill>
                   <a:srgbClr val="152B4B"/>
@@ -5710,6 +5792,7 @@
               </a:defRPr>
             </a:lvl3pPr>
             <a:lvl4pPr algn="l">
+              <a:buNone/>
               <a:defRPr sz="3300" b="1">
                 <a:solidFill>
                   <a:srgbClr val="152B4B"/>
@@ -5720,6 +5803,7 @@
               </a:defRPr>
             </a:lvl4pPr>
             <a:lvl5pPr algn="l">
+              <a:buNone/>
               <a:defRPr sz="3300" b="1">
                 <a:solidFill>
                   <a:srgbClr val="152B4B"/>
@@ -5730,6 +5814,7 @@
               </a:defRPr>
             </a:lvl5pPr>
             <a:lvl6pPr algn="l">
+              <a:buNone/>
               <a:defRPr sz="3300" b="1">
                 <a:solidFill>
                   <a:srgbClr val="152B4B"/>
@@ -5740,6 +5825,7 @@
               </a:defRPr>
             </a:lvl6pPr>
             <a:lvl7pPr algn="l">
+              <a:buNone/>
               <a:defRPr sz="3300" b="1">
                 <a:solidFill>
                   <a:srgbClr val="152B4B"/>
@@ -5750,6 +5836,7 @@
               </a:defRPr>
             </a:lvl7pPr>
             <a:lvl8pPr algn="l">
+              <a:buNone/>
               <a:defRPr sz="3300" b="1">
                 <a:solidFill>
                   <a:srgbClr val="152B4B"/>
@@ -5760,6 +5847,7 @@
               </a:defRPr>
             </a:lvl8pPr>
             <a:lvl9pPr algn="l">
+              <a:buNone/>
               <a:defRPr sz="3300" b="1">
                 <a:solidFill>
                   <a:srgbClr val="152B4B"/>
@@ -5772,6 +5860,7 @@
           </a:lstStyle>
           <a:p xmlns:a="http://schemas.openxmlformats.org/drawingml/2006/main">
             <a:pPr algn="l">
+              <a:buNone/>
               <a:defRPr sz="3300" b="1">
                 <a:solidFill>
                   <a:srgbClr val="152B4B"/>
@@ -5839,6 +5928,7 @@
               </a:defRPr>
             </a:defPPr>
             <a:lvl1pPr algn="l">
+              <a:buNone/>
               <a:defRPr sz="1875" b="0">
                 <a:solidFill>
                   <a:srgbClr val="53647C"/>
@@ -5849,6 +5939,7 @@
               </a:defRPr>
             </a:lvl1pPr>
             <a:lvl2pPr algn="l">
+              <a:buNone/>
               <a:defRPr sz="1875" b="0">
                 <a:solidFill>
                   <a:srgbClr val="53647C"/>
@@ -5859,6 +5950,7 @@
               </a:defRPr>
             </a:lvl2pPr>
             <a:lvl3pPr algn="l">
+              <a:buNone/>
               <a:defRPr sz="1875" b="0">
                 <a:solidFill>
                   <a:srgbClr val="53647C"/>
@@ -5869,6 +5961,7 @@
               </a:defRPr>
             </a:lvl3pPr>
             <a:lvl4pPr algn="l">
+              <a:buNone/>
               <a:defRPr sz="1875" b="0">
                 <a:solidFill>
                   <a:srgbClr val="53647C"/>
@@ -5879,6 +5972,7 @@
               </a:defRPr>
             </a:lvl4pPr>
             <a:lvl5pPr algn="l">
+              <a:buNone/>
               <a:defRPr sz="1875" b="0">
                 <a:solidFill>
                   <a:srgbClr val="53647C"/>
@@ -5889,6 +5983,7 @@
               </a:defRPr>
             </a:lvl5pPr>
             <a:lvl6pPr algn="l">
+              <a:buNone/>
               <a:defRPr sz="1875" b="0">
                 <a:solidFill>
                   <a:srgbClr val="53647C"/>
@@ -5899,6 +5994,7 @@
               </a:defRPr>
             </a:lvl6pPr>
             <a:lvl7pPr algn="l">
+              <a:buNone/>
               <a:defRPr sz="1875" b="0">
                 <a:solidFill>
                   <a:srgbClr val="53647C"/>
@@ -5909,6 +6005,7 @@
               </a:defRPr>
             </a:lvl7pPr>
             <a:lvl8pPr algn="l">
+              <a:buNone/>
               <a:defRPr sz="1875" b="0">
                 <a:solidFill>
                   <a:srgbClr val="53647C"/>
@@ -5919,6 +6016,7 @@
               </a:defRPr>
             </a:lvl8pPr>
             <a:lvl9pPr algn="l">
+              <a:buNone/>
               <a:defRPr sz="1875" b="0">
                 <a:solidFill>
                   <a:srgbClr val="53647C"/>
@@ -5931,6 +6029,7 @@
           </a:lstStyle>
           <a:p xmlns:a="http://schemas.openxmlformats.org/drawingml/2006/main">
             <a:pPr algn="l">
+              <a:buNone/>
               <a:defRPr sz="1875" b="0">
                 <a:solidFill>
                   <a:srgbClr val="53647C"/>
@@ -5998,6 +6097,7 @@
               </a:defRPr>
             </a:defPPr>
             <a:lvl1pPr algn="l">
+              <a:buNone/>
               <a:defRPr sz="1275" b="0">
                 <a:solidFill>
                   <a:srgbClr val="53647C"/>
@@ -6008,6 +6108,7 @@
               </a:defRPr>
             </a:lvl1pPr>
             <a:lvl2pPr algn="l">
+              <a:buNone/>
               <a:defRPr sz="1275" b="0">
                 <a:solidFill>
                   <a:srgbClr val="53647C"/>
@@ -6018,6 +6119,7 @@
               </a:defRPr>
             </a:lvl2pPr>
             <a:lvl3pPr algn="l">
+              <a:buNone/>
               <a:defRPr sz="1275" b="0">
                 <a:solidFill>
                   <a:srgbClr val="53647C"/>
@@ -6028,6 +6130,7 @@
               </a:defRPr>
             </a:lvl3pPr>
             <a:lvl4pPr algn="l">
+              <a:buNone/>
               <a:defRPr sz="1275" b="0">
                 <a:solidFill>
                   <a:srgbClr val="53647C"/>
@@ -6038,6 +6141,7 @@
               </a:defRPr>
             </a:lvl4pPr>
             <a:lvl5pPr algn="l">
+              <a:buNone/>
               <a:defRPr sz="1275" b="0">
                 <a:solidFill>
                   <a:srgbClr val="53647C"/>
@@ -6048,6 +6152,7 @@
               </a:defRPr>
             </a:lvl5pPr>
             <a:lvl6pPr algn="l">
+              <a:buNone/>
               <a:defRPr sz="1275" b="0">
                 <a:solidFill>
                   <a:srgbClr val="53647C"/>
@@ -6058,6 +6163,7 @@
               </a:defRPr>
             </a:lvl6pPr>
             <a:lvl7pPr algn="l">
+              <a:buNone/>
               <a:defRPr sz="1275" b="0">
                 <a:solidFill>
                   <a:srgbClr val="53647C"/>
@@ -6068,6 +6174,7 @@
               </a:defRPr>
             </a:lvl7pPr>
             <a:lvl8pPr algn="l">
+              <a:buNone/>
               <a:defRPr sz="1275" b="0">
                 <a:solidFill>
                   <a:srgbClr val="53647C"/>
@@ -6078,6 +6185,7 @@
               </a:defRPr>
             </a:lvl8pPr>
             <a:lvl9pPr algn="l">
+              <a:buNone/>
               <a:defRPr sz="1275" b="0">
                 <a:solidFill>
                   <a:srgbClr val="53647C"/>
@@ -6090,6 +6198,7 @@
           </a:lstStyle>
           <a:p xmlns:a="http://schemas.openxmlformats.org/drawingml/2006/main">
             <a:pPr algn="l">
+              <a:buNone/>
               <a:defRPr sz="1275" b="0">
                 <a:solidFill>
                   <a:srgbClr val="53647C"/>
@@ -6157,6 +6266,7 @@
               </a:defRPr>
             </a:defPPr>
             <a:lvl1pPr algn="r">
+              <a:buNone/>
               <a:defRPr sz="1350" b="0">
                 <a:solidFill>
                   <a:srgbClr val="285AD6"/>
@@ -6167,6 +6277,7 @@
               </a:defRPr>
             </a:lvl1pPr>
             <a:lvl2pPr algn="r">
+              <a:buNone/>
               <a:defRPr sz="1350" b="0">
                 <a:solidFill>
                   <a:srgbClr val="285AD6"/>
@@ -6177,6 +6288,7 @@
               </a:defRPr>
             </a:lvl2pPr>
             <a:lvl3pPr algn="r">
+              <a:buNone/>
               <a:defRPr sz="1350" b="0">
                 <a:solidFill>
                   <a:srgbClr val="285AD6"/>
@@ -6187,6 +6299,7 @@
               </a:defRPr>
             </a:lvl3pPr>
             <a:lvl4pPr algn="r">
+              <a:buNone/>
               <a:defRPr sz="1350" b="0">
                 <a:solidFill>
                   <a:srgbClr val="285AD6"/>
@@ -6197,6 +6310,7 @@
               </a:defRPr>
             </a:lvl4pPr>
             <a:lvl5pPr algn="r">
+              <a:buNone/>
               <a:defRPr sz="1350" b="0">
                 <a:solidFill>
                   <a:srgbClr val="285AD6"/>
@@ -6207,6 +6321,7 @@
               </a:defRPr>
             </a:lvl5pPr>
             <a:lvl6pPr algn="r">
+              <a:buNone/>
               <a:defRPr sz="1350" b="0">
                 <a:solidFill>
                   <a:srgbClr val="285AD6"/>
@@ -6217,6 +6332,7 @@
               </a:defRPr>
             </a:lvl6pPr>
             <a:lvl7pPr algn="r">
+              <a:buNone/>
               <a:defRPr sz="1350" b="0">
                 <a:solidFill>
                   <a:srgbClr val="285AD6"/>
@@ -6227,6 +6343,7 @@
               </a:defRPr>
             </a:lvl7pPr>
             <a:lvl8pPr algn="r">
+              <a:buNone/>
               <a:defRPr sz="1350" b="0">
                 <a:solidFill>
                   <a:srgbClr val="285AD6"/>
@@ -6237,6 +6354,7 @@
               </a:defRPr>
             </a:lvl8pPr>
             <a:lvl9pPr algn="r">
+              <a:buNone/>
               <a:defRPr sz="1350" b="0">
                 <a:solidFill>
                   <a:srgbClr val="285AD6"/>
@@ -6249,6 +6367,7 @@
           </a:lstStyle>
           <a:p xmlns:a="http://schemas.openxmlformats.org/drawingml/2006/main">
             <a:pPr algn="r">
+              <a:buNone/>
               <a:defRPr sz="1350" b="0">
                 <a:solidFill>
                   <a:srgbClr val="285AD6"/>
@@ -6277,7 +6396,7 @@
           <p:cNvPr id="5" name="">
             <a:extLst xmlns:a="http://schemas.openxmlformats.org/drawingml/2006/main">
               <a:ext uri="{FF2B5EF4-FFF2-40B4-BE49-F238E27FC236}">
-                <a16:creationId xmlns:a16="http://schemas.microsoft.com/office/drawing/2014/main" id="{4C2FCDC4-A1A7-49AD-9F74-DEDB3072D5C0}"/>
+                <a16:creationId xmlns:a16="http://schemas.microsoft.com/office/drawing/2014/main" id="{141E1353-F46E-4BF0-B456-6234E181A05B}"/>
               </a:ext>
             </a:extLst>
           </p:cNvPr>
@@ -6305,7 +6424,9 @@
                     </a:bodyPr>
                     <a:lstStyle/>
                     <a:p>
-                      <a:pPr algn="ctr"/>
+                      <a:pPr algn="ctr">
+                        <a:buNone/>
+                      </a:pPr>
                       <a:r>
                         <a:rPr sz="1725" b="1">
                           <a:solidFill>
@@ -6356,7 +6477,9 @@
                     </a:bodyPr>
                     <a:lstStyle/>
                     <a:p>
-                      <a:pPr algn="ctr"/>
+                      <a:pPr algn="ctr">
+                        <a:buNone/>
+                      </a:pPr>
                       <a:r>
                         <a:rPr sz="1725" b="1">
                           <a:solidFill>
@@ -6401,7 +6524,9 @@
                     </a:bodyPr>
                     <a:lstStyle/>
                     <a:p>
-                      <a:pPr algn="ctr"/>
+                      <a:pPr algn="ctr">
+                        <a:buNone/>
+                      </a:pPr>
                       <a:r>
                         <a:rPr sz="1725" b="1">
                           <a:solidFill>
@@ -6448,7 +6573,9 @@
                     </a:bodyPr>
                     <a:lstStyle/>
                     <a:p>
-                      <a:pPr algn="ctr"/>
+                      <a:pPr algn="ctr">
+                        <a:buNone/>
+                      </a:pPr>
                       <a:r>
                         <a:rPr sz="1725" b="0">
                           <a:solidFill>
@@ -6493,7 +6620,9 @@
                     </a:bodyPr>
                     <a:lstStyle/>
                     <a:p>
-                      <a:pPr algn="ctr"/>
+                      <a:pPr algn="ctr">
+                        <a:buNone/>
+                      </a:pPr>
                       <a:r>
                         <a:rPr sz="1725" b="0">
                           <a:solidFill>
@@ -6532,7 +6661,9 @@
                     </a:bodyPr>
                     <a:lstStyle/>
                     <a:p>
-                      <a:pPr algn="ctr"/>
+                      <a:pPr algn="ctr">
+                        <a:buNone/>
+                      </a:pPr>
                       <a:r>
                         <a:rPr sz="1725" b="0">
                           <a:solidFill>
@@ -6573,7 +6704,9 @@
                     </a:bodyPr>
                     <a:lstStyle/>
                     <a:p>
-                      <a:pPr algn="ctr"/>
+                      <a:pPr algn="ctr">
+                        <a:buNone/>
+                      </a:pPr>
                       <a:r>
                         <a:rPr sz="1725" b="0">
                           <a:solidFill>
@@ -6618,7 +6751,9 @@
                     </a:bodyPr>
                     <a:lstStyle/>
                     <a:p>
-                      <a:pPr algn="ctr"/>
+                      <a:pPr algn="ctr">
+                        <a:buNone/>
+                      </a:pPr>
                       <a:r>
                         <a:rPr sz="1725" b="0">
                           <a:solidFill>
@@ -6657,7 +6792,9 @@
                     </a:bodyPr>
                     <a:lstStyle/>
                     <a:p>
-                      <a:pPr algn="ctr"/>
+                      <a:pPr algn="ctr">
+                        <a:buNone/>
+                      </a:pPr>
                       <a:r>
                         <a:rPr sz="1725" b="0">
                           <a:solidFill>
@@ -6698,7 +6835,9 @@
                     </a:bodyPr>
                     <a:lstStyle/>
                     <a:p>
-                      <a:pPr algn="ctr"/>
+                      <a:pPr algn="ctr">
+                        <a:buNone/>
+                      </a:pPr>
                       <a:r>
                         <a:rPr sz="1725" b="0">
                           <a:solidFill>
@@ -6743,7 +6882,9 @@
                     </a:bodyPr>
                     <a:lstStyle/>
                     <a:p>
-                      <a:pPr algn="ctr"/>
+                      <a:pPr algn="ctr">
+                        <a:buNone/>
+                      </a:pPr>
                       <a:r>
                         <a:rPr sz="1725" b="0">
                           <a:solidFill>
@@ -6782,7 +6923,9 @@
                     </a:bodyPr>
                     <a:lstStyle/>
                     <a:p>
-                      <a:pPr algn="ctr"/>
+                      <a:pPr algn="ctr">
+                        <a:buNone/>
+                      </a:pPr>
                       <a:r>
                         <a:rPr sz="1725" b="0">
                           <a:solidFill>
@@ -6823,7 +6966,9 @@
                     </a:bodyPr>
                     <a:lstStyle/>
                     <a:p>
-                      <a:pPr algn="ctr"/>
+                      <a:pPr algn="ctr">
+                        <a:buNone/>
+                      </a:pPr>
                       <a:r>
                         <a:rPr sz="1725" b="0">
                           <a:solidFill>
@@ -6868,7 +7013,9 @@
                     </a:bodyPr>
                     <a:lstStyle/>
                     <a:p>
-                      <a:pPr algn="ctr"/>
+                      <a:pPr algn="ctr">
+                        <a:buNone/>
+                      </a:pPr>
                       <a:r>
                         <a:rPr sz="1725" b="0">
                           <a:solidFill>
@@ -6907,7 +7054,9 @@
                     </a:bodyPr>
                     <a:lstStyle/>
                     <a:p>
-                      <a:pPr algn="ctr"/>
+                      <a:pPr algn="ctr">
+                        <a:buNone/>
+                      </a:pPr>
                       <a:r>
                         <a:rPr sz="1725" b="0">
                           <a:solidFill>
@@ -6948,7 +7097,9 @@
                     </a:bodyPr>
                     <a:lstStyle/>
                     <a:p>
-                      <a:pPr algn="ctr"/>
+                      <a:pPr algn="ctr">
+                        <a:buNone/>
+                      </a:pPr>
                       <a:r>
                         <a:rPr sz="1725" b="0">
                           <a:solidFill>
@@ -6993,7 +7144,9 @@
                     </a:bodyPr>
                     <a:lstStyle/>
                     <a:p>
-                      <a:pPr algn="ctr"/>
+                      <a:pPr algn="ctr">
+                        <a:buNone/>
+                      </a:pPr>
                       <a:r>
                         <a:rPr sz="1725" b="0">
                           <a:solidFill>
@@ -7032,7 +7185,9 @@
                     </a:bodyPr>
                     <a:lstStyle/>
                     <a:p>
-                      <a:pPr algn="ctr"/>
+                      <a:pPr algn="ctr">
+                        <a:buNone/>
+                      </a:pPr>
                       <a:r>
                         <a:rPr sz="1725" b="0">
                           <a:solidFill>
@@ -7113,6 +7268,7 @@
               </a:defRPr>
             </a:defPPr>
             <a:lvl1pPr algn="l">
+              <a:buNone/>
               <a:defRPr sz="1425" b="0">
                 <a:solidFill>
                   <a:srgbClr val="53647C"/>
@@ -7123,6 +7279,7 @@
               </a:defRPr>
             </a:lvl1pPr>
             <a:lvl2pPr algn="l">
+              <a:buNone/>
               <a:defRPr sz="1425" b="0">
                 <a:solidFill>
                   <a:srgbClr val="53647C"/>
@@ -7133,6 +7290,7 @@
               </a:defRPr>
             </a:lvl2pPr>
             <a:lvl3pPr algn="l">
+              <a:buNone/>
               <a:defRPr sz="1425" b="0">
                 <a:solidFill>
                   <a:srgbClr val="53647C"/>
@@ -7143,6 +7301,7 @@
               </a:defRPr>
             </a:lvl3pPr>
             <a:lvl4pPr algn="l">
+              <a:buNone/>
               <a:defRPr sz="1425" b="0">
                 <a:solidFill>
                   <a:srgbClr val="53647C"/>
@@ -7153,6 +7312,7 @@
               </a:defRPr>
             </a:lvl4pPr>
             <a:lvl5pPr algn="l">
+              <a:buNone/>
               <a:defRPr sz="1425" b="0">
                 <a:solidFill>
                   <a:srgbClr val="53647C"/>
@@ -7163,6 +7323,7 @@
               </a:defRPr>
             </a:lvl5pPr>
             <a:lvl6pPr algn="l">
+              <a:buNone/>
               <a:defRPr sz="1425" b="0">
                 <a:solidFill>
                   <a:srgbClr val="53647C"/>
@@ -7173,6 +7334,7 @@
               </a:defRPr>
             </a:lvl6pPr>
             <a:lvl7pPr algn="l">
+              <a:buNone/>
               <a:defRPr sz="1425" b="0">
                 <a:solidFill>
                   <a:srgbClr val="53647C"/>
@@ -7183,6 +7345,7 @@
               </a:defRPr>
             </a:lvl7pPr>
             <a:lvl8pPr algn="l">
+              <a:buNone/>
               <a:defRPr sz="1425" b="0">
                 <a:solidFill>
                   <a:srgbClr val="53647C"/>
@@ -7193,6 +7356,7 @@
               </a:defRPr>
             </a:lvl8pPr>
             <a:lvl9pPr algn="l">
+              <a:buNone/>
               <a:defRPr sz="1425" b="0">
                 <a:solidFill>
                   <a:srgbClr val="53647C"/>
@@ -7205,6 +7369,7 @@
           </a:lstStyle>
           <a:p xmlns:a="http://schemas.openxmlformats.org/drawingml/2006/main">
             <a:pPr algn="l">
+              <a:buNone/>
               <a:defRPr sz="1425" b="0">
                 <a:solidFill>
                   <a:srgbClr val="53647C"/>
@@ -7301,6 +7466,7 @@
               </a:defRPr>
             </a:defPPr>
             <a:lvl1pPr algn="l">
+              <a:buNone/>
               <a:defRPr sz="3300" b="1">
                 <a:solidFill>
                   <a:srgbClr val="152B4B"/>
@@ -7311,6 +7477,7 @@
               </a:defRPr>
             </a:lvl1pPr>
             <a:lvl2pPr algn="l">
+              <a:buNone/>
               <a:defRPr sz="3300" b="1">
                 <a:solidFill>
                   <a:srgbClr val="152B4B"/>
@@ -7321,6 +7488,7 @@
               </a:defRPr>
             </a:lvl2pPr>
             <a:lvl3pPr algn="l">
+              <a:buNone/>
               <a:defRPr sz="3300" b="1">
                 <a:solidFill>
                   <a:srgbClr val="152B4B"/>
@@ -7331,6 +7499,7 @@
               </a:defRPr>
             </a:lvl3pPr>
             <a:lvl4pPr algn="l">
+              <a:buNone/>
               <a:defRPr sz="3300" b="1">
                 <a:solidFill>
                   <a:srgbClr val="152B4B"/>
@@ -7341,6 +7510,7 @@
               </a:defRPr>
             </a:lvl4pPr>
             <a:lvl5pPr algn="l">
+              <a:buNone/>
               <a:defRPr sz="3300" b="1">
                 <a:solidFill>
                   <a:srgbClr val="152B4B"/>
@@ -7351,6 +7521,7 @@
               </a:defRPr>
             </a:lvl5pPr>
             <a:lvl6pPr algn="l">
+              <a:buNone/>
               <a:defRPr sz="3300" b="1">
                 <a:solidFill>
                   <a:srgbClr val="152B4B"/>
@@ -7361,6 +7532,7 @@
               </a:defRPr>
             </a:lvl6pPr>
             <a:lvl7pPr algn="l">
+              <a:buNone/>
               <a:defRPr sz="3300" b="1">
                 <a:solidFill>
                   <a:srgbClr val="152B4B"/>
@@ -7371,6 +7543,7 @@
               </a:defRPr>
             </a:lvl7pPr>
             <a:lvl8pPr algn="l">
+              <a:buNone/>
               <a:defRPr sz="3300" b="1">
                 <a:solidFill>
                   <a:srgbClr val="152B4B"/>
@@ -7381,6 +7554,7 @@
               </a:defRPr>
             </a:lvl8pPr>
             <a:lvl9pPr algn="l">
+              <a:buNone/>
               <a:defRPr sz="3300" b="1">
                 <a:solidFill>
                   <a:srgbClr val="152B4B"/>
@@ -7393,6 +7567,7 @@
           </a:lstStyle>
           <a:p xmlns:a="http://schemas.openxmlformats.org/drawingml/2006/main">
             <a:pPr algn="l">
+              <a:buNone/>
               <a:defRPr sz="3300" b="1">
                 <a:solidFill>
                   <a:srgbClr val="152B4B"/>
@@ -7460,6 +7635,7 @@
               </a:defRPr>
             </a:defPPr>
             <a:lvl1pPr algn="l">
+              <a:buNone/>
               <a:defRPr sz="1875" b="0">
                 <a:solidFill>
                   <a:srgbClr val="53647C"/>
@@ -7470,6 +7646,7 @@
               </a:defRPr>
             </a:lvl1pPr>
             <a:lvl2pPr algn="l">
+              <a:buNone/>
               <a:defRPr sz="1875" b="0">
                 <a:solidFill>
                   <a:srgbClr val="53647C"/>
@@ -7480,6 +7657,7 @@
               </a:defRPr>
             </a:lvl2pPr>
             <a:lvl3pPr algn="l">
+              <a:buNone/>
               <a:defRPr sz="1875" b="0">
                 <a:solidFill>
                   <a:srgbClr val="53647C"/>
@@ -7490,6 +7668,7 @@
               </a:defRPr>
             </a:lvl3pPr>
             <a:lvl4pPr algn="l">
+              <a:buNone/>
               <a:defRPr sz="1875" b="0">
                 <a:solidFill>
                   <a:srgbClr val="53647C"/>
@@ -7500,6 +7679,7 @@
               </a:defRPr>
             </a:lvl4pPr>
             <a:lvl5pPr algn="l">
+              <a:buNone/>
               <a:defRPr sz="1875" b="0">
                 <a:solidFill>
                   <a:srgbClr val="53647C"/>
@@ -7510,6 +7690,7 @@
               </a:defRPr>
             </a:lvl5pPr>
             <a:lvl6pPr algn="l">
+              <a:buNone/>
               <a:defRPr sz="1875" b="0">
                 <a:solidFill>
                   <a:srgbClr val="53647C"/>
@@ -7520,6 +7701,7 @@
               </a:defRPr>
             </a:lvl6pPr>
             <a:lvl7pPr algn="l">
+              <a:buNone/>
               <a:defRPr sz="1875" b="0">
                 <a:solidFill>
                   <a:srgbClr val="53647C"/>
@@ -7530,6 +7712,7 @@
               </a:defRPr>
             </a:lvl7pPr>
             <a:lvl8pPr algn="l">
+              <a:buNone/>
               <a:defRPr sz="1875" b="0">
                 <a:solidFill>
                   <a:srgbClr val="53647C"/>
@@ -7540,6 +7723,7 @@
               </a:defRPr>
             </a:lvl8pPr>
             <a:lvl9pPr algn="l">
+              <a:buNone/>
               <a:defRPr sz="1875" b="0">
                 <a:solidFill>
                   <a:srgbClr val="53647C"/>
@@ -7552,6 +7736,7 @@
           </a:lstStyle>
           <a:p xmlns:a="http://schemas.openxmlformats.org/drawingml/2006/main">
             <a:pPr algn="l">
+              <a:buNone/>
               <a:defRPr sz="1875" b="0">
                 <a:solidFill>
                   <a:srgbClr val="53647C"/>
@@ -7619,6 +7804,7 @@
               </a:defRPr>
             </a:defPPr>
             <a:lvl1pPr algn="l">
+              <a:buNone/>
               <a:defRPr sz="1275" b="0">
                 <a:solidFill>
                   <a:srgbClr val="53647C"/>
@@ -7629,6 +7815,7 @@
               </a:defRPr>
             </a:lvl1pPr>
             <a:lvl2pPr algn="l">
+              <a:buNone/>
               <a:defRPr sz="1275" b="0">
                 <a:solidFill>
                   <a:srgbClr val="53647C"/>
@@ -7639,6 +7826,7 @@
               </a:defRPr>
             </a:lvl2pPr>
             <a:lvl3pPr algn="l">
+              <a:buNone/>
               <a:defRPr sz="1275" b="0">
                 <a:solidFill>
                   <a:srgbClr val="53647C"/>
@@ -7649,6 +7837,7 @@
               </a:defRPr>
             </a:lvl3pPr>
             <a:lvl4pPr algn="l">
+              <a:buNone/>
               <a:defRPr sz="1275" b="0">
                 <a:solidFill>
                   <a:srgbClr val="53647C"/>
@@ -7659,6 +7848,7 @@
               </a:defRPr>
             </a:lvl4pPr>
             <a:lvl5pPr algn="l">
+              <a:buNone/>
               <a:defRPr sz="1275" b="0">
                 <a:solidFill>
                   <a:srgbClr val="53647C"/>
@@ -7669,6 +7859,7 @@
               </a:defRPr>
             </a:lvl5pPr>
             <a:lvl6pPr algn="l">
+              <a:buNone/>
               <a:defRPr sz="1275" b="0">
                 <a:solidFill>
                   <a:srgbClr val="53647C"/>
@@ -7679,6 +7870,7 @@
               </a:defRPr>
             </a:lvl6pPr>
             <a:lvl7pPr algn="l">
+              <a:buNone/>
               <a:defRPr sz="1275" b="0">
                 <a:solidFill>
                   <a:srgbClr val="53647C"/>
@@ -7689,6 +7881,7 @@
               </a:defRPr>
             </a:lvl7pPr>
             <a:lvl8pPr algn="l">
+              <a:buNone/>
               <a:defRPr sz="1275" b="0">
                 <a:solidFill>
                   <a:srgbClr val="53647C"/>
@@ -7699,6 +7892,7 @@
               </a:defRPr>
             </a:lvl8pPr>
             <a:lvl9pPr algn="l">
+              <a:buNone/>
               <a:defRPr sz="1275" b="0">
                 <a:solidFill>
                   <a:srgbClr val="53647C"/>
@@ -7711,6 +7905,7 @@
           </a:lstStyle>
           <a:p xmlns:a="http://schemas.openxmlformats.org/drawingml/2006/main">
             <a:pPr algn="l">
+              <a:buNone/>
               <a:defRPr sz="1275" b="0">
                 <a:solidFill>
                   <a:srgbClr val="53647C"/>
@@ -7778,6 +7973,7 @@
               </a:defRPr>
             </a:defPPr>
             <a:lvl1pPr algn="r">
+              <a:buNone/>
               <a:defRPr sz="1350" b="0">
                 <a:solidFill>
                   <a:srgbClr val="285AD6"/>
@@ -7788,6 +7984,7 @@
               </a:defRPr>
             </a:lvl1pPr>
             <a:lvl2pPr algn="r">
+              <a:buNone/>
               <a:defRPr sz="1350" b="0">
                 <a:solidFill>
                   <a:srgbClr val="285AD6"/>
@@ -7798,6 +7995,7 @@
               </a:defRPr>
             </a:lvl2pPr>
             <a:lvl3pPr algn="r">
+              <a:buNone/>
               <a:defRPr sz="1350" b="0">
                 <a:solidFill>
                   <a:srgbClr val="285AD6"/>
@@ -7808,6 +8006,7 @@
               </a:defRPr>
             </a:lvl3pPr>
             <a:lvl4pPr algn="r">
+              <a:buNone/>
               <a:defRPr sz="1350" b="0">
                 <a:solidFill>
                   <a:srgbClr val="285AD6"/>
@@ -7818,6 +8017,7 @@
               </a:defRPr>
             </a:lvl4pPr>
             <a:lvl5pPr algn="r">
+              <a:buNone/>
               <a:defRPr sz="1350" b="0">
                 <a:solidFill>
                   <a:srgbClr val="285AD6"/>
@@ -7828,6 +8028,7 @@
               </a:defRPr>
             </a:lvl5pPr>
             <a:lvl6pPr algn="r">
+              <a:buNone/>
               <a:defRPr sz="1350" b="0">
                 <a:solidFill>
                   <a:srgbClr val="285AD6"/>
@@ -7838,6 +8039,7 @@
               </a:defRPr>
             </a:lvl6pPr>
             <a:lvl7pPr algn="r">
+              <a:buNone/>
               <a:defRPr sz="1350" b="0">
                 <a:solidFill>
                   <a:srgbClr val="285AD6"/>
@@ -7848,6 +8050,7 @@
               </a:defRPr>
             </a:lvl7pPr>
             <a:lvl8pPr algn="r">
+              <a:buNone/>
               <a:defRPr sz="1350" b="0">
                 <a:solidFill>
                   <a:srgbClr val="285AD6"/>
@@ -7858,6 +8061,7 @@
               </a:defRPr>
             </a:lvl8pPr>
             <a:lvl9pPr algn="r">
+              <a:buNone/>
               <a:defRPr sz="1350" b="0">
                 <a:solidFill>
                   <a:srgbClr val="285AD6"/>
@@ -7870,6 +8074,7 @@
           </a:lstStyle>
           <a:p xmlns:a="http://schemas.openxmlformats.org/drawingml/2006/main">
             <a:pPr algn="r">
+              <a:buNone/>
               <a:defRPr sz="1350" b="0">
                 <a:solidFill>
                   <a:srgbClr val="285AD6"/>
@@ -7937,6 +8142,7 @@
               </a:defRPr>
             </a:defPPr>
             <a:lvl1pPr algn="l">
+              <a:buNone/>
               <a:defRPr sz="3225" b="1">
                 <a:solidFill>
                   <a:srgbClr val="285AD6"/>
@@ -7947,6 +8153,7 @@
               </a:defRPr>
             </a:lvl1pPr>
             <a:lvl2pPr algn="l">
+              <a:buNone/>
               <a:defRPr sz="3225" b="1">
                 <a:solidFill>
                   <a:srgbClr val="285AD6"/>
@@ -7957,6 +8164,7 @@
               </a:defRPr>
             </a:lvl2pPr>
             <a:lvl3pPr algn="l">
+              <a:buNone/>
               <a:defRPr sz="3225" b="1">
                 <a:solidFill>
                   <a:srgbClr val="285AD6"/>
@@ -7967,6 +8175,7 @@
               </a:defRPr>
             </a:lvl3pPr>
             <a:lvl4pPr algn="l">
+              <a:buNone/>
               <a:defRPr sz="3225" b="1">
                 <a:solidFill>
                   <a:srgbClr val="285AD6"/>
@@ -7977,6 +8186,7 @@
               </a:defRPr>
             </a:lvl4pPr>
             <a:lvl5pPr algn="l">
+              <a:buNone/>
               <a:defRPr sz="3225" b="1">
                 <a:solidFill>
                   <a:srgbClr val="285AD6"/>
@@ -7987,6 +8197,7 @@
               </a:defRPr>
             </a:lvl5pPr>
             <a:lvl6pPr algn="l">
+              <a:buNone/>
               <a:defRPr sz="3225" b="1">
                 <a:solidFill>
                   <a:srgbClr val="285AD6"/>
@@ -7997,6 +8208,7 @@
               </a:defRPr>
             </a:lvl6pPr>
             <a:lvl7pPr algn="l">
+              <a:buNone/>
               <a:defRPr sz="3225" b="1">
                 <a:solidFill>
                   <a:srgbClr val="285AD6"/>
@@ -8007,6 +8219,7 @@
               </a:defRPr>
             </a:lvl7pPr>
             <a:lvl8pPr algn="l">
+              <a:buNone/>
               <a:defRPr sz="3225" b="1">
                 <a:solidFill>
                   <a:srgbClr val="285AD6"/>
@@ -8017,6 +8230,7 @@
               </a:defRPr>
             </a:lvl8pPr>
             <a:lvl9pPr algn="l">
+              <a:buNone/>
               <a:defRPr sz="3225" b="1">
                 <a:solidFill>
                   <a:srgbClr val="285AD6"/>
@@ -8029,6 +8243,7 @@
           </a:lstStyle>
           <a:p xmlns:a="http://schemas.openxmlformats.org/drawingml/2006/main">
             <a:pPr algn="l">
+              <a:buNone/>
               <a:defRPr sz="3225" b="1">
                 <a:solidFill>
                   <a:srgbClr val="285AD6"/>
@@ -8096,6 +8311,7 @@
               </a:defRPr>
             </a:defPPr>
             <a:lvl1pPr algn="l">
+              <a:buNone/>
               <a:defRPr sz="2400" b="0">
                 <a:solidFill>
                   <a:srgbClr val="152B4B"/>
@@ -8106,6 +8322,7 @@
               </a:defRPr>
             </a:lvl1pPr>
             <a:lvl2pPr algn="l">
+              <a:buNone/>
               <a:defRPr sz="2400" b="0">
                 <a:solidFill>
                   <a:srgbClr val="152B4B"/>
@@ -8116,6 +8333,7 @@
               </a:defRPr>
             </a:lvl2pPr>
             <a:lvl3pPr algn="l">
+              <a:buNone/>
               <a:defRPr sz="2400" b="0">
                 <a:solidFill>
                   <a:srgbClr val="152B4B"/>
@@ -8126,6 +8344,7 @@
               </a:defRPr>
             </a:lvl3pPr>
             <a:lvl4pPr algn="l">
+              <a:buNone/>
               <a:defRPr sz="2400" b="0">
                 <a:solidFill>
                   <a:srgbClr val="152B4B"/>
@@ -8136,6 +8355,7 @@
               </a:defRPr>
             </a:lvl4pPr>
             <a:lvl5pPr algn="l">
+              <a:buNone/>
               <a:defRPr sz="2400" b="0">
                 <a:solidFill>
                   <a:srgbClr val="152B4B"/>
@@ -8146,6 +8366,7 @@
               </a:defRPr>
             </a:lvl5pPr>
             <a:lvl6pPr algn="l">
+              <a:buNone/>
               <a:defRPr sz="2400" b="0">
                 <a:solidFill>
                   <a:srgbClr val="152B4B"/>
@@ -8156,6 +8377,7 @@
               </a:defRPr>
             </a:lvl6pPr>
             <a:lvl7pPr algn="l">
+              <a:buNone/>
               <a:defRPr sz="2400" b="0">
                 <a:solidFill>
                   <a:srgbClr val="152B4B"/>
@@ -8166,6 +8388,7 @@
               </a:defRPr>
             </a:lvl7pPr>
             <a:lvl8pPr algn="l">
+              <a:buNone/>
               <a:defRPr sz="2400" b="0">
                 <a:solidFill>
                   <a:srgbClr val="152B4B"/>
@@ -8176,6 +8399,7 @@
               </a:defRPr>
             </a:lvl8pPr>
             <a:lvl9pPr algn="l">
+              <a:buNone/>
               <a:defRPr sz="2400" b="0">
                 <a:solidFill>
                   <a:srgbClr val="152B4B"/>
@@ -8188,6 +8412,7 @@
           </a:lstStyle>
           <a:p xmlns:a="http://schemas.openxmlformats.org/drawingml/2006/main">
             <a:pPr algn="l">
+              <a:buNone/>
               <a:defRPr sz="2400" b="0">
                 <a:solidFill>
                   <a:srgbClr val="152B4B"/>
@@ -8211,6 +8436,7 @@
           </a:p>
           <a:p xmlns:a="http://schemas.openxmlformats.org/drawingml/2006/main">
             <a:pPr algn="l">
+              <a:buNone/>
               <a:defRPr sz="2400" b="0">
                 <a:solidFill>
                   <a:srgbClr val="152B4B"/>
@@ -8278,6 +8504,7 @@
               </a:defRPr>
             </a:defPPr>
             <a:lvl1pPr algn="l">
+              <a:buNone/>
               <a:defRPr sz="1875" b="0">
                 <a:solidFill>
                   <a:srgbClr val="53647C"/>
@@ -8288,6 +8515,7 @@
               </a:defRPr>
             </a:lvl1pPr>
             <a:lvl2pPr algn="l">
+              <a:buNone/>
               <a:defRPr sz="1875" b="0">
                 <a:solidFill>
                   <a:srgbClr val="53647C"/>
@@ -8298,6 +8526,7 @@
               </a:defRPr>
             </a:lvl2pPr>
             <a:lvl3pPr algn="l">
+              <a:buNone/>
               <a:defRPr sz="1875" b="0">
                 <a:solidFill>
                   <a:srgbClr val="53647C"/>
@@ -8308,6 +8537,7 @@
               </a:defRPr>
             </a:lvl3pPr>
             <a:lvl4pPr algn="l">
+              <a:buNone/>
               <a:defRPr sz="1875" b="0">
                 <a:solidFill>
                   <a:srgbClr val="53647C"/>
@@ -8318,6 +8548,7 @@
               </a:defRPr>
             </a:lvl4pPr>
             <a:lvl5pPr algn="l">
+              <a:buNone/>
               <a:defRPr sz="1875" b="0">
                 <a:solidFill>
                   <a:srgbClr val="53647C"/>
@@ -8328,6 +8559,7 @@
               </a:defRPr>
             </a:lvl5pPr>
             <a:lvl6pPr algn="l">
+              <a:buNone/>
               <a:defRPr sz="1875" b="0">
                 <a:solidFill>
                   <a:srgbClr val="53647C"/>
@@ -8338,6 +8570,7 @@
               </a:defRPr>
             </a:lvl6pPr>
             <a:lvl7pPr algn="l">
+              <a:buNone/>
               <a:defRPr sz="1875" b="0">
                 <a:solidFill>
                   <a:srgbClr val="53647C"/>
@@ -8348,6 +8581,7 @@
               </a:defRPr>
             </a:lvl7pPr>
             <a:lvl8pPr algn="l">
+              <a:buNone/>
               <a:defRPr sz="1875" b="0">
                 <a:solidFill>
                   <a:srgbClr val="53647C"/>
@@ -8358,6 +8592,7 @@
               </a:defRPr>
             </a:lvl8pPr>
             <a:lvl9pPr algn="l">
+              <a:buNone/>
               <a:defRPr sz="1875" b="0">
                 <a:solidFill>
                   <a:srgbClr val="53647C"/>
@@ -8370,6 +8605,7 @@
           </a:lstStyle>
           <a:p xmlns:a="http://schemas.openxmlformats.org/drawingml/2006/main">
             <a:pPr algn="l">
+              <a:buNone/>
               <a:defRPr sz="1875" b="0">
                 <a:solidFill>
                   <a:srgbClr val="53647C"/>
@@ -8393,6 +8629,7 @@
           </a:p>
           <a:p xmlns:a="http://schemas.openxmlformats.org/drawingml/2006/main">
             <a:pPr algn="l">
+              <a:buNone/>
               <a:defRPr sz="1875" b="0">
                 <a:solidFill>
                   <a:srgbClr val="53647C"/>
@@ -8489,6 +8726,7 @@
               </a:defRPr>
             </a:defPPr>
             <a:lvl1pPr algn="l">
+              <a:buNone/>
               <a:defRPr sz="3300" b="1">
                 <a:solidFill>
                   <a:srgbClr val="152B4B"/>
@@ -8499,6 +8737,7 @@
               </a:defRPr>
             </a:lvl1pPr>
             <a:lvl2pPr algn="l">
+              <a:buNone/>
               <a:defRPr sz="3300" b="1">
                 <a:solidFill>
                   <a:srgbClr val="152B4B"/>
@@ -8509,6 +8748,7 @@
               </a:defRPr>
             </a:lvl2pPr>
             <a:lvl3pPr algn="l">
+              <a:buNone/>
               <a:defRPr sz="3300" b="1">
                 <a:solidFill>
                   <a:srgbClr val="152B4B"/>
@@ -8519,6 +8759,7 @@
               </a:defRPr>
             </a:lvl3pPr>
             <a:lvl4pPr algn="l">
+              <a:buNone/>
               <a:defRPr sz="3300" b="1">
                 <a:solidFill>
                   <a:srgbClr val="152B4B"/>
@@ -8529,6 +8770,7 @@
               </a:defRPr>
             </a:lvl4pPr>
             <a:lvl5pPr algn="l">
+              <a:buNone/>
               <a:defRPr sz="3300" b="1">
                 <a:solidFill>
                   <a:srgbClr val="152B4B"/>
@@ -8539,6 +8781,7 @@
               </a:defRPr>
             </a:lvl5pPr>
             <a:lvl6pPr algn="l">
+              <a:buNone/>
               <a:defRPr sz="3300" b="1">
                 <a:solidFill>
                   <a:srgbClr val="152B4B"/>
@@ -8549,6 +8792,7 @@
               </a:defRPr>
             </a:lvl6pPr>
             <a:lvl7pPr algn="l">
+              <a:buNone/>
               <a:defRPr sz="3300" b="1">
                 <a:solidFill>
                   <a:srgbClr val="152B4B"/>
@@ -8559,6 +8803,7 @@
               </a:defRPr>
             </a:lvl7pPr>
             <a:lvl8pPr algn="l">
+              <a:buNone/>
               <a:defRPr sz="3300" b="1">
                 <a:solidFill>
                   <a:srgbClr val="152B4B"/>
@@ -8569,6 +8814,7 @@
               </a:defRPr>
             </a:lvl8pPr>
             <a:lvl9pPr algn="l">
+              <a:buNone/>
               <a:defRPr sz="3300" b="1">
                 <a:solidFill>
                   <a:srgbClr val="152B4B"/>
@@ -8581,6 +8827,7 @@
           </a:lstStyle>
           <a:p xmlns:a="http://schemas.openxmlformats.org/drawingml/2006/main">
             <a:pPr algn="l">
+              <a:buNone/>
               <a:defRPr sz="3300" b="1">
                 <a:solidFill>
                   <a:srgbClr val="152B4B"/>
@@ -8648,6 +8895,7 @@
               </a:defRPr>
             </a:defPPr>
             <a:lvl1pPr algn="l">
+              <a:buNone/>
               <a:defRPr sz="1875" b="0">
                 <a:solidFill>
                   <a:srgbClr val="53647C"/>
@@ -8658,6 +8906,7 @@
               </a:defRPr>
             </a:lvl1pPr>
             <a:lvl2pPr algn="l">
+              <a:buNone/>
               <a:defRPr sz="1875" b="0">
                 <a:solidFill>
                   <a:srgbClr val="53647C"/>
@@ -8668,6 +8917,7 @@
               </a:defRPr>
             </a:lvl2pPr>
             <a:lvl3pPr algn="l">
+              <a:buNone/>
               <a:defRPr sz="1875" b="0">
                 <a:solidFill>
                   <a:srgbClr val="53647C"/>
@@ -8678,6 +8928,7 @@
               </a:defRPr>
             </a:lvl3pPr>
             <a:lvl4pPr algn="l">
+              <a:buNone/>
               <a:defRPr sz="1875" b="0">
                 <a:solidFill>
                   <a:srgbClr val="53647C"/>
@@ -8688,6 +8939,7 @@
               </a:defRPr>
             </a:lvl4pPr>
             <a:lvl5pPr algn="l">
+              <a:buNone/>
               <a:defRPr sz="1875" b="0">
                 <a:solidFill>
                   <a:srgbClr val="53647C"/>
@@ -8698,6 +8950,7 @@
               </a:defRPr>
             </a:lvl5pPr>
             <a:lvl6pPr algn="l">
+              <a:buNone/>
               <a:defRPr sz="1875" b="0">
                 <a:solidFill>
                   <a:srgbClr val="53647C"/>
@@ -8708,6 +8961,7 @@
               </a:defRPr>
             </a:lvl6pPr>
             <a:lvl7pPr algn="l">
+              <a:buNone/>
               <a:defRPr sz="1875" b="0">
                 <a:solidFill>
                   <a:srgbClr val="53647C"/>
@@ -8718,6 +8972,7 @@
               </a:defRPr>
             </a:lvl7pPr>
             <a:lvl8pPr algn="l">
+              <a:buNone/>
               <a:defRPr sz="1875" b="0">
                 <a:solidFill>
                   <a:srgbClr val="53647C"/>
@@ -8728,6 +8983,7 @@
               </a:defRPr>
             </a:lvl8pPr>
             <a:lvl9pPr algn="l">
+              <a:buNone/>
               <a:defRPr sz="1875" b="0">
                 <a:solidFill>
                   <a:srgbClr val="53647C"/>
@@ -8740,6 +8996,7 @@
           </a:lstStyle>
           <a:p xmlns:a="http://schemas.openxmlformats.org/drawingml/2006/main">
             <a:pPr algn="l">
+              <a:buNone/>
               <a:defRPr sz="1875" b="0">
                 <a:solidFill>
                   <a:srgbClr val="53647C"/>
@@ -8807,6 +9064,7 @@
               </a:defRPr>
             </a:defPPr>
             <a:lvl1pPr algn="l">
+              <a:buNone/>
               <a:defRPr sz="1275" b="0">
                 <a:solidFill>
                   <a:srgbClr val="53647C"/>
@@ -8817,6 +9075,7 @@
               </a:defRPr>
             </a:lvl1pPr>
             <a:lvl2pPr algn="l">
+              <a:buNone/>
               <a:defRPr sz="1275" b="0">
                 <a:solidFill>
                   <a:srgbClr val="53647C"/>
@@ -8827,6 +9086,7 @@
               </a:defRPr>
             </a:lvl2pPr>
             <a:lvl3pPr algn="l">
+              <a:buNone/>
               <a:defRPr sz="1275" b="0">
                 <a:solidFill>
                   <a:srgbClr val="53647C"/>
@@ -8837,6 +9097,7 @@
               </a:defRPr>
             </a:lvl3pPr>
             <a:lvl4pPr algn="l">
+              <a:buNone/>
               <a:defRPr sz="1275" b="0">
                 <a:solidFill>
                   <a:srgbClr val="53647C"/>
@@ -8847,6 +9108,7 @@
               </a:defRPr>
             </a:lvl4pPr>
             <a:lvl5pPr algn="l">
+              <a:buNone/>
               <a:defRPr sz="1275" b="0">
                 <a:solidFill>
                   <a:srgbClr val="53647C"/>
@@ -8857,6 +9119,7 @@
               </a:defRPr>
             </a:lvl5pPr>
             <a:lvl6pPr algn="l">
+              <a:buNone/>
               <a:defRPr sz="1275" b="0">
                 <a:solidFill>
                   <a:srgbClr val="53647C"/>
@@ -8867,6 +9130,7 @@
               </a:defRPr>
             </a:lvl6pPr>
             <a:lvl7pPr algn="l">
+              <a:buNone/>
               <a:defRPr sz="1275" b="0">
                 <a:solidFill>
                   <a:srgbClr val="53647C"/>
@@ -8877,6 +9141,7 @@
               </a:defRPr>
             </a:lvl7pPr>
             <a:lvl8pPr algn="l">
+              <a:buNone/>
               <a:defRPr sz="1275" b="0">
                 <a:solidFill>
                   <a:srgbClr val="53647C"/>
@@ -8887,6 +9152,7 @@
               </a:defRPr>
             </a:lvl8pPr>
             <a:lvl9pPr algn="l">
+              <a:buNone/>
               <a:defRPr sz="1275" b="0">
                 <a:solidFill>
                   <a:srgbClr val="53647C"/>
@@ -8899,6 +9165,7 @@
           </a:lstStyle>
           <a:p xmlns:a="http://schemas.openxmlformats.org/drawingml/2006/main">
             <a:pPr algn="l">
+              <a:buNone/>
               <a:defRPr sz="1275" b="0">
                 <a:solidFill>
                   <a:srgbClr val="53647C"/>
@@ -8966,6 +9233,7 @@
               </a:defRPr>
             </a:defPPr>
             <a:lvl1pPr algn="r">
+              <a:buNone/>
               <a:defRPr sz="1350" b="0">
                 <a:solidFill>
                   <a:srgbClr val="285AD6"/>
@@ -8976,6 +9244,7 @@
               </a:defRPr>
             </a:lvl1pPr>
             <a:lvl2pPr algn="r">
+              <a:buNone/>
               <a:defRPr sz="1350" b="0">
                 <a:solidFill>
                   <a:srgbClr val="285AD6"/>
@@ -8986,6 +9255,7 @@
               </a:defRPr>
             </a:lvl2pPr>
             <a:lvl3pPr algn="r">
+              <a:buNone/>
               <a:defRPr sz="1350" b="0">
                 <a:solidFill>
                   <a:srgbClr val="285AD6"/>
@@ -8996,6 +9266,7 @@
               </a:defRPr>
             </a:lvl3pPr>
             <a:lvl4pPr algn="r">
+              <a:buNone/>
               <a:defRPr sz="1350" b="0">
                 <a:solidFill>
                   <a:srgbClr val="285AD6"/>
@@ -9006,6 +9277,7 @@
               </a:defRPr>
             </a:lvl4pPr>
             <a:lvl5pPr algn="r">
+              <a:buNone/>
               <a:defRPr sz="1350" b="0">
                 <a:solidFill>
                   <a:srgbClr val="285AD6"/>
@@ -9016,6 +9288,7 @@
               </a:defRPr>
             </a:lvl5pPr>
             <a:lvl6pPr algn="r">
+              <a:buNone/>
               <a:defRPr sz="1350" b="0">
                 <a:solidFill>
                   <a:srgbClr val="285AD6"/>
@@ -9026,6 +9299,7 @@
               </a:defRPr>
             </a:lvl6pPr>
             <a:lvl7pPr algn="r">
+              <a:buNone/>
               <a:defRPr sz="1350" b="0">
                 <a:solidFill>
                   <a:srgbClr val="285AD6"/>
@@ -9036,6 +9310,7 @@
               </a:defRPr>
             </a:lvl7pPr>
             <a:lvl8pPr algn="r">
+              <a:buNone/>
               <a:defRPr sz="1350" b="0">
                 <a:solidFill>
                   <a:srgbClr val="285AD6"/>
@@ -9046,6 +9321,7 @@
               </a:defRPr>
             </a:lvl8pPr>
             <a:lvl9pPr algn="r">
+              <a:buNone/>
               <a:defRPr sz="1350" b="0">
                 <a:solidFill>
                   <a:srgbClr val="285AD6"/>
@@ -9058,6 +9334,7 @@
           </a:lstStyle>
           <a:p xmlns:a="http://schemas.openxmlformats.org/drawingml/2006/main">
             <a:pPr algn="r">
+              <a:buNone/>
               <a:defRPr sz="1350" b="0">
                 <a:solidFill>
                   <a:srgbClr val="285AD6"/>
@@ -9086,7 +9363,7 @@
           <p:cNvPr id="5" name="">
             <a:extLst xmlns:a="http://schemas.openxmlformats.org/drawingml/2006/main">
               <a:ext uri="{FF2B5EF4-FFF2-40B4-BE49-F238E27FC236}">
-                <a16:creationId xmlns:a16="http://schemas.microsoft.com/office/drawing/2014/main" id="{23594F6B-B4B9-4274-B875-191E8EAD608F}"/>
+                <a16:creationId xmlns:a16="http://schemas.microsoft.com/office/drawing/2014/main" id="{9DBD9C71-7727-4CD1-A710-02DF34519C30}"/>
               </a:ext>
             </a:extLst>
           </p:cNvPr>
@@ -9114,7 +9391,9 @@
                     </a:bodyPr>
                     <a:lstStyle/>
                     <a:p>
-                      <a:pPr algn="ctr"/>
+                      <a:pPr algn="ctr">
+                        <a:buNone/>
+                      </a:pPr>
                       <a:r>
                         <a:rPr sz="1725" b="1">
                           <a:solidFill>
@@ -9165,7 +9444,9 @@
                     </a:bodyPr>
                     <a:lstStyle/>
                     <a:p>
-                      <a:pPr algn="ctr"/>
+                      <a:pPr algn="ctr">
+                        <a:buNone/>
+                      </a:pPr>
                       <a:r>
                         <a:rPr sz="1725" b="1">
                           <a:solidFill>
@@ -9210,7 +9491,9 @@
                     </a:bodyPr>
                     <a:lstStyle/>
                     <a:p>
-                      <a:pPr algn="ctr"/>
+                      <a:pPr algn="ctr">
+                        <a:buNone/>
+                      </a:pPr>
                       <a:r>
                         <a:rPr sz="1725" b="1">
                           <a:solidFill>
@@ -9257,7 +9540,9 @@
                     </a:bodyPr>
                     <a:lstStyle/>
                     <a:p>
-                      <a:pPr algn="ctr"/>
+                      <a:pPr algn="ctr">
+                        <a:buNone/>
+                      </a:pPr>
                       <a:r>
                         <a:rPr sz="1725" b="0">
                           <a:solidFill>
@@ -9302,7 +9587,9 @@
                     </a:bodyPr>
                     <a:lstStyle/>
                     <a:p>
-                      <a:pPr algn="ctr"/>
+                      <a:pPr algn="ctr">
+                        <a:buNone/>
+                      </a:pPr>
                       <a:r>
                         <a:rPr sz="1725" b="0">
                           <a:solidFill>
@@ -9341,7 +9628,9 @@
                     </a:bodyPr>
                     <a:lstStyle/>
                     <a:p>
-                      <a:pPr algn="ctr"/>
+                      <a:pPr algn="ctr">
+                        <a:buNone/>
+                      </a:pPr>
                       <a:r>
                         <a:rPr sz="1725" b="0">
                           <a:solidFill>
@@ -9382,7 +9671,9 @@
                     </a:bodyPr>
                     <a:lstStyle/>
                     <a:p>
-                      <a:pPr algn="ctr"/>
+                      <a:pPr algn="ctr">
+                        <a:buNone/>
+                      </a:pPr>
                       <a:r>
                         <a:rPr sz="1725" b="0">
                           <a:solidFill>
@@ -9427,7 +9718,9 @@
                     </a:bodyPr>
                     <a:lstStyle/>
                     <a:p>
-                      <a:pPr algn="ctr"/>
+                      <a:pPr algn="ctr">
+                        <a:buNone/>
+                      </a:pPr>
                       <a:r>
                         <a:rPr sz="1725" b="0">
                           <a:solidFill>
@@ -9466,7 +9759,9 @@
                     </a:bodyPr>
                     <a:lstStyle/>
                     <a:p>
-                      <a:pPr algn="ctr"/>
+                      <a:pPr algn="ctr">
+                        <a:buNone/>
+                      </a:pPr>
                       <a:r>
                         <a:rPr sz="1725" b="0">
                           <a:solidFill>
@@ -9507,7 +9802,9 @@
                     </a:bodyPr>
                     <a:lstStyle/>
                     <a:p>
-                      <a:pPr algn="ctr"/>
+                      <a:pPr algn="ctr">
+                        <a:buNone/>
+                      </a:pPr>
                       <a:r>
                         <a:rPr sz="1725" b="0">
                           <a:solidFill>
@@ -9552,7 +9849,9 @@
                     </a:bodyPr>
                     <a:lstStyle/>
                     <a:p>
-                      <a:pPr algn="ctr"/>
+                      <a:pPr algn="ctr">
+                        <a:buNone/>
+                      </a:pPr>
                       <a:r>
                         <a:rPr sz="1725" b="0">
                           <a:solidFill>
@@ -9591,7 +9890,9 @@
                     </a:bodyPr>
                     <a:lstStyle/>
                     <a:p>
-                      <a:pPr algn="ctr"/>
+                      <a:pPr algn="ctr">
+                        <a:buNone/>
+                      </a:pPr>
                       <a:r>
                         <a:rPr sz="1725" b="0">
                           <a:solidFill>
@@ -9672,6 +9973,7 @@
               </a:defRPr>
             </a:defPPr>
             <a:lvl1pPr algn="l">
+              <a:buNone/>
               <a:defRPr sz="1875" b="0">
                 <a:solidFill>
                   <a:srgbClr val="152B4B"/>
@@ -9682,6 +9984,7 @@
               </a:defRPr>
             </a:lvl1pPr>
             <a:lvl2pPr algn="l">
+              <a:buNone/>
               <a:defRPr sz="1875" b="0">
                 <a:solidFill>
                   <a:srgbClr val="152B4B"/>
@@ -9692,6 +9995,7 @@
               </a:defRPr>
             </a:lvl2pPr>
             <a:lvl3pPr algn="l">
+              <a:buNone/>
               <a:defRPr sz="1875" b="0">
                 <a:solidFill>
                   <a:srgbClr val="152B4B"/>
@@ -9702,6 +10006,7 @@
               </a:defRPr>
             </a:lvl3pPr>
             <a:lvl4pPr algn="l">
+              <a:buNone/>
               <a:defRPr sz="1875" b="0">
                 <a:solidFill>
                   <a:srgbClr val="152B4B"/>
@@ -9712,6 +10017,7 @@
               </a:defRPr>
             </a:lvl4pPr>
             <a:lvl5pPr algn="l">
+              <a:buNone/>
               <a:defRPr sz="1875" b="0">
                 <a:solidFill>
                   <a:srgbClr val="152B4B"/>
@@ -9722,6 +10028,7 @@
               </a:defRPr>
             </a:lvl5pPr>
             <a:lvl6pPr algn="l">
+              <a:buNone/>
               <a:defRPr sz="1875" b="0">
                 <a:solidFill>
                   <a:srgbClr val="152B4B"/>
@@ -9732,6 +10039,7 @@
               </a:defRPr>
             </a:lvl6pPr>
             <a:lvl7pPr algn="l">
+              <a:buNone/>
               <a:defRPr sz="1875" b="0">
                 <a:solidFill>
                   <a:srgbClr val="152B4B"/>
@@ -9742,6 +10050,7 @@
               </a:defRPr>
             </a:lvl7pPr>
             <a:lvl8pPr algn="l">
+              <a:buNone/>
               <a:defRPr sz="1875" b="0">
                 <a:solidFill>
                   <a:srgbClr val="152B4B"/>
@@ -9752,6 +10061,7 @@
               </a:defRPr>
             </a:lvl8pPr>
             <a:lvl9pPr algn="l">
+              <a:buNone/>
               <a:defRPr sz="1875" b="0">
                 <a:solidFill>
                   <a:srgbClr val="152B4B"/>
@@ -9764,6 +10074,7 @@
           </a:lstStyle>
           <a:p xmlns:a="http://schemas.openxmlformats.org/drawingml/2006/main">
             <a:pPr algn="l">
+              <a:buNone/>
               <a:defRPr sz="1875" b="0">
                 <a:solidFill>
                   <a:srgbClr val="152B4B"/>
@@ -9787,6 +10098,7 @@
           </a:p>
           <a:p xmlns:a="http://schemas.openxmlformats.org/drawingml/2006/main">
             <a:pPr algn="l">
+              <a:buNone/>
               <a:defRPr sz="1875" b="0">
                 <a:solidFill>
                   <a:srgbClr val="152B4B"/>
@@ -9805,7 +10117,18 @@
                 <a:ea typeface="Noto Sans KR"/>
                 <a:cs typeface="Noto Sans KR"/>
               </a:rPr>
-              <a:t>피드백은 T1~T5로 기록합니다. 각자의 본인 기여 요약은 아직 작성이 필요합니다.</a:t>
+              <a:t>피드백은 T1~T5로 기록합니다. </a:t>
+            </a:r>
+            <a:r>
+              <a:rPr sz="1875" b="0">
+                <a:solidFill>
+                  <a:srgbClr val="152B4B"/>
+                </a:solidFill>
+                <a:latin typeface="Noto Sans KR"/>
+                <a:ea typeface="Noto Sans KR"/>
+                <a:cs typeface="Noto Sans KR"/>
+              </a:rPr>
+              <a:t>세 명의 본인 기여 요약과 대표 커밋을 문서로 남겼습니다.</a:t>
             </a:r>
           </a:p>
         </p:txBody>
@@ -9883,6 +10206,7 @@
               </a:defRPr>
             </a:defPPr>
             <a:lvl1pPr algn="l">
+              <a:buNone/>
               <a:defRPr sz="3300" b="1">
                 <a:solidFill>
                   <a:srgbClr val="152B4B"/>
@@ -9893,6 +10217,7 @@
               </a:defRPr>
             </a:lvl1pPr>
             <a:lvl2pPr algn="l">
+              <a:buNone/>
               <a:defRPr sz="3300" b="1">
                 <a:solidFill>
                   <a:srgbClr val="152B4B"/>
@@ -9903,6 +10228,7 @@
               </a:defRPr>
             </a:lvl2pPr>
             <a:lvl3pPr algn="l">
+              <a:buNone/>
               <a:defRPr sz="3300" b="1">
                 <a:solidFill>
                   <a:srgbClr val="152B4B"/>
@@ -9913,6 +10239,7 @@
               </a:defRPr>
             </a:lvl3pPr>
             <a:lvl4pPr algn="l">
+              <a:buNone/>
               <a:defRPr sz="3300" b="1">
                 <a:solidFill>
                   <a:srgbClr val="152B4B"/>
@@ -9923,6 +10250,7 @@
               </a:defRPr>
             </a:lvl4pPr>
             <a:lvl5pPr algn="l">
+              <a:buNone/>
               <a:defRPr sz="3300" b="1">
                 <a:solidFill>
                   <a:srgbClr val="152B4B"/>
@@ -9933,6 +10261,7 @@
               </a:defRPr>
             </a:lvl5pPr>
             <a:lvl6pPr algn="l">
+              <a:buNone/>
               <a:defRPr sz="3300" b="1">
                 <a:solidFill>
                   <a:srgbClr val="152B4B"/>
@@ -9943,6 +10272,7 @@
               </a:defRPr>
             </a:lvl6pPr>
             <a:lvl7pPr algn="l">
+              <a:buNone/>
               <a:defRPr sz="3300" b="1">
                 <a:solidFill>
                   <a:srgbClr val="152B4B"/>
@@ -9953,6 +10283,7 @@
               </a:defRPr>
             </a:lvl7pPr>
             <a:lvl8pPr algn="l">
+              <a:buNone/>
               <a:defRPr sz="3300" b="1">
                 <a:solidFill>
                   <a:srgbClr val="152B4B"/>
@@ -9963,6 +10294,7 @@
               </a:defRPr>
             </a:lvl8pPr>
             <a:lvl9pPr algn="l">
+              <a:buNone/>
               <a:defRPr sz="3300" b="1">
                 <a:solidFill>
                   <a:srgbClr val="152B4B"/>
@@ -9975,6 +10307,7 @@
           </a:lstStyle>
           <a:p xmlns:a="http://schemas.openxmlformats.org/drawingml/2006/main">
             <a:pPr algn="l">
+              <a:buNone/>
               <a:defRPr sz="3300" b="1">
                 <a:solidFill>
                   <a:srgbClr val="152B4B"/>
@@ -10042,6 +10375,7 @@
               </a:defRPr>
             </a:defPPr>
             <a:lvl1pPr algn="l">
+              <a:buNone/>
               <a:defRPr sz="1875" b="0">
                 <a:solidFill>
                   <a:srgbClr val="53647C"/>
@@ -10052,6 +10386,7 @@
               </a:defRPr>
             </a:lvl1pPr>
             <a:lvl2pPr algn="l">
+              <a:buNone/>
               <a:defRPr sz="1875" b="0">
                 <a:solidFill>
                   <a:srgbClr val="53647C"/>
@@ -10062,6 +10397,7 @@
               </a:defRPr>
             </a:lvl2pPr>
             <a:lvl3pPr algn="l">
+              <a:buNone/>
               <a:defRPr sz="1875" b="0">
                 <a:solidFill>
                   <a:srgbClr val="53647C"/>
@@ -10072,6 +10408,7 @@
               </a:defRPr>
             </a:lvl3pPr>
             <a:lvl4pPr algn="l">
+              <a:buNone/>
               <a:defRPr sz="1875" b="0">
                 <a:solidFill>
                   <a:srgbClr val="53647C"/>
@@ -10082,6 +10419,7 @@
               </a:defRPr>
             </a:lvl4pPr>
             <a:lvl5pPr algn="l">
+              <a:buNone/>
               <a:defRPr sz="1875" b="0">
                 <a:solidFill>
                   <a:srgbClr val="53647C"/>
@@ -10092,6 +10430,7 @@
               </a:defRPr>
             </a:lvl5pPr>
             <a:lvl6pPr algn="l">
+              <a:buNone/>
               <a:defRPr sz="1875" b="0">
                 <a:solidFill>
                   <a:srgbClr val="53647C"/>
@@ -10102,6 +10441,7 @@
               </a:defRPr>
             </a:lvl6pPr>
             <a:lvl7pPr algn="l">
+              <a:buNone/>
               <a:defRPr sz="1875" b="0">
                 <a:solidFill>
                   <a:srgbClr val="53647C"/>
@@ -10112,6 +10452,7 @@
               </a:defRPr>
             </a:lvl7pPr>
             <a:lvl8pPr algn="l">
+              <a:buNone/>
               <a:defRPr sz="1875" b="0">
                 <a:solidFill>
                   <a:srgbClr val="53647C"/>
@@ -10122,6 +10463,7 @@
               </a:defRPr>
             </a:lvl8pPr>
             <a:lvl9pPr algn="l">
+              <a:buNone/>
               <a:defRPr sz="1875" b="0">
                 <a:solidFill>
                   <a:srgbClr val="53647C"/>
@@ -10134,6 +10476,7 @@
           </a:lstStyle>
           <a:p xmlns:a="http://schemas.openxmlformats.org/drawingml/2006/main">
             <a:pPr algn="l">
+              <a:buNone/>
               <a:defRPr sz="1875" b="0">
                 <a:solidFill>
                   <a:srgbClr val="53647C"/>
@@ -10201,6 +10544,7 @@
               </a:defRPr>
             </a:defPPr>
             <a:lvl1pPr algn="l">
+              <a:buNone/>
               <a:defRPr sz="1275" b="0">
                 <a:solidFill>
                   <a:srgbClr val="53647C"/>
@@ -10211,6 +10555,7 @@
               </a:defRPr>
             </a:lvl1pPr>
             <a:lvl2pPr algn="l">
+              <a:buNone/>
               <a:defRPr sz="1275" b="0">
                 <a:solidFill>
                   <a:srgbClr val="53647C"/>
@@ -10221,6 +10566,7 @@
               </a:defRPr>
             </a:lvl2pPr>
             <a:lvl3pPr algn="l">
+              <a:buNone/>
               <a:defRPr sz="1275" b="0">
                 <a:solidFill>
                   <a:srgbClr val="53647C"/>
@@ -10231,6 +10577,7 @@
               </a:defRPr>
             </a:lvl3pPr>
             <a:lvl4pPr algn="l">
+              <a:buNone/>
               <a:defRPr sz="1275" b="0">
                 <a:solidFill>
                   <a:srgbClr val="53647C"/>
@@ -10241,6 +10588,7 @@
               </a:defRPr>
             </a:lvl4pPr>
             <a:lvl5pPr algn="l">
+              <a:buNone/>
               <a:defRPr sz="1275" b="0">
                 <a:solidFill>
                   <a:srgbClr val="53647C"/>
@@ -10251,6 +10599,7 @@
               </a:defRPr>
             </a:lvl5pPr>
             <a:lvl6pPr algn="l">
+              <a:buNone/>
               <a:defRPr sz="1275" b="0">
                 <a:solidFill>
                   <a:srgbClr val="53647C"/>
@@ -10261,6 +10610,7 @@
               </a:defRPr>
             </a:lvl6pPr>
             <a:lvl7pPr algn="l">
+              <a:buNone/>
               <a:defRPr sz="1275" b="0">
                 <a:solidFill>
                   <a:srgbClr val="53647C"/>
@@ -10271,6 +10621,7 @@
               </a:defRPr>
             </a:lvl7pPr>
             <a:lvl8pPr algn="l">
+              <a:buNone/>
               <a:defRPr sz="1275" b="0">
                 <a:solidFill>
                   <a:srgbClr val="53647C"/>
@@ -10281,6 +10632,7 @@
               </a:defRPr>
             </a:lvl8pPr>
             <a:lvl9pPr algn="l">
+              <a:buNone/>
               <a:defRPr sz="1275" b="0">
                 <a:solidFill>
                   <a:srgbClr val="53647C"/>
@@ -10293,6 +10645,7 @@
           </a:lstStyle>
           <a:p xmlns:a="http://schemas.openxmlformats.org/drawingml/2006/main">
             <a:pPr algn="l">
+              <a:buNone/>
               <a:defRPr sz="1275" b="0">
                 <a:solidFill>
                   <a:srgbClr val="53647C"/>
@@ -10360,6 +10713,7 @@
               </a:defRPr>
             </a:defPPr>
             <a:lvl1pPr algn="r">
+              <a:buNone/>
               <a:defRPr sz="1350" b="0">
                 <a:solidFill>
                   <a:srgbClr val="285AD6"/>
@@ -10370,6 +10724,7 @@
               </a:defRPr>
             </a:lvl1pPr>
             <a:lvl2pPr algn="r">
+              <a:buNone/>
               <a:defRPr sz="1350" b="0">
                 <a:solidFill>
                   <a:srgbClr val="285AD6"/>
@@ -10380,6 +10735,7 @@
               </a:defRPr>
             </a:lvl2pPr>
             <a:lvl3pPr algn="r">
+              <a:buNone/>
               <a:defRPr sz="1350" b="0">
                 <a:solidFill>
                   <a:srgbClr val="285AD6"/>
@@ -10390,6 +10746,7 @@
               </a:defRPr>
             </a:lvl3pPr>
             <a:lvl4pPr algn="r">
+              <a:buNone/>
               <a:defRPr sz="1350" b="0">
                 <a:solidFill>
                   <a:srgbClr val="285AD6"/>
@@ -10400,6 +10757,7 @@
               </a:defRPr>
             </a:lvl4pPr>
             <a:lvl5pPr algn="r">
+              <a:buNone/>
               <a:defRPr sz="1350" b="0">
                 <a:solidFill>
                   <a:srgbClr val="285AD6"/>
@@ -10410,6 +10768,7 @@
               </a:defRPr>
             </a:lvl5pPr>
             <a:lvl6pPr algn="r">
+              <a:buNone/>
               <a:defRPr sz="1350" b="0">
                 <a:solidFill>
                   <a:srgbClr val="285AD6"/>
@@ -10420,6 +10779,7 @@
               </a:defRPr>
             </a:lvl6pPr>
             <a:lvl7pPr algn="r">
+              <a:buNone/>
               <a:defRPr sz="1350" b="0">
                 <a:solidFill>
                   <a:srgbClr val="285AD6"/>
@@ -10430,6 +10790,7 @@
               </a:defRPr>
             </a:lvl7pPr>
             <a:lvl8pPr algn="r">
+              <a:buNone/>
               <a:defRPr sz="1350" b="0">
                 <a:solidFill>
                   <a:srgbClr val="285AD6"/>
@@ -10440,6 +10801,7 @@
               </a:defRPr>
             </a:lvl8pPr>
             <a:lvl9pPr algn="r">
+              <a:buNone/>
               <a:defRPr sz="1350" b="0">
                 <a:solidFill>
                   <a:srgbClr val="285AD6"/>
@@ -10452,6 +10814,7 @@
           </a:lstStyle>
           <a:p xmlns:a="http://schemas.openxmlformats.org/drawingml/2006/main">
             <a:pPr algn="r">
+              <a:buNone/>
               <a:defRPr sz="1350" b="0">
                 <a:solidFill>
                   <a:srgbClr val="285AD6"/>
@@ -10519,6 +10882,7 @@
               </a:defRPr>
             </a:defPPr>
             <a:lvl1pPr algn="l">
+              <a:buNone/>
               <a:defRPr sz="2250" b="1">
                 <a:solidFill>
                   <a:srgbClr val="285AD6"/>
@@ -10529,6 +10893,7 @@
               </a:defRPr>
             </a:lvl1pPr>
             <a:lvl2pPr algn="l">
+              <a:buNone/>
               <a:defRPr sz="2250" b="1">
                 <a:solidFill>
                   <a:srgbClr val="285AD6"/>
@@ -10539,6 +10904,7 @@
               </a:defRPr>
             </a:lvl2pPr>
             <a:lvl3pPr algn="l">
+              <a:buNone/>
               <a:defRPr sz="2250" b="1">
                 <a:solidFill>
                   <a:srgbClr val="285AD6"/>
@@ -10549,6 +10915,7 @@
               </a:defRPr>
             </a:lvl3pPr>
             <a:lvl4pPr algn="l">
+              <a:buNone/>
               <a:defRPr sz="2250" b="1">
                 <a:solidFill>
                   <a:srgbClr val="285AD6"/>
@@ -10559,6 +10926,7 @@
               </a:defRPr>
             </a:lvl4pPr>
             <a:lvl5pPr algn="l">
+              <a:buNone/>
               <a:defRPr sz="2250" b="1">
                 <a:solidFill>
                   <a:srgbClr val="285AD6"/>
@@ -10569,6 +10937,7 @@
               </a:defRPr>
             </a:lvl5pPr>
             <a:lvl6pPr algn="l">
+              <a:buNone/>
               <a:defRPr sz="2250" b="1">
                 <a:solidFill>
                   <a:srgbClr val="285AD6"/>
@@ -10579,6 +10948,7 @@
               </a:defRPr>
             </a:lvl6pPr>
             <a:lvl7pPr algn="l">
+              <a:buNone/>
               <a:defRPr sz="2250" b="1">
                 <a:solidFill>
                   <a:srgbClr val="285AD6"/>
@@ -10589,6 +10959,7 @@
               </a:defRPr>
             </a:lvl7pPr>
             <a:lvl8pPr algn="l">
+              <a:buNone/>
               <a:defRPr sz="2250" b="1">
                 <a:solidFill>
                   <a:srgbClr val="285AD6"/>
@@ -10599,6 +10970,7 @@
               </a:defRPr>
             </a:lvl8pPr>
             <a:lvl9pPr algn="l">
+              <a:buNone/>
               <a:defRPr sz="2250" b="1">
                 <a:solidFill>
                   <a:srgbClr val="285AD6"/>
@@ -10611,6 +10983,7 @@
           </a:lstStyle>
           <a:p xmlns:a="http://schemas.openxmlformats.org/drawingml/2006/main">
             <a:pPr algn="l">
+              <a:buNone/>
               <a:defRPr sz="2250" b="1">
                 <a:solidFill>
                   <a:srgbClr val="285AD6"/>
@@ -10678,6 +11051,7 @@
               </a:defRPr>
             </a:defPPr>
             <a:lvl1pPr algn="l">
+              <a:buNone/>
               <a:defRPr sz="2025" b="0">
                 <a:solidFill>
                   <a:srgbClr val="152B4B"/>
@@ -10688,6 +11062,7 @@
               </a:defRPr>
             </a:lvl1pPr>
             <a:lvl2pPr algn="l">
+              <a:buNone/>
               <a:defRPr sz="2025" b="0">
                 <a:solidFill>
                   <a:srgbClr val="152B4B"/>
@@ -10698,6 +11073,7 @@
               </a:defRPr>
             </a:lvl2pPr>
             <a:lvl3pPr algn="l">
+              <a:buNone/>
               <a:defRPr sz="2025" b="0">
                 <a:solidFill>
                   <a:srgbClr val="152B4B"/>
@@ -10708,6 +11084,7 @@
               </a:defRPr>
             </a:lvl3pPr>
             <a:lvl4pPr algn="l">
+              <a:buNone/>
               <a:defRPr sz="2025" b="0">
                 <a:solidFill>
                   <a:srgbClr val="152B4B"/>
@@ -10718,6 +11095,7 @@
               </a:defRPr>
             </a:lvl4pPr>
             <a:lvl5pPr algn="l">
+              <a:buNone/>
               <a:defRPr sz="2025" b="0">
                 <a:solidFill>
                   <a:srgbClr val="152B4B"/>
@@ -10728,6 +11106,7 @@
               </a:defRPr>
             </a:lvl5pPr>
             <a:lvl6pPr algn="l">
+              <a:buNone/>
               <a:defRPr sz="2025" b="0">
                 <a:solidFill>
                   <a:srgbClr val="152B4B"/>
@@ -10738,6 +11117,7 @@
               </a:defRPr>
             </a:lvl6pPr>
             <a:lvl7pPr algn="l">
+              <a:buNone/>
               <a:defRPr sz="2025" b="0">
                 <a:solidFill>
                   <a:srgbClr val="152B4B"/>
@@ -10748,6 +11128,7 @@
               </a:defRPr>
             </a:lvl7pPr>
             <a:lvl8pPr algn="l">
+              <a:buNone/>
               <a:defRPr sz="2025" b="0">
                 <a:solidFill>
                   <a:srgbClr val="152B4B"/>
@@ -10758,6 +11139,7 @@
               </a:defRPr>
             </a:lvl8pPr>
             <a:lvl9pPr algn="l">
+              <a:buNone/>
               <a:defRPr sz="2025" b="0">
                 <a:solidFill>
                   <a:srgbClr val="152B4B"/>
@@ -10770,6 +11152,7 @@
           </a:lstStyle>
           <a:p xmlns:a="http://schemas.openxmlformats.org/drawingml/2006/main">
             <a:pPr algn="l">
+              <a:buNone/>
               <a:defRPr sz="2025" b="0">
                 <a:solidFill>
                   <a:srgbClr val="152B4B"/>
@@ -10793,6 +11176,7 @@
           </a:p>
           <a:p xmlns:a="http://schemas.openxmlformats.org/drawingml/2006/main">
             <a:pPr algn="l">
+              <a:buNone/>
               <a:defRPr sz="2025" b="0">
                 <a:solidFill>
                   <a:srgbClr val="152B4B"/>
@@ -10816,6 +11200,7 @@
           </a:p>
           <a:p xmlns:a="http://schemas.openxmlformats.org/drawingml/2006/main">
             <a:pPr algn="l">
+              <a:buNone/>
               <a:defRPr sz="2025" b="0">
                 <a:solidFill>
                   <a:srgbClr val="152B4B"/>
@@ -10839,6 +11224,7 @@
           </a:p>
           <a:p xmlns:a="http://schemas.openxmlformats.org/drawingml/2006/main">
             <a:pPr algn="l">
+              <a:buNone/>
               <a:defRPr sz="2025" b="0">
                 <a:solidFill>
                   <a:srgbClr val="152B4B"/>
@@ -10857,7 +11243,7 @@
                 <a:ea typeface="Noto Sans KR"/>
                 <a:cs typeface="Noto Sans KR"/>
               </a:rPr>
-              <a:t>본인 기여 요약·익명 캡처·실제 수집 질문·노출 키 폐기 여부를 점검합니다.</a:t>
+              <a:t>Must 최종 검증·타깃 근거·수집 질문·익명 처리·키 폐기를 확인합니다.</a:t>
             </a:r>
           </a:p>
         </p:txBody>
@@ -10906,6 +11292,7 @@
               </a:defRPr>
             </a:defPPr>
             <a:lvl1pPr algn="l">
+              <a:buNone/>
               <a:defRPr sz="1725" b="0">
                 <a:solidFill>
                   <a:srgbClr val="285AD6"/>
@@ -10916,6 +11303,7 @@
               </a:defRPr>
             </a:lvl1pPr>
             <a:lvl2pPr algn="l">
+              <a:buNone/>
               <a:defRPr sz="1725" b="0">
                 <a:solidFill>
                   <a:srgbClr val="285AD6"/>
@@ -10926,6 +11314,7 @@
               </a:defRPr>
             </a:lvl2pPr>
             <a:lvl3pPr algn="l">
+              <a:buNone/>
               <a:defRPr sz="1725" b="0">
                 <a:solidFill>
                   <a:srgbClr val="285AD6"/>
@@ -10936,6 +11325,7 @@
               </a:defRPr>
             </a:lvl3pPr>
             <a:lvl4pPr algn="l">
+              <a:buNone/>
               <a:defRPr sz="1725" b="0">
                 <a:solidFill>
                   <a:srgbClr val="285AD6"/>
@@ -10946,6 +11336,7 @@
               </a:defRPr>
             </a:lvl4pPr>
             <a:lvl5pPr algn="l">
+              <a:buNone/>
               <a:defRPr sz="1725" b="0">
                 <a:solidFill>
                   <a:srgbClr val="285AD6"/>
@@ -10956,6 +11347,7 @@
               </a:defRPr>
             </a:lvl5pPr>
             <a:lvl6pPr algn="l">
+              <a:buNone/>
               <a:defRPr sz="1725" b="0">
                 <a:solidFill>
                   <a:srgbClr val="285AD6"/>
@@ -10966,6 +11358,7 @@
               </a:defRPr>
             </a:lvl6pPr>
             <a:lvl7pPr algn="l">
+              <a:buNone/>
               <a:defRPr sz="1725" b="0">
                 <a:solidFill>
                   <a:srgbClr val="285AD6"/>
@@ -10976,6 +11369,7 @@
               </a:defRPr>
             </a:lvl7pPr>
             <a:lvl8pPr algn="l">
+              <a:buNone/>
               <a:defRPr sz="1725" b="0">
                 <a:solidFill>
                   <a:srgbClr val="285AD6"/>
@@ -10986,6 +11380,7 @@
               </a:defRPr>
             </a:lvl8pPr>
             <a:lvl9pPr algn="l">
+              <a:buNone/>
               <a:defRPr sz="1725" b="0">
                 <a:solidFill>
                   <a:srgbClr val="285AD6"/>
@@ -10998,6 +11393,7 @@
           </a:lstStyle>
           <a:p xmlns:a="http://schemas.openxmlformats.org/drawingml/2006/main">
             <a:pPr algn="l">
+              <a:buNone/>
               <a:defRPr sz="1725" b="0">
                 <a:solidFill>
                   <a:srgbClr val="285AD6"/>
@@ -11021,6 +11417,7 @@
           </a:p>
           <a:p xmlns:a="http://schemas.openxmlformats.org/drawingml/2006/main">
             <a:pPr algn="l">
+              <a:buNone/>
               <a:defRPr sz="1725" b="0">
                 <a:solidFill>
                   <a:srgbClr val="285AD6"/>
@@ -11117,6 +11514,7 @@
               </a:defRPr>
             </a:defPPr>
             <a:lvl1pPr algn="l">
+              <a:buNone/>
               <a:defRPr sz="3300" b="1">
                 <a:solidFill>
                   <a:srgbClr val="152B4B"/>
@@ -11127,6 +11525,7 @@
               </a:defRPr>
             </a:lvl1pPr>
             <a:lvl2pPr algn="l">
+              <a:buNone/>
               <a:defRPr sz="3300" b="1">
                 <a:solidFill>
                   <a:srgbClr val="152B4B"/>
@@ -11137,6 +11536,7 @@
               </a:defRPr>
             </a:lvl2pPr>
             <a:lvl3pPr algn="l">
+              <a:buNone/>
               <a:defRPr sz="3300" b="1">
                 <a:solidFill>
                   <a:srgbClr val="152B4B"/>
@@ -11147,6 +11547,7 @@
               </a:defRPr>
             </a:lvl3pPr>
             <a:lvl4pPr algn="l">
+              <a:buNone/>
               <a:defRPr sz="3300" b="1">
                 <a:solidFill>
                   <a:srgbClr val="152B4B"/>
@@ -11157,6 +11558,7 @@
               </a:defRPr>
             </a:lvl4pPr>
             <a:lvl5pPr algn="l">
+              <a:buNone/>
               <a:defRPr sz="3300" b="1">
                 <a:solidFill>
                   <a:srgbClr val="152B4B"/>
@@ -11167,6 +11569,7 @@
               </a:defRPr>
             </a:lvl5pPr>
             <a:lvl6pPr algn="l">
+              <a:buNone/>
               <a:defRPr sz="3300" b="1">
                 <a:solidFill>
                   <a:srgbClr val="152B4B"/>
@@ -11177,6 +11580,7 @@
               </a:defRPr>
             </a:lvl6pPr>
             <a:lvl7pPr algn="l">
+              <a:buNone/>
               <a:defRPr sz="3300" b="1">
                 <a:solidFill>
                   <a:srgbClr val="152B4B"/>
@@ -11187,6 +11591,7 @@
               </a:defRPr>
             </a:lvl7pPr>
             <a:lvl8pPr algn="l">
+              <a:buNone/>
               <a:defRPr sz="3300" b="1">
                 <a:solidFill>
                   <a:srgbClr val="152B4B"/>
@@ -11197,6 +11602,7 @@
               </a:defRPr>
             </a:lvl8pPr>
             <a:lvl9pPr algn="l">
+              <a:buNone/>
               <a:defRPr sz="3300" b="1">
                 <a:solidFill>
                   <a:srgbClr val="152B4B"/>
@@ -11209,6 +11615,7 @@
           </a:lstStyle>
           <a:p xmlns:a="http://schemas.openxmlformats.org/drawingml/2006/main">
             <a:pPr algn="l">
+              <a:buNone/>
               <a:defRPr sz="3300" b="1">
                 <a:solidFill>
                   <a:srgbClr val="152B4B"/>
@@ -11276,6 +11683,7 @@
               </a:defRPr>
             </a:defPPr>
             <a:lvl1pPr algn="l">
+              <a:buNone/>
               <a:defRPr sz="1875" b="0">
                 <a:solidFill>
                   <a:srgbClr val="53647C"/>
@@ -11286,6 +11694,7 @@
               </a:defRPr>
             </a:lvl1pPr>
             <a:lvl2pPr algn="l">
+              <a:buNone/>
               <a:defRPr sz="1875" b="0">
                 <a:solidFill>
                   <a:srgbClr val="53647C"/>
@@ -11296,6 +11705,7 @@
               </a:defRPr>
             </a:lvl2pPr>
             <a:lvl3pPr algn="l">
+              <a:buNone/>
               <a:defRPr sz="1875" b="0">
                 <a:solidFill>
                   <a:srgbClr val="53647C"/>
@@ -11306,6 +11716,7 @@
               </a:defRPr>
             </a:lvl3pPr>
             <a:lvl4pPr algn="l">
+              <a:buNone/>
               <a:defRPr sz="1875" b="0">
                 <a:solidFill>
                   <a:srgbClr val="53647C"/>
@@ -11316,6 +11727,7 @@
               </a:defRPr>
             </a:lvl4pPr>
             <a:lvl5pPr algn="l">
+              <a:buNone/>
               <a:defRPr sz="1875" b="0">
                 <a:solidFill>
                   <a:srgbClr val="53647C"/>
@@ -11326,6 +11738,7 @@
               </a:defRPr>
             </a:lvl5pPr>
             <a:lvl6pPr algn="l">
+              <a:buNone/>
               <a:defRPr sz="1875" b="0">
                 <a:solidFill>
                   <a:srgbClr val="53647C"/>
@@ -11336,6 +11749,7 @@
               </a:defRPr>
             </a:lvl6pPr>
             <a:lvl7pPr algn="l">
+              <a:buNone/>
               <a:defRPr sz="1875" b="0">
                 <a:solidFill>
                   <a:srgbClr val="53647C"/>
@@ -11346,6 +11760,7 @@
               </a:defRPr>
             </a:lvl7pPr>
             <a:lvl8pPr algn="l">
+              <a:buNone/>
               <a:defRPr sz="1875" b="0">
                 <a:solidFill>
                   <a:srgbClr val="53647C"/>
@@ -11356,6 +11771,7 @@
               </a:defRPr>
             </a:lvl8pPr>
             <a:lvl9pPr algn="l">
+              <a:buNone/>
               <a:defRPr sz="1875" b="0">
                 <a:solidFill>
                   <a:srgbClr val="53647C"/>
@@ -11368,6 +11784,7 @@
           </a:lstStyle>
           <a:p xmlns:a="http://schemas.openxmlformats.org/drawingml/2006/main">
             <a:pPr algn="l">
+              <a:buNone/>
               <a:defRPr sz="1875" b="0">
                 <a:solidFill>
                   <a:srgbClr val="53647C"/>
@@ -11435,6 +11852,7 @@
               </a:defRPr>
             </a:defPPr>
             <a:lvl1pPr algn="l">
+              <a:buNone/>
               <a:defRPr sz="1275" b="0">
                 <a:solidFill>
                   <a:srgbClr val="53647C"/>
@@ -11445,6 +11863,7 @@
               </a:defRPr>
             </a:lvl1pPr>
             <a:lvl2pPr algn="l">
+              <a:buNone/>
               <a:defRPr sz="1275" b="0">
                 <a:solidFill>
                   <a:srgbClr val="53647C"/>
@@ -11455,6 +11874,7 @@
               </a:defRPr>
             </a:lvl2pPr>
             <a:lvl3pPr algn="l">
+              <a:buNone/>
               <a:defRPr sz="1275" b="0">
                 <a:solidFill>
                   <a:srgbClr val="53647C"/>
@@ -11465,6 +11885,7 @@
               </a:defRPr>
             </a:lvl3pPr>
             <a:lvl4pPr algn="l">
+              <a:buNone/>
               <a:defRPr sz="1275" b="0">
                 <a:solidFill>
                   <a:srgbClr val="53647C"/>
@@ -11475,6 +11896,7 @@
               </a:defRPr>
             </a:lvl4pPr>
             <a:lvl5pPr algn="l">
+              <a:buNone/>
               <a:defRPr sz="1275" b="0">
                 <a:solidFill>
                   <a:srgbClr val="53647C"/>
@@ -11485,6 +11907,7 @@
               </a:defRPr>
             </a:lvl5pPr>
             <a:lvl6pPr algn="l">
+              <a:buNone/>
               <a:defRPr sz="1275" b="0">
                 <a:solidFill>
                   <a:srgbClr val="53647C"/>
@@ -11495,6 +11918,7 @@
               </a:defRPr>
             </a:lvl6pPr>
             <a:lvl7pPr algn="l">
+              <a:buNone/>
               <a:defRPr sz="1275" b="0">
                 <a:solidFill>
                   <a:srgbClr val="53647C"/>
@@ -11505,6 +11929,7 @@
               </a:defRPr>
             </a:lvl7pPr>
             <a:lvl8pPr algn="l">
+              <a:buNone/>
               <a:defRPr sz="1275" b="0">
                 <a:solidFill>
                   <a:srgbClr val="53647C"/>
@@ -11515,6 +11940,7 @@
               </a:defRPr>
             </a:lvl8pPr>
             <a:lvl9pPr algn="l">
+              <a:buNone/>
               <a:defRPr sz="1275" b="0">
                 <a:solidFill>
                   <a:srgbClr val="53647C"/>
@@ -11527,6 +11953,7 @@
           </a:lstStyle>
           <a:p xmlns:a="http://schemas.openxmlformats.org/drawingml/2006/main">
             <a:pPr algn="l">
+              <a:buNone/>
               <a:defRPr sz="1275" b="0">
                 <a:solidFill>
                   <a:srgbClr val="53647C"/>
@@ -11594,6 +12021,7 @@
               </a:defRPr>
             </a:defPPr>
             <a:lvl1pPr algn="r">
+              <a:buNone/>
               <a:defRPr sz="1350" b="0">
                 <a:solidFill>
                   <a:srgbClr val="285AD6"/>
@@ -11604,6 +12032,7 @@
               </a:defRPr>
             </a:lvl1pPr>
             <a:lvl2pPr algn="r">
+              <a:buNone/>
               <a:defRPr sz="1350" b="0">
                 <a:solidFill>
                   <a:srgbClr val="285AD6"/>
@@ -11614,6 +12043,7 @@
               </a:defRPr>
             </a:lvl2pPr>
             <a:lvl3pPr algn="r">
+              <a:buNone/>
               <a:defRPr sz="1350" b="0">
                 <a:solidFill>
                   <a:srgbClr val="285AD6"/>
@@ -11624,6 +12054,7 @@
               </a:defRPr>
             </a:lvl3pPr>
             <a:lvl4pPr algn="r">
+              <a:buNone/>
               <a:defRPr sz="1350" b="0">
                 <a:solidFill>
                   <a:srgbClr val="285AD6"/>
@@ -11634,6 +12065,7 @@
               </a:defRPr>
             </a:lvl4pPr>
             <a:lvl5pPr algn="r">
+              <a:buNone/>
               <a:defRPr sz="1350" b="0">
                 <a:solidFill>
                   <a:srgbClr val="285AD6"/>
@@ -11644,6 +12076,7 @@
               </a:defRPr>
             </a:lvl5pPr>
             <a:lvl6pPr algn="r">
+              <a:buNone/>
               <a:defRPr sz="1350" b="0">
                 <a:solidFill>
                   <a:srgbClr val="285AD6"/>
@@ -11654,6 +12087,7 @@
               </a:defRPr>
             </a:lvl6pPr>
             <a:lvl7pPr algn="r">
+              <a:buNone/>
               <a:defRPr sz="1350" b="0">
                 <a:solidFill>
                   <a:srgbClr val="285AD6"/>
@@ -11664,6 +12098,7 @@
               </a:defRPr>
             </a:lvl7pPr>
             <a:lvl8pPr algn="r">
+              <a:buNone/>
               <a:defRPr sz="1350" b="0">
                 <a:solidFill>
                   <a:srgbClr val="285AD6"/>
@@ -11674,6 +12109,7 @@
               </a:defRPr>
             </a:lvl8pPr>
             <a:lvl9pPr algn="r">
+              <a:buNone/>
               <a:defRPr sz="1350" b="0">
                 <a:solidFill>
                   <a:srgbClr val="285AD6"/>
@@ -11686,6 +12122,7 @@
           </a:lstStyle>
           <a:p xmlns:a="http://schemas.openxmlformats.org/drawingml/2006/main">
             <a:pPr algn="r">
+              <a:buNone/>
               <a:defRPr sz="1350" b="0">
                 <a:solidFill>
                   <a:srgbClr val="285AD6"/>
@@ -11753,6 +12190,7 @@
               </a:defRPr>
             </a:defPPr>
             <a:lvl1pPr algn="l">
+              <a:buNone/>
               <a:defRPr sz="2325" b="1">
                 <a:solidFill>
                   <a:srgbClr val="285AD6"/>
@@ -11763,6 +12201,7 @@
               </a:defRPr>
             </a:lvl1pPr>
             <a:lvl2pPr algn="l">
+              <a:buNone/>
               <a:defRPr sz="2325" b="1">
                 <a:solidFill>
                   <a:srgbClr val="285AD6"/>
@@ -11773,6 +12212,7 @@
               </a:defRPr>
             </a:lvl2pPr>
             <a:lvl3pPr algn="l">
+              <a:buNone/>
               <a:defRPr sz="2325" b="1">
                 <a:solidFill>
                   <a:srgbClr val="285AD6"/>
@@ -11783,6 +12223,7 @@
               </a:defRPr>
             </a:lvl3pPr>
             <a:lvl4pPr algn="l">
+              <a:buNone/>
               <a:defRPr sz="2325" b="1">
                 <a:solidFill>
                   <a:srgbClr val="285AD6"/>
@@ -11793,6 +12234,7 @@
               </a:defRPr>
             </a:lvl4pPr>
             <a:lvl5pPr algn="l">
+              <a:buNone/>
               <a:defRPr sz="2325" b="1">
                 <a:solidFill>
                   <a:srgbClr val="285AD6"/>
@@ -11803,6 +12245,7 @@
               </a:defRPr>
             </a:lvl5pPr>
             <a:lvl6pPr algn="l">
+              <a:buNone/>
               <a:defRPr sz="2325" b="1">
                 <a:solidFill>
                   <a:srgbClr val="285AD6"/>
@@ -11813,6 +12256,7 @@
               </a:defRPr>
             </a:lvl6pPr>
             <a:lvl7pPr algn="l">
+              <a:buNone/>
               <a:defRPr sz="2325" b="1">
                 <a:solidFill>
                   <a:srgbClr val="285AD6"/>
@@ -11823,6 +12267,7 @@
               </a:defRPr>
             </a:lvl7pPr>
             <a:lvl8pPr algn="l">
+              <a:buNone/>
               <a:defRPr sz="2325" b="1">
                 <a:solidFill>
                   <a:srgbClr val="285AD6"/>
@@ -11833,6 +12278,7 @@
               </a:defRPr>
             </a:lvl8pPr>
             <a:lvl9pPr algn="l">
+              <a:buNone/>
               <a:defRPr sz="2325" b="1">
                 <a:solidFill>
                   <a:srgbClr val="285AD6"/>
@@ -11845,6 +12291,7 @@
           </a:lstStyle>
           <a:p xmlns:a="http://schemas.openxmlformats.org/drawingml/2006/main">
             <a:pPr algn="l">
+              <a:buNone/>
               <a:defRPr sz="2325" b="1">
                 <a:solidFill>
                   <a:srgbClr val="285AD6"/>
@@ -11912,6 +12359,7 @@
               </a:defRPr>
             </a:defPPr>
             <a:lvl1pPr algn="l">
+              <a:buNone/>
               <a:defRPr sz="2325" b="0">
                 <a:solidFill>
                   <a:srgbClr val="152B4B"/>
@@ -11922,6 +12370,7 @@
               </a:defRPr>
             </a:lvl1pPr>
             <a:lvl2pPr algn="l">
+              <a:buNone/>
               <a:defRPr sz="2325" b="0">
                 <a:solidFill>
                   <a:srgbClr val="152B4B"/>
@@ -11932,6 +12381,7 @@
               </a:defRPr>
             </a:lvl2pPr>
             <a:lvl3pPr algn="l">
+              <a:buNone/>
               <a:defRPr sz="2325" b="0">
                 <a:solidFill>
                   <a:srgbClr val="152B4B"/>
@@ -11942,6 +12392,7 @@
               </a:defRPr>
             </a:lvl3pPr>
             <a:lvl4pPr algn="l">
+              <a:buNone/>
               <a:defRPr sz="2325" b="0">
                 <a:solidFill>
                   <a:srgbClr val="152B4B"/>
@@ -11952,6 +12403,7 @@
               </a:defRPr>
             </a:lvl4pPr>
             <a:lvl5pPr algn="l">
+              <a:buNone/>
               <a:defRPr sz="2325" b="0">
                 <a:solidFill>
                   <a:srgbClr val="152B4B"/>
@@ -11962,6 +12414,7 @@
               </a:defRPr>
             </a:lvl5pPr>
             <a:lvl6pPr algn="l">
+              <a:buNone/>
               <a:defRPr sz="2325" b="0">
                 <a:solidFill>
                   <a:srgbClr val="152B4B"/>
@@ -11972,6 +12425,7 @@
               </a:defRPr>
             </a:lvl6pPr>
             <a:lvl7pPr algn="l">
+              <a:buNone/>
               <a:defRPr sz="2325" b="0">
                 <a:solidFill>
                   <a:srgbClr val="152B4B"/>
@@ -11982,6 +12436,7 @@
               </a:defRPr>
             </a:lvl7pPr>
             <a:lvl8pPr algn="l">
+              <a:buNone/>
               <a:defRPr sz="2325" b="0">
                 <a:solidFill>
                   <a:srgbClr val="152B4B"/>
@@ -11992,6 +12447,7 @@
               </a:defRPr>
             </a:lvl8pPr>
             <a:lvl9pPr algn="l">
+              <a:buNone/>
               <a:defRPr sz="2325" b="0">
                 <a:solidFill>
                   <a:srgbClr val="152B4B"/>
@@ -12004,6 +12460,7 @@
           </a:lstStyle>
           <a:p xmlns:a="http://schemas.openxmlformats.org/drawingml/2006/main">
             <a:pPr algn="l">
+              <a:buNone/>
               <a:defRPr sz="2325" b="0">
                 <a:solidFill>
                   <a:srgbClr val="152B4B"/>
@@ -12027,6 +12484,7 @@
           </a:p>
           <a:p xmlns:a="http://schemas.openxmlformats.org/drawingml/2006/main">
             <a:pPr algn="l">
+              <a:buNone/>
               <a:defRPr sz="2325" b="0">
                 <a:solidFill>
                   <a:srgbClr val="152B4B"/>
@@ -12094,6 +12552,7 @@
               </a:defRPr>
             </a:defPPr>
             <a:lvl1pPr algn="l">
+              <a:buNone/>
               <a:defRPr sz="2325" b="1">
                 <a:solidFill>
                   <a:srgbClr val="285AD6"/>
@@ -12104,6 +12563,7 @@
               </a:defRPr>
             </a:lvl1pPr>
             <a:lvl2pPr algn="l">
+              <a:buNone/>
               <a:defRPr sz="2325" b="1">
                 <a:solidFill>
                   <a:srgbClr val="285AD6"/>
@@ -12114,6 +12574,7 @@
               </a:defRPr>
             </a:lvl2pPr>
             <a:lvl3pPr algn="l">
+              <a:buNone/>
               <a:defRPr sz="2325" b="1">
                 <a:solidFill>
                   <a:srgbClr val="285AD6"/>
@@ -12124,6 +12585,7 @@
               </a:defRPr>
             </a:lvl3pPr>
             <a:lvl4pPr algn="l">
+              <a:buNone/>
               <a:defRPr sz="2325" b="1">
                 <a:solidFill>
                   <a:srgbClr val="285AD6"/>
@@ -12134,6 +12596,7 @@
               </a:defRPr>
             </a:lvl4pPr>
             <a:lvl5pPr algn="l">
+              <a:buNone/>
               <a:defRPr sz="2325" b="1">
                 <a:solidFill>
                   <a:srgbClr val="285AD6"/>
@@ -12144,6 +12607,7 @@
               </a:defRPr>
             </a:lvl5pPr>
             <a:lvl6pPr algn="l">
+              <a:buNone/>
               <a:defRPr sz="2325" b="1">
                 <a:solidFill>
                   <a:srgbClr val="285AD6"/>
@@ -12154,6 +12618,7 @@
               </a:defRPr>
             </a:lvl6pPr>
             <a:lvl7pPr algn="l">
+              <a:buNone/>
               <a:defRPr sz="2325" b="1">
                 <a:solidFill>
                   <a:srgbClr val="285AD6"/>
@@ -12164,6 +12629,7 @@
               </a:defRPr>
             </a:lvl7pPr>
             <a:lvl8pPr algn="l">
+              <a:buNone/>
               <a:defRPr sz="2325" b="1">
                 <a:solidFill>
                   <a:srgbClr val="285AD6"/>
@@ -12174,6 +12640,7 @@
               </a:defRPr>
             </a:lvl8pPr>
             <a:lvl9pPr algn="l">
+              <a:buNone/>
               <a:defRPr sz="2325" b="1">
                 <a:solidFill>
                   <a:srgbClr val="285AD6"/>
@@ -12186,6 +12653,7 @@
           </a:lstStyle>
           <a:p xmlns:a="http://schemas.openxmlformats.org/drawingml/2006/main">
             <a:pPr algn="l">
+              <a:buNone/>
               <a:defRPr sz="2325" b="1">
                 <a:solidFill>
                   <a:srgbClr val="285AD6"/>
@@ -12253,6 +12721,7 @@
               </a:defRPr>
             </a:defPPr>
             <a:lvl1pPr algn="l">
+              <a:buNone/>
               <a:defRPr sz="2175" b="0">
                 <a:solidFill>
                   <a:srgbClr val="152B4B"/>
@@ -12263,6 +12732,7 @@
               </a:defRPr>
             </a:lvl1pPr>
             <a:lvl2pPr algn="l">
+              <a:buNone/>
               <a:defRPr sz="2175" b="0">
                 <a:solidFill>
                   <a:srgbClr val="152B4B"/>
@@ -12273,6 +12743,7 @@
               </a:defRPr>
             </a:lvl2pPr>
             <a:lvl3pPr algn="l">
+              <a:buNone/>
               <a:defRPr sz="2175" b="0">
                 <a:solidFill>
                   <a:srgbClr val="152B4B"/>
@@ -12283,6 +12754,7 @@
               </a:defRPr>
             </a:lvl3pPr>
             <a:lvl4pPr algn="l">
+              <a:buNone/>
               <a:defRPr sz="2175" b="0">
                 <a:solidFill>
                   <a:srgbClr val="152B4B"/>
@@ -12293,6 +12765,7 @@
               </a:defRPr>
             </a:lvl4pPr>
             <a:lvl5pPr algn="l">
+              <a:buNone/>
               <a:defRPr sz="2175" b="0">
                 <a:solidFill>
                   <a:srgbClr val="152B4B"/>
@@ -12303,6 +12776,7 @@
               </a:defRPr>
             </a:lvl5pPr>
             <a:lvl6pPr algn="l">
+              <a:buNone/>
               <a:defRPr sz="2175" b="0">
                 <a:solidFill>
                   <a:srgbClr val="152B4B"/>
@@ -12313,6 +12787,7 @@
               </a:defRPr>
             </a:lvl6pPr>
             <a:lvl7pPr algn="l">
+              <a:buNone/>
               <a:defRPr sz="2175" b="0">
                 <a:solidFill>
                   <a:srgbClr val="152B4B"/>
@@ -12323,6 +12798,7 @@
               </a:defRPr>
             </a:lvl7pPr>
             <a:lvl8pPr algn="l">
+              <a:buNone/>
               <a:defRPr sz="2175" b="0">
                 <a:solidFill>
                   <a:srgbClr val="152B4B"/>
@@ -12333,6 +12809,7 @@
               </a:defRPr>
             </a:lvl8pPr>
             <a:lvl9pPr algn="l">
+              <a:buNone/>
               <a:defRPr sz="2175" b="0">
                 <a:solidFill>
                   <a:srgbClr val="152B4B"/>
@@ -12345,6 +12822,7 @@
           </a:lstStyle>
           <a:p xmlns:a="http://schemas.openxmlformats.org/drawingml/2006/main">
             <a:pPr algn="l">
+              <a:buNone/>
               <a:defRPr sz="2175" b="0">
                 <a:solidFill>
                   <a:srgbClr val="152B4B"/>
@@ -12368,6 +12846,7 @@
           </a:p>
           <a:p xmlns:a="http://schemas.openxmlformats.org/drawingml/2006/main">
             <a:pPr algn="l">
+              <a:buNone/>
               <a:defRPr sz="2175" b="0">
                 <a:solidFill>
                   <a:srgbClr val="152B4B"/>
@@ -12391,6 +12870,7 @@
           </a:p>
           <a:p xmlns:a="http://schemas.openxmlformats.org/drawingml/2006/main">
             <a:pPr algn="l">
+              <a:buNone/>
               <a:defRPr sz="2175" b="0">
                 <a:solidFill>
                   <a:srgbClr val="152B4B"/>
@@ -12458,6 +12938,7 @@
               </a:defRPr>
             </a:defPPr>
             <a:lvl1pPr algn="l">
+              <a:buNone/>
               <a:defRPr sz="1425" b="0">
                 <a:solidFill>
                   <a:srgbClr val="53647C"/>
@@ -12468,6 +12949,7 @@
               </a:defRPr>
             </a:lvl1pPr>
             <a:lvl2pPr algn="l">
+              <a:buNone/>
               <a:defRPr sz="1425" b="0">
                 <a:solidFill>
                   <a:srgbClr val="53647C"/>
@@ -12478,6 +12960,7 @@
               </a:defRPr>
             </a:lvl2pPr>
             <a:lvl3pPr algn="l">
+              <a:buNone/>
               <a:defRPr sz="1425" b="0">
                 <a:solidFill>
                   <a:srgbClr val="53647C"/>
@@ -12488,6 +12971,7 @@
               </a:defRPr>
             </a:lvl3pPr>
             <a:lvl4pPr algn="l">
+              <a:buNone/>
               <a:defRPr sz="1425" b="0">
                 <a:solidFill>
                   <a:srgbClr val="53647C"/>
@@ -12498,6 +12982,7 @@
               </a:defRPr>
             </a:lvl4pPr>
             <a:lvl5pPr algn="l">
+              <a:buNone/>
               <a:defRPr sz="1425" b="0">
                 <a:solidFill>
                   <a:srgbClr val="53647C"/>
@@ -12508,6 +12993,7 @@
               </a:defRPr>
             </a:lvl5pPr>
             <a:lvl6pPr algn="l">
+              <a:buNone/>
               <a:defRPr sz="1425" b="0">
                 <a:solidFill>
                   <a:srgbClr val="53647C"/>
@@ -12518,6 +13004,7 @@
               </a:defRPr>
             </a:lvl6pPr>
             <a:lvl7pPr algn="l">
+              <a:buNone/>
               <a:defRPr sz="1425" b="0">
                 <a:solidFill>
                   <a:srgbClr val="53647C"/>
@@ -12528,6 +13015,7 @@
               </a:defRPr>
             </a:lvl7pPr>
             <a:lvl8pPr algn="l">
+              <a:buNone/>
               <a:defRPr sz="1425" b="0">
                 <a:solidFill>
                   <a:srgbClr val="53647C"/>
@@ -12538,6 +13026,7 @@
               </a:defRPr>
             </a:lvl8pPr>
             <a:lvl9pPr algn="l">
+              <a:buNone/>
               <a:defRPr sz="1425" b="0">
                 <a:solidFill>
                   <a:srgbClr val="53647C"/>
@@ -12550,6 +13039,7 @@
           </a:lstStyle>
           <a:p xmlns:a="http://schemas.openxmlformats.org/drawingml/2006/main">
             <a:pPr algn="l">
+              <a:buNone/>
               <a:defRPr sz="1425" b="0">
                 <a:solidFill>
                   <a:srgbClr val="53647C"/>
@@ -12646,6 +13136,7 @@
               </a:defRPr>
             </a:defPPr>
             <a:lvl1pPr algn="l">
+              <a:buNone/>
               <a:defRPr sz="3300" b="1">
                 <a:solidFill>
                   <a:srgbClr val="152B4B"/>
@@ -12656,6 +13147,7 @@
               </a:defRPr>
             </a:lvl1pPr>
             <a:lvl2pPr algn="l">
+              <a:buNone/>
               <a:defRPr sz="3300" b="1">
                 <a:solidFill>
                   <a:srgbClr val="152B4B"/>
@@ -12666,6 +13158,7 @@
               </a:defRPr>
             </a:lvl2pPr>
             <a:lvl3pPr algn="l">
+              <a:buNone/>
               <a:defRPr sz="3300" b="1">
                 <a:solidFill>
                   <a:srgbClr val="152B4B"/>
@@ -12676,6 +13169,7 @@
               </a:defRPr>
             </a:lvl3pPr>
             <a:lvl4pPr algn="l">
+              <a:buNone/>
               <a:defRPr sz="3300" b="1">
                 <a:solidFill>
                   <a:srgbClr val="152B4B"/>
@@ -12686,6 +13180,7 @@
               </a:defRPr>
             </a:lvl4pPr>
             <a:lvl5pPr algn="l">
+              <a:buNone/>
               <a:defRPr sz="3300" b="1">
                 <a:solidFill>
                   <a:srgbClr val="152B4B"/>
@@ -12696,6 +13191,7 @@
               </a:defRPr>
             </a:lvl5pPr>
             <a:lvl6pPr algn="l">
+              <a:buNone/>
               <a:defRPr sz="3300" b="1">
                 <a:solidFill>
                   <a:srgbClr val="152B4B"/>
@@ -12706,6 +13202,7 @@
               </a:defRPr>
             </a:lvl6pPr>
             <a:lvl7pPr algn="l">
+              <a:buNone/>
               <a:defRPr sz="3300" b="1">
                 <a:solidFill>
                   <a:srgbClr val="152B4B"/>
@@ -12716,6 +13213,7 @@
               </a:defRPr>
             </a:lvl7pPr>
             <a:lvl8pPr algn="l">
+              <a:buNone/>
               <a:defRPr sz="3300" b="1">
                 <a:solidFill>
                   <a:srgbClr val="152B4B"/>
@@ -12726,6 +13224,7 @@
               </a:defRPr>
             </a:lvl8pPr>
             <a:lvl9pPr algn="l">
+              <a:buNone/>
               <a:defRPr sz="3300" b="1">
                 <a:solidFill>
                   <a:srgbClr val="152B4B"/>
@@ -12738,6 +13237,7 @@
           </a:lstStyle>
           <a:p xmlns:a="http://schemas.openxmlformats.org/drawingml/2006/main">
             <a:pPr algn="l">
+              <a:buNone/>
               <a:defRPr sz="3300" b="1">
                 <a:solidFill>
                   <a:srgbClr val="152B4B"/>
@@ -12805,6 +13305,7 @@
               </a:defRPr>
             </a:defPPr>
             <a:lvl1pPr algn="l">
+              <a:buNone/>
               <a:defRPr sz="1875" b="0">
                 <a:solidFill>
                   <a:srgbClr val="53647C"/>
@@ -12815,6 +13316,7 @@
               </a:defRPr>
             </a:lvl1pPr>
             <a:lvl2pPr algn="l">
+              <a:buNone/>
               <a:defRPr sz="1875" b="0">
                 <a:solidFill>
                   <a:srgbClr val="53647C"/>
@@ -12825,6 +13327,7 @@
               </a:defRPr>
             </a:lvl2pPr>
             <a:lvl3pPr algn="l">
+              <a:buNone/>
               <a:defRPr sz="1875" b="0">
                 <a:solidFill>
                   <a:srgbClr val="53647C"/>
@@ -12835,6 +13338,7 @@
               </a:defRPr>
             </a:lvl3pPr>
             <a:lvl4pPr algn="l">
+              <a:buNone/>
               <a:defRPr sz="1875" b="0">
                 <a:solidFill>
                   <a:srgbClr val="53647C"/>
@@ -12845,6 +13349,7 @@
               </a:defRPr>
             </a:lvl4pPr>
             <a:lvl5pPr algn="l">
+              <a:buNone/>
               <a:defRPr sz="1875" b="0">
                 <a:solidFill>
                   <a:srgbClr val="53647C"/>
@@ -12855,6 +13360,7 @@
               </a:defRPr>
             </a:lvl5pPr>
             <a:lvl6pPr algn="l">
+              <a:buNone/>
               <a:defRPr sz="1875" b="0">
                 <a:solidFill>
                   <a:srgbClr val="53647C"/>
@@ -12865,6 +13371,7 @@
               </a:defRPr>
             </a:lvl6pPr>
             <a:lvl7pPr algn="l">
+              <a:buNone/>
               <a:defRPr sz="1875" b="0">
                 <a:solidFill>
                   <a:srgbClr val="53647C"/>
@@ -12875,6 +13382,7 @@
               </a:defRPr>
             </a:lvl7pPr>
             <a:lvl8pPr algn="l">
+              <a:buNone/>
               <a:defRPr sz="1875" b="0">
                 <a:solidFill>
                   <a:srgbClr val="53647C"/>
@@ -12885,6 +13393,7 @@
               </a:defRPr>
             </a:lvl8pPr>
             <a:lvl9pPr algn="l">
+              <a:buNone/>
               <a:defRPr sz="1875" b="0">
                 <a:solidFill>
                   <a:srgbClr val="53647C"/>
@@ -12897,6 +13406,7 @@
           </a:lstStyle>
           <a:p xmlns:a="http://schemas.openxmlformats.org/drawingml/2006/main">
             <a:pPr algn="l">
+              <a:buNone/>
               <a:defRPr sz="1875" b="0">
                 <a:solidFill>
                   <a:srgbClr val="53647C"/>
@@ -12964,6 +13474,7 @@
               </a:defRPr>
             </a:defPPr>
             <a:lvl1pPr algn="l">
+              <a:buNone/>
               <a:defRPr sz="1275" b="0">
                 <a:solidFill>
                   <a:srgbClr val="53647C"/>
@@ -12974,6 +13485,7 @@
               </a:defRPr>
             </a:lvl1pPr>
             <a:lvl2pPr algn="l">
+              <a:buNone/>
               <a:defRPr sz="1275" b="0">
                 <a:solidFill>
                   <a:srgbClr val="53647C"/>
@@ -12984,6 +13496,7 @@
               </a:defRPr>
             </a:lvl2pPr>
             <a:lvl3pPr algn="l">
+              <a:buNone/>
               <a:defRPr sz="1275" b="0">
                 <a:solidFill>
                   <a:srgbClr val="53647C"/>
@@ -12994,6 +13507,7 @@
               </a:defRPr>
             </a:lvl3pPr>
             <a:lvl4pPr algn="l">
+              <a:buNone/>
               <a:defRPr sz="1275" b="0">
                 <a:solidFill>
                   <a:srgbClr val="53647C"/>
@@ -13004,6 +13518,7 @@
               </a:defRPr>
             </a:lvl4pPr>
             <a:lvl5pPr algn="l">
+              <a:buNone/>
               <a:defRPr sz="1275" b="0">
                 <a:solidFill>
                   <a:srgbClr val="53647C"/>
@@ -13014,6 +13529,7 @@
               </a:defRPr>
             </a:lvl5pPr>
             <a:lvl6pPr algn="l">
+              <a:buNone/>
               <a:defRPr sz="1275" b="0">
                 <a:solidFill>
                   <a:srgbClr val="53647C"/>
@@ -13024,6 +13540,7 @@
               </a:defRPr>
             </a:lvl6pPr>
             <a:lvl7pPr algn="l">
+              <a:buNone/>
               <a:defRPr sz="1275" b="0">
                 <a:solidFill>
                   <a:srgbClr val="53647C"/>
@@ -13034,6 +13551,7 @@
               </a:defRPr>
             </a:lvl7pPr>
             <a:lvl8pPr algn="l">
+              <a:buNone/>
               <a:defRPr sz="1275" b="0">
                 <a:solidFill>
                   <a:srgbClr val="53647C"/>
@@ -13044,6 +13562,7 @@
               </a:defRPr>
             </a:lvl8pPr>
             <a:lvl9pPr algn="l">
+              <a:buNone/>
               <a:defRPr sz="1275" b="0">
                 <a:solidFill>
                   <a:srgbClr val="53647C"/>
@@ -13056,6 +13575,7 @@
           </a:lstStyle>
           <a:p xmlns:a="http://schemas.openxmlformats.org/drawingml/2006/main">
             <a:pPr algn="l">
+              <a:buNone/>
               <a:defRPr sz="1275" b="0">
                 <a:solidFill>
                   <a:srgbClr val="53647C"/>
@@ -13123,6 +13643,7 @@
               </a:defRPr>
             </a:defPPr>
             <a:lvl1pPr algn="r">
+              <a:buNone/>
               <a:defRPr sz="1350" b="0">
                 <a:solidFill>
                   <a:srgbClr val="285AD6"/>
@@ -13133,6 +13654,7 @@
               </a:defRPr>
             </a:lvl1pPr>
             <a:lvl2pPr algn="r">
+              <a:buNone/>
               <a:defRPr sz="1350" b="0">
                 <a:solidFill>
                   <a:srgbClr val="285AD6"/>
@@ -13143,6 +13665,7 @@
               </a:defRPr>
             </a:lvl2pPr>
             <a:lvl3pPr algn="r">
+              <a:buNone/>
               <a:defRPr sz="1350" b="0">
                 <a:solidFill>
                   <a:srgbClr val="285AD6"/>
@@ -13153,6 +13676,7 @@
               </a:defRPr>
             </a:lvl3pPr>
             <a:lvl4pPr algn="r">
+              <a:buNone/>
               <a:defRPr sz="1350" b="0">
                 <a:solidFill>
                   <a:srgbClr val="285AD6"/>
@@ -13163,6 +13687,7 @@
               </a:defRPr>
             </a:lvl4pPr>
             <a:lvl5pPr algn="r">
+              <a:buNone/>
               <a:defRPr sz="1350" b="0">
                 <a:solidFill>
                   <a:srgbClr val="285AD6"/>
@@ -13173,6 +13698,7 @@
               </a:defRPr>
             </a:lvl5pPr>
             <a:lvl6pPr algn="r">
+              <a:buNone/>
               <a:defRPr sz="1350" b="0">
                 <a:solidFill>
                   <a:srgbClr val="285AD6"/>
@@ -13183,6 +13709,7 @@
               </a:defRPr>
             </a:lvl6pPr>
             <a:lvl7pPr algn="r">
+              <a:buNone/>
               <a:defRPr sz="1350" b="0">
                 <a:solidFill>
                   <a:srgbClr val="285AD6"/>
@@ -13193,6 +13720,7 @@
               </a:defRPr>
             </a:lvl7pPr>
             <a:lvl8pPr algn="r">
+              <a:buNone/>
               <a:defRPr sz="1350" b="0">
                 <a:solidFill>
                   <a:srgbClr val="285AD6"/>
@@ -13203,6 +13731,7 @@
               </a:defRPr>
             </a:lvl8pPr>
             <a:lvl9pPr algn="r">
+              <a:buNone/>
               <a:defRPr sz="1350" b="0">
                 <a:solidFill>
                   <a:srgbClr val="285AD6"/>
@@ -13215,6 +13744,7 @@
           </a:lstStyle>
           <a:p xmlns:a="http://schemas.openxmlformats.org/drawingml/2006/main">
             <a:pPr algn="r">
+              <a:buNone/>
               <a:defRPr sz="1350" b="0">
                 <a:solidFill>
                   <a:srgbClr val="285AD6"/>
@@ -13243,7 +13773,7 @@
           <p:cNvPr id="5" name="">
             <a:extLst xmlns:a="http://schemas.openxmlformats.org/drawingml/2006/main">
               <a:ext uri="{FF2B5EF4-FFF2-40B4-BE49-F238E27FC236}">
-                <a16:creationId xmlns:a16="http://schemas.microsoft.com/office/drawing/2014/main" id="{A99A63C2-CA88-4FDD-B190-BCF65CAE01BB}"/>
+                <a16:creationId xmlns:a16="http://schemas.microsoft.com/office/drawing/2014/main" id="{DE92A8EE-C8DE-4964-8B8A-88999589BB40}"/>
               </a:ext>
             </a:extLst>
           </p:cNvPr>
@@ -13271,7 +13801,9 @@
                     </a:bodyPr>
                     <a:lstStyle/>
                     <a:p>
-                      <a:pPr algn="ctr"/>
+                      <a:pPr algn="ctr">
+                        <a:buNone/>
+                      </a:pPr>
                       <a:r>
                         <a:rPr sz="1800" b="1">
                           <a:solidFill>
@@ -13322,7 +13854,9 @@
                     </a:bodyPr>
                     <a:lstStyle/>
                     <a:p>
-                      <a:pPr algn="ctr"/>
+                      <a:pPr algn="ctr">
+                        <a:buNone/>
+                      </a:pPr>
                       <a:r>
                         <a:rPr sz="1800" b="1">
                           <a:solidFill>
@@ -13367,7 +13901,9 @@
                     </a:bodyPr>
                     <a:lstStyle/>
                     <a:p>
-                      <a:pPr algn="ctr"/>
+                      <a:pPr algn="ctr">
+                        <a:buNone/>
+                      </a:pPr>
                       <a:r>
                         <a:rPr sz="1800" b="1">
                           <a:solidFill>
@@ -13414,7 +13950,9 @@
                     </a:bodyPr>
                     <a:lstStyle/>
                     <a:p>
-                      <a:pPr algn="ctr"/>
+                      <a:pPr algn="ctr">
+                        <a:buNone/>
+                      </a:pPr>
                       <a:r>
                         <a:rPr sz="1800" b="0">
                           <a:solidFill>
@@ -13459,7 +13997,9 @@
                     </a:bodyPr>
                     <a:lstStyle/>
                     <a:p>
-                      <a:pPr algn="ctr"/>
+                      <a:pPr algn="ctr">
+                        <a:buNone/>
+                      </a:pPr>
                       <a:r>
                         <a:rPr sz="1800" b="0">
                           <a:solidFill>
@@ -13498,7 +14038,9 @@
                     </a:bodyPr>
                     <a:lstStyle/>
                     <a:p>
-                      <a:pPr algn="ctr"/>
+                      <a:pPr algn="ctr">
+                        <a:buNone/>
+                      </a:pPr>
                       <a:r>
                         <a:rPr sz="1800" b="0">
                           <a:solidFill>
@@ -13539,7 +14081,9 @@
                     </a:bodyPr>
                     <a:lstStyle/>
                     <a:p>
-                      <a:pPr algn="ctr"/>
+                      <a:pPr algn="ctr">
+                        <a:buNone/>
+                      </a:pPr>
                       <a:r>
                         <a:rPr sz="1800" b="0">
                           <a:solidFill>
@@ -13584,7 +14128,9 @@
                     </a:bodyPr>
                     <a:lstStyle/>
                     <a:p>
-                      <a:pPr algn="ctr"/>
+                      <a:pPr algn="ctr">
+                        <a:buNone/>
+                      </a:pPr>
                       <a:r>
                         <a:rPr sz="1800" b="0">
                           <a:solidFill>
@@ -13623,7 +14169,9 @@
                     </a:bodyPr>
                     <a:lstStyle/>
                     <a:p>
-                      <a:pPr algn="ctr"/>
+                      <a:pPr algn="ctr">
+                        <a:buNone/>
+                      </a:pPr>
                       <a:r>
                         <a:rPr sz="1800" b="0">
                           <a:solidFill>
@@ -13664,7 +14212,9 @@
                     </a:bodyPr>
                     <a:lstStyle/>
                     <a:p>
-                      <a:pPr algn="ctr"/>
+                      <a:pPr algn="ctr">
+                        <a:buNone/>
+                      </a:pPr>
                       <a:r>
                         <a:rPr sz="1800" b="0">
                           <a:solidFill>
@@ -13709,7 +14259,9 @@
                     </a:bodyPr>
                     <a:lstStyle/>
                     <a:p>
-                      <a:pPr algn="ctr"/>
+                      <a:pPr algn="ctr">
+                        <a:buNone/>
+                      </a:pPr>
                       <a:r>
                         <a:rPr sz="1800" b="0">
                           <a:solidFill>
@@ -13748,7 +14300,9 @@
                     </a:bodyPr>
                     <a:lstStyle/>
                     <a:p>
-                      <a:pPr algn="ctr"/>
+                      <a:pPr algn="ctr">
+                        <a:buNone/>
+                      </a:pPr>
                       <a:r>
                         <a:rPr sz="1800" b="0">
                           <a:solidFill>
@@ -13789,7 +14343,9 @@
                     </a:bodyPr>
                     <a:lstStyle/>
                     <a:p>
-                      <a:pPr algn="ctr"/>
+                      <a:pPr algn="ctr">
+                        <a:buNone/>
+                      </a:pPr>
                       <a:r>
                         <a:rPr sz="1800" b="0">
                           <a:solidFill>
@@ -13834,7 +14390,9 @@
                     </a:bodyPr>
                     <a:lstStyle/>
                     <a:p>
-                      <a:pPr algn="ctr"/>
+                      <a:pPr algn="ctr">
+                        <a:buNone/>
+                      </a:pPr>
                       <a:r>
                         <a:rPr sz="1800" b="0">
                           <a:solidFill>
@@ -13873,7 +14431,9 @@
                     </a:bodyPr>
                     <a:lstStyle/>
                     <a:p>
-                      <a:pPr algn="ctr"/>
+                      <a:pPr algn="ctr">
+                        <a:buNone/>
+                      </a:pPr>
                       <a:r>
                         <a:rPr sz="1800" b="0">
                           <a:solidFill>
@@ -13954,6 +14514,7 @@
               </a:defRPr>
             </a:defPPr>
             <a:lvl1pPr algn="l">
+              <a:buNone/>
               <a:defRPr sz="1425" b="0">
                 <a:solidFill>
                   <a:srgbClr val="53647C"/>
@@ -13964,6 +14525,7 @@
               </a:defRPr>
             </a:lvl1pPr>
             <a:lvl2pPr algn="l">
+              <a:buNone/>
               <a:defRPr sz="1425" b="0">
                 <a:solidFill>
                   <a:srgbClr val="53647C"/>
@@ -13974,6 +14536,7 @@
               </a:defRPr>
             </a:lvl2pPr>
             <a:lvl3pPr algn="l">
+              <a:buNone/>
               <a:defRPr sz="1425" b="0">
                 <a:solidFill>
                   <a:srgbClr val="53647C"/>
@@ -13984,6 +14547,7 @@
               </a:defRPr>
             </a:lvl3pPr>
             <a:lvl4pPr algn="l">
+              <a:buNone/>
               <a:defRPr sz="1425" b="0">
                 <a:solidFill>
                   <a:srgbClr val="53647C"/>
@@ -13994,6 +14558,7 @@
               </a:defRPr>
             </a:lvl4pPr>
             <a:lvl5pPr algn="l">
+              <a:buNone/>
               <a:defRPr sz="1425" b="0">
                 <a:solidFill>
                   <a:srgbClr val="53647C"/>
@@ -14004,6 +14569,7 @@
               </a:defRPr>
             </a:lvl5pPr>
             <a:lvl6pPr algn="l">
+              <a:buNone/>
               <a:defRPr sz="1425" b="0">
                 <a:solidFill>
                   <a:srgbClr val="53647C"/>
@@ -14014,6 +14580,7 @@
               </a:defRPr>
             </a:lvl6pPr>
             <a:lvl7pPr algn="l">
+              <a:buNone/>
               <a:defRPr sz="1425" b="0">
                 <a:solidFill>
                   <a:srgbClr val="53647C"/>
@@ -14024,6 +14591,7 @@
               </a:defRPr>
             </a:lvl7pPr>
             <a:lvl8pPr algn="l">
+              <a:buNone/>
               <a:defRPr sz="1425" b="0">
                 <a:solidFill>
                   <a:srgbClr val="53647C"/>
@@ -14034,6 +14602,7 @@
               </a:defRPr>
             </a:lvl8pPr>
             <a:lvl9pPr algn="l">
+              <a:buNone/>
               <a:defRPr sz="1425" b="0">
                 <a:solidFill>
                   <a:srgbClr val="53647C"/>
@@ -14046,6 +14615,7 @@
           </a:lstStyle>
           <a:p xmlns:a="http://schemas.openxmlformats.org/drawingml/2006/main">
             <a:pPr algn="l">
+              <a:buNone/>
               <a:defRPr sz="1425" b="0">
                 <a:solidFill>
                   <a:srgbClr val="53647C"/>
@@ -14142,6 +14712,7 @@
               </a:defRPr>
             </a:defPPr>
             <a:lvl1pPr algn="l">
+              <a:buNone/>
               <a:defRPr sz="3300" b="1">
                 <a:solidFill>
                   <a:srgbClr val="152B4B"/>
@@ -14152,6 +14723,7 @@
               </a:defRPr>
             </a:lvl1pPr>
             <a:lvl2pPr algn="l">
+              <a:buNone/>
               <a:defRPr sz="3300" b="1">
                 <a:solidFill>
                   <a:srgbClr val="152B4B"/>
@@ -14162,6 +14734,7 @@
               </a:defRPr>
             </a:lvl2pPr>
             <a:lvl3pPr algn="l">
+              <a:buNone/>
               <a:defRPr sz="3300" b="1">
                 <a:solidFill>
                   <a:srgbClr val="152B4B"/>
@@ -14172,6 +14745,7 @@
               </a:defRPr>
             </a:lvl3pPr>
             <a:lvl4pPr algn="l">
+              <a:buNone/>
               <a:defRPr sz="3300" b="1">
                 <a:solidFill>
                   <a:srgbClr val="152B4B"/>
@@ -14182,6 +14756,7 @@
               </a:defRPr>
             </a:lvl4pPr>
             <a:lvl5pPr algn="l">
+              <a:buNone/>
               <a:defRPr sz="3300" b="1">
                 <a:solidFill>
                   <a:srgbClr val="152B4B"/>
@@ -14192,6 +14767,7 @@
               </a:defRPr>
             </a:lvl5pPr>
             <a:lvl6pPr algn="l">
+              <a:buNone/>
               <a:defRPr sz="3300" b="1">
                 <a:solidFill>
                   <a:srgbClr val="152B4B"/>
@@ -14202,6 +14778,7 @@
               </a:defRPr>
             </a:lvl6pPr>
             <a:lvl7pPr algn="l">
+              <a:buNone/>
               <a:defRPr sz="3300" b="1">
                 <a:solidFill>
                   <a:srgbClr val="152B4B"/>
@@ -14212,6 +14789,7 @@
               </a:defRPr>
             </a:lvl7pPr>
             <a:lvl8pPr algn="l">
+              <a:buNone/>
               <a:defRPr sz="3300" b="1">
                 <a:solidFill>
                   <a:srgbClr val="152B4B"/>
@@ -14222,6 +14800,7 @@
               </a:defRPr>
             </a:lvl8pPr>
             <a:lvl9pPr algn="l">
+              <a:buNone/>
               <a:defRPr sz="3300" b="1">
                 <a:solidFill>
                   <a:srgbClr val="152B4B"/>
@@ -14234,6 +14813,7 @@
           </a:lstStyle>
           <a:p xmlns:a="http://schemas.openxmlformats.org/drawingml/2006/main">
             <a:pPr algn="l">
+              <a:buNone/>
               <a:defRPr sz="3300" b="1">
                 <a:solidFill>
                   <a:srgbClr val="152B4B"/>
@@ -14301,6 +14881,7 @@
               </a:defRPr>
             </a:defPPr>
             <a:lvl1pPr algn="l">
+              <a:buNone/>
               <a:defRPr sz="1875" b="0">
                 <a:solidFill>
                   <a:srgbClr val="53647C"/>
@@ -14311,6 +14892,7 @@
               </a:defRPr>
             </a:lvl1pPr>
             <a:lvl2pPr algn="l">
+              <a:buNone/>
               <a:defRPr sz="1875" b="0">
                 <a:solidFill>
                   <a:srgbClr val="53647C"/>
@@ -14321,6 +14903,7 @@
               </a:defRPr>
             </a:lvl2pPr>
             <a:lvl3pPr algn="l">
+              <a:buNone/>
               <a:defRPr sz="1875" b="0">
                 <a:solidFill>
                   <a:srgbClr val="53647C"/>
@@ -14331,6 +14914,7 @@
               </a:defRPr>
             </a:lvl3pPr>
             <a:lvl4pPr algn="l">
+              <a:buNone/>
               <a:defRPr sz="1875" b="0">
                 <a:solidFill>
                   <a:srgbClr val="53647C"/>
@@ -14341,6 +14925,7 @@
               </a:defRPr>
             </a:lvl4pPr>
             <a:lvl5pPr algn="l">
+              <a:buNone/>
               <a:defRPr sz="1875" b="0">
                 <a:solidFill>
                   <a:srgbClr val="53647C"/>
@@ -14351,6 +14936,7 @@
               </a:defRPr>
             </a:lvl5pPr>
             <a:lvl6pPr algn="l">
+              <a:buNone/>
               <a:defRPr sz="1875" b="0">
                 <a:solidFill>
                   <a:srgbClr val="53647C"/>
@@ -14361,6 +14947,7 @@
               </a:defRPr>
             </a:lvl6pPr>
             <a:lvl7pPr algn="l">
+              <a:buNone/>
               <a:defRPr sz="1875" b="0">
                 <a:solidFill>
                   <a:srgbClr val="53647C"/>
@@ -14371,6 +14958,7 @@
               </a:defRPr>
             </a:lvl7pPr>
             <a:lvl8pPr algn="l">
+              <a:buNone/>
               <a:defRPr sz="1875" b="0">
                 <a:solidFill>
                   <a:srgbClr val="53647C"/>
@@ -14381,6 +14969,7 @@
               </a:defRPr>
             </a:lvl8pPr>
             <a:lvl9pPr algn="l">
+              <a:buNone/>
               <a:defRPr sz="1875" b="0">
                 <a:solidFill>
                   <a:srgbClr val="53647C"/>
@@ -14393,6 +14982,7 @@
           </a:lstStyle>
           <a:p xmlns:a="http://schemas.openxmlformats.org/drawingml/2006/main">
             <a:pPr algn="l">
+              <a:buNone/>
               <a:defRPr sz="1875" b="0">
                 <a:solidFill>
                   <a:srgbClr val="53647C"/>
@@ -14460,6 +15050,7 @@
               </a:defRPr>
             </a:defPPr>
             <a:lvl1pPr algn="l">
+              <a:buNone/>
               <a:defRPr sz="1275" b="0">
                 <a:solidFill>
                   <a:srgbClr val="53647C"/>
@@ -14470,6 +15061,7 @@
               </a:defRPr>
             </a:lvl1pPr>
             <a:lvl2pPr algn="l">
+              <a:buNone/>
               <a:defRPr sz="1275" b="0">
                 <a:solidFill>
                   <a:srgbClr val="53647C"/>
@@ -14480,6 +15072,7 @@
               </a:defRPr>
             </a:lvl2pPr>
             <a:lvl3pPr algn="l">
+              <a:buNone/>
               <a:defRPr sz="1275" b="0">
                 <a:solidFill>
                   <a:srgbClr val="53647C"/>
@@ -14490,6 +15083,7 @@
               </a:defRPr>
             </a:lvl3pPr>
             <a:lvl4pPr algn="l">
+              <a:buNone/>
               <a:defRPr sz="1275" b="0">
                 <a:solidFill>
                   <a:srgbClr val="53647C"/>
@@ -14500,6 +15094,7 @@
               </a:defRPr>
             </a:lvl4pPr>
             <a:lvl5pPr algn="l">
+              <a:buNone/>
               <a:defRPr sz="1275" b="0">
                 <a:solidFill>
                   <a:srgbClr val="53647C"/>
@@ -14510,6 +15105,7 @@
               </a:defRPr>
             </a:lvl5pPr>
             <a:lvl6pPr algn="l">
+              <a:buNone/>
               <a:defRPr sz="1275" b="0">
                 <a:solidFill>
                   <a:srgbClr val="53647C"/>
@@ -14520,6 +15116,7 @@
               </a:defRPr>
             </a:lvl6pPr>
             <a:lvl7pPr algn="l">
+              <a:buNone/>
               <a:defRPr sz="1275" b="0">
                 <a:solidFill>
                   <a:srgbClr val="53647C"/>
@@ -14530,6 +15127,7 @@
               </a:defRPr>
             </a:lvl7pPr>
             <a:lvl8pPr algn="l">
+              <a:buNone/>
               <a:defRPr sz="1275" b="0">
                 <a:solidFill>
                   <a:srgbClr val="53647C"/>
@@ -14540,6 +15138,7 @@
               </a:defRPr>
             </a:lvl8pPr>
             <a:lvl9pPr algn="l">
+              <a:buNone/>
               <a:defRPr sz="1275" b="0">
                 <a:solidFill>
                   <a:srgbClr val="53647C"/>
@@ -14552,6 +15151,7 @@
           </a:lstStyle>
           <a:p xmlns:a="http://schemas.openxmlformats.org/drawingml/2006/main">
             <a:pPr algn="l">
+              <a:buNone/>
               <a:defRPr sz="1275" b="0">
                 <a:solidFill>
                   <a:srgbClr val="53647C"/>
@@ -14619,6 +15219,7 @@
               </a:defRPr>
             </a:defPPr>
             <a:lvl1pPr algn="r">
+              <a:buNone/>
               <a:defRPr sz="1350" b="0">
                 <a:solidFill>
                   <a:srgbClr val="285AD6"/>
@@ -14629,6 +15230,7 @@
               </a:defRPr>
             </a:lvl1pPr>
             <a:lvl2pPr algn="r">
+              <a:buNone/>
               <a:defRPr sz="1350" b="0">
                 <a:solidFill>
                   <a:srgbClr val="285AD6"/>
@@ -14639,6 +15241,7 @@
               </a:defRPr>
             </a:lvl2pPr>
             <a:lvl3pPr algn="r">
+              <a:buNone/>
               <a:defRPr sz="1350" b="0">
                 <a:solidFill>
                   <a:srgbClr val="285AD6"/>
@@ -14649,6 +15252,7 @@
               </a:defRPr>
             </a:lvl3pPr>
             <a:lvl4pPr algn="r">
+              <a:buNone/>
               <a:defRPr sz="1350" b="0">
                 <a:solidFill>
                   <a:srgbClr val="285AD6"/>
@@ -14659,6 +15263,7 @@
               </a:defRPr>
             </a:lvl4pPr>
             <a:lvl5pPr algn="r">
+              <a:buNone/>
               <a:defRPr sz="1350" b="0">
                 <a:solidFill>
                   <a:srgbClr val="285AD6"/>
@@ -14669,6 +15274,7 @@
               </a:defRPr>
             </a:lvl5pPr>
             <a:lvl6pPr algn="r">
+              <a:buNone/>
               <a:defRPr sz="1350" b="0">
                 <a:solidFill>
                   <a:srgbClr val="285AD6"/>
@@ -14679,6 +15285,7 @@
               </a:defRPr>
             </a:lvl6pPr>
             <a:lvl7pPr algn="r">
+              <a:buNone/>
               <a:defRPr sz="1350" b="0">
                 <a:solidFill>
                   <a:srgbClr val="285AD6"/>
@@ -14689,6 +15296,7 @@
               </a:defRPr>
             </a:lvl7pPr>
             <a:lvl8pPr algn="r">
+              <a:buNone/>
               <a:defRPr sz="1350" b="0">
                 <a:solidFill>
                   <a:srgbClr val="285AD6"/>
@@ -14699,6 +15307,7 @@
               </a:defRPr>
             </a:lvl8pPr>
             <a:lvl9pPr algn="r">
+              <a:buNone/>
               <a:defRPr sz="1350" b="0">
                 <a:solidFill>
                   <a:srgbClr val="285AD6"/>
@@ -14711,6 +15320,7 @@
           </a:lstStyle>
           <a:p xmlns:a="http://schemas.openxmlformats.org/drawingml/2006/main">
             <a:pPr algn="r">
+              <a:buNone/>
               <a:defRPr sz="1350" b="0">
                 <a:solidFill>
                   <a:srgbClr val="285AD6"/>
@@ -14739,7 +15349,7 @@
           <p:cNvPr id="5" name="">
             <a:extLst xmlns:a="http://schemas.openxmlformats.org/drawingml/2006/main">
               <a:ext uri="{FF2B5EF4-FFF2-40B4-BE49-F238E27FC236}">
-                <a16:creationId xmlns:a16="http://schemas.microsoft.com/office/drawing/2014/main" id="{92B1E20A-3604-42D3-BD91-C571164AFB06}"/>
+                <a16:creationId xmlns:a16="http://schemas.microsoft.com/office/drawing/2014/main" id="{EF78BEE1-2146-4708-9A65-ABDFE1829CBD}"/>
               </a:ext>
             </a:extLst>
           </p:cNvPr>
@@ -14767,7 +15377,9 @@
                     </a:bodyPr>
                     <a:lstStyle/>
                     <a:p>
-                      <a:pPr algn="ctr"/>
+                      <a:pPr algn="ctr">
+                        <a:buNone/>
+                      </a:pPr>
                       <a:r>
                         <a:rPr sz="1725" b="1">
                           <a:solidFill>
@@ -14818,7 +15430,9 @@
                     </a:bodyPr>
                     <a:lstStyle/>
                     <a:p>
-                      <a:pPr algn="ctr"/>
+                      <a:pPr algn="ctr">
+                        <a:buNone/>
+                      </a:pPr>
                       <a:r>
                         <a:rPr sz="1725" b="1">
                           <a:solidFill>
@@ -14863,7 +15477,9 @@
                     </a:bodyPr>
                     <a:lstStyle/>
                     <a:p>
-                      <a:pPr algn="ctr"/>
+                      <a:pPr algn="ctr">
+                        <a:buNone/>
+                      </a:pPr>
                       <a:r>
                         <a:rPr sz="1725" b="1">
                           <a:solidFill>
@@ -14910,7 +15526,9 @@
                     </a:bodyPr>
                     <a:lstStyle/>
                     <a:p>
-                      <a:pPr algn="ctr"/>
+                      <a:pPr algn="ctr">
+                        <a:buNone/>
+                      </a:pPr>
                       <a:r>
                         <a:rPr sz="1725" b="0">
                           <a:solidFill>
@@ -14955,7 +15573,9 @@
                     </a:bodyPr>
                     <a:lstStyle/>
                     <a:p>
-                      <a:pPr algn="ctr"/>
+                      <a:pPr algn="ctr">
+                        <a:buNone/>
+                      </a:pPr>
                       <a:r>
                         <a:rPr sz="1725" b="0">
                           <a:solidFill>
@@ -14994,7 +15614,9 @@
                     </a:bodyPr>
                     <a:lstStyle/>
                     <a:p>
-                      <a:pPr algn="ctr"/>
+                      <a:pPr algn="ctr">
+                        <a:buNone/>
+                      </a:pPr>
                       <a:r>
                         <a:rPr sz="1725" b="0">
                           <a:solidFill>
@@ -15035,7 +15657,9 @@
                     </a:bodyPr>
                     <a:lstStyle/>
                     <a:p>
-                      <a:pPr algn="ctr"/>
+                      <a:pPr algn="ctr">
+                        <a:buNone/>
+                      </a:pPr>
                       <a:r>
                         <a:rPr sz="1725" b="0">
                           <a:solidFill>
@@ -15080,7 +15704,9 @@
                     </a:bodyPr>
                     <a:lstStyle/>
                     <a:p>
-                      <a:pPr algn="ctr"/>
+                      <a:pPr algn="ctr">
+                        <a:buNone/>
+                      </a:pPr>
                       <a:r>
                         <a:rPr sz="1725" b="0">
                           <a:solidFill>
@@ -15119,7 +15745,9 @@
                     </a:bodyPr>
                     <a:lstStyle/>
                     <a:p>
-                      <a:pPr algn="ctr"/>
+                      <a:pPr algn="ctr">
+                        <a:buNone/>
+                      </a:pPr>
                       <a:r>
                         <a:rPr sz="1725" b="0">
                           <a:solidFill>
@@ -15160,7 +15788,9 @@
                     </a:bodyPr>
                     <a:lstStyle/>
                     <a:p>
-                      <a:pPr algn="ctr"/>
+                      <a:pPr algn="ctr">
+                        <a:buNone/>
+                      </a:pPr>
                       <a:r>
                         <a:rPr sz="1725" b="0">
                           <a:solidFill>
@@ -15205,7 +15835,9 @@
                     </a:bodyPr>
                     <a:lstStyle/>
                     <a:p>
-                      <a:pPr algn="ctr"/>
+                      <a:pPr algn="ctr">
+                        <a:buNone/>
+                      </a:pPr>
                       <a:r>
                         <a:rPr sz="1725" b="0">
                           <a:solidFill>
@@ -15244,7 +15876,9 @@
                     </a:bodyPr>
                     <a:lstStyle/>
                     <a:p>
-                      <a:pPr algn="ctr"/>
+                      <a:pPr algn="ctr">
+                        <a:buNone/>
+                      </a:pPr>
                       <a:r>
                         <a:rPr sz="1725" b="0">
                           <a:solidFill>
@@ -15285,7 +15919,9 @@
                     </a:bodyPr>
                     <a:lstStyle/>
                     <a:p>
-                      <a:pPr algn="ctr"/>
+                      <a:pPr algn="ctr">
+                        <a:buNone/>
+                      </a:pPr>
                       <a:r>
                         <a:rPr sz="1725" b="0">
                           <a:solidFill>
@@ -15330,7 +15966,9 @@
                     </a:bodyPr>
                     <a:lstStyle/>
                     <a:p>
-                      <a:pPr algn="ctr"/>
+                      <a:pPr algn="ctr">
+                        <a:buNone/>
+                      </a:pPr>
                       <a:r>
                         <a:rPr sz="1725" b="0">
                           <a:solidFill>
@@ -15369,7 +16007,9 @@
                     </a:bodyPr>
                     <a:lstStyle/>
                     <a:p>
-                      <a:pPr algn="ctr"/>
+                      <a:pPr algn="ctr">
+                        <a:buNone/>
+                      </a:pPr>
                       <a:r>
                         <a:rPr sz="1725" b="0">
                           <a:solidFill>
@@ -15450,6 +16090,7 @@
               </a:defRPr>
             </a:defPPr>
             <a:lvl1pPr algn="l">
+              <a:buNone/>
               <a:defRPr sz="1425" b="0">
                 <a:solidFill>
                   <a:srgbClr val="53647C"/>
@@ -15460,6 +16101,7 @@
               </a:defRPr>
             </a:lvl1pPr>
             <a:lvl2pPr algn="l">
+              <a:buNone/>
               <a:defRPr sz="1425" b="0">
                 <a:solidFill>
                   <a:srgbClr val="53647C"/>
@@ -15470,6 +16112,7 @@
               </a:defRPr>
             </a:lvl2pPr>
             <a:lvl3pPr algn="l">
+              <a:buNone/>
               <a:defRPr sz="1425" b="0">
                 <a:solidFill>
                   <a:srgbClr val="53647C"/>
@@ -15480,6 +16123,7 @@
               </a:defRPr>
             </a:lvl3pPr>
             <a:lvl4pPr algn="l">
+              <a:buNone/>
               <a:defRPr sz="1425" b="0">
                 <a:solidFill>
                   <a:srgbClr val="53647C"/>
@@ -15490,6 +16134,7 @@
               </a:defRPr>
             </a:lvl4pPr>
             <a:lvl5pPr algn="l">
+              <a:buNone/>
               <a:defRPr sz="1425" b="0">
                 <a:solidFill>
                   <a:srgbClr val="53647C"/>
@@ -15500,6 +16145,7 @@
               </a:defRPr>
             </a:lvl5pPr>
             <a:lvl6pPr algn="l">
+              <a:buNone/>
               <a:defRPr sz="1425" b="0">
                 <a:solidFill>
                   <a:srgbClr val="53647C"/>
@@ -15510,6 +16156,7 @@
               </a:defRPr>
             </a:lvl6pPr>
             <a:lvl7pPr algn="l">
+              <a:buNone/>
               <a:defRPr sz="1425" b="0">
                 <a:solidFill>
                   <a:srgbClr val="53647C"/>
@@ -15520,6 +16167,7 @@
               </a:defRPr>
             </a:lvl7pPr>
             <a:lvl8pPr algn="l">
+              <a:buNone/>
               <a:defRPr sz="1425" b="0">
                 <a:solidFill>
                   <a:srgbClr val="53647C"/>
@@ -15530,6 +16178,7 @@
               </a:defRPr>
             </a:lvl8pPr>
             <a:lvl9pPr algn="l">
+              <a:buNone/>
               <a:defRPr sz="1425" b="0">
                 <a:solidFill>
                   <a:srgbClr val="53647C"/>
@@ -15542,6 +16191,7 @@
           </a:lstStyle>
           <a:p xmlns:a="http://schemas.openxmlformats.org/drawingml/2006/main">
             <a:pPr algn="l">
+              <a:buNone/>
               <a:defRPr sz="1425" b="0">
                 <a:solidFill>
                   <a:srgbClr val="53647C"/>
@@ -15638,6 +16288,7 @@
               </a:defRPr>
             </a:defPPr>
             <a:lvl1pPr algn="l">
+              <a:buNone/>
               <a:defRPr sz="3300" b="1">
                 <a:solidFill>
                   <a:srgbClr val="152B4B"/>
@@ -15648,6 +16299,7 @@
               </a:defRPr>
             </a:lvl1pPr>
             <a:lvl2pPr algn="l">
+              <a:buNone/>
               <a:defRPr sz="3300" b="1">
                 <a:solidFill>
                   <a:srgbClr val="152B4B"/>
@@ -15658,6 +16310,7 @@
               </a:defRPr>
             </a:lvl2pPr>
             <a:lvl3pPr algn="l">
+              <a:buNone/>
               <a:defRPr sz="3300" b="1">
                 <a:solidFill>
                   <a:srgbClr val="152B4B"/>
@@ -15668,6 +16321,7 @@
               </a:defRPr>
             </a:lvl3pPr>
             <a:lvl4pPr algn="l">
+              <a:buNone/>
               <a:defRPr sz="3300" b="1">
                 <a:solidFill>
                   <a:srgbClr val="152B4B"/>
@@ -15678,6 +16332,7 @@
               </a:defRPr>
             </a:lvl4pPr>
             <a:lvl5pPr algn="l">
+              <a:buNone/>
               <a:defRPr sz="3300" b="1">
                 <a:solidFill>
                   <a:srgbClr val="152B4B"/>
@@ -15688,6 +16343,7 @@
               </a:defRPr>
             </a:lvl5pPr>
             <a:lvl6pPr algn="l">
+              <a:buNone/>
               <a:defRPr sz="3300" b="1">
                 <a:solidFill>
                   <a:srgbClr val="152B4B"/>
@@ -15698,6 +16354,7 @@
               </a:defRPr>
             </a:lvl6pPr>
             <a:lvl7pPr algn="l">
+              <a:buNone/>
               <a:defRPr sz="3300" b="1">
                 <a:solidFill>
                   <a:srgbClr val="152B4B"/>
@@ -15708,6 +16365,7 @@
               </a:defRPr>
             </a:lvl7pPr>
             <a:lvl8pPr algn="l">
+              <a:buNone/>
               <a:defRPr sz="3300" b="1">
                 <a:solidFill>
                   <a:srgbClr val="152B4B"/>
@@ -15718,6 +16376,7 @@
               </a:defRPr>
             </a:lvl8pPr>
             <a:lvl9pPr algn="l">
+              <a:buNone/>
               <a:defRPr sz="3300" b="1">
                 <a:solidFill>
                   <a:srgbClr val="152B4B"/>
@@ -15730,6 +16389,7 @@
           </a:lstStyle>
           <a:p xmlns:a="http://schemas.openxmlformats.org/drawingml/2006/main">
             <a:pPr algn="l">
+              <a:buNone/>
               <a:defRPr sz="3300" b="1">
                 <a:solidFill>
                   <a:srgbClr val="152B4B"/>
@@ -15797,6 +16457,7 @@
               </a:defRPr>
             </a:defPPr>
             <a:lvl1pPr algn="l">
+              <a:buNone/>
               <a:defRPr sz="1875" b="0">
                 <a:solidFill>
                   <a:srgbClr val="53647C"/>
@@ -15807,6 +16468,7 @@
               </a:defRPr>
             </a:lvl1pPr>
             <a:lvl2pPr algn="l">
+              <a:buNone/>
               <a:defRPr sz="1875" b="0">
                 <a:solidFill>
                   <a:srgbClr val="53647C"/>
@@ -15817,6 +16479,7 @@
               </a:defRPr>
             </a:lvl2pPr>
             <a:lvl3pPr algn="l">
+              <a:buNone/>
               <a:defRPr sz="1875" b="0">
                 <a:solidFill>
                   <a:srgbClr val="53647C"/>
@@ -15827,6 +16490,7 @@
               </a:defRPr>
             </a:lvl3pPr>
             <a:lvl4pPr algn="l">
+              <a:buNone/>
               <a:defRPr sz="1875" b="0">
                 <a:solidFill>
                   <a:srgbClr val="53647C"/>
@@ -15837,6 +16501,7 @@
               </a:defRPr>
             </a:lvl4pPr>
             <a:lvl5pPr algn="l">
+              <a:buNone/>
               <a:defRPr sz="1875" b="0">
                 <a:solidFill>
                   <a:srgbClr val="53647C"/>
@@ -15847,6 +16512,7 @@
               </a:defRPr>
             </a:lvl5pPr>
             <a:lvl6pPr algn="l">
+              <a:buNone/>
               <a:defRPr sz="1875" b="0">
                 <a:solidFill>
                   <a:srgbClr val="53647C"/>
@@ -15857,6 +16523,7 @@
               </a:defRPr>
             </a:lvl6pPr>
             <a:lvl7pPr algn="l">
+              <a:buNone/>
               <a:defRPr sz="1875" b="0">
                 <a:solidFill>
                   <a:srgbClr val="53647C"/>
@@ -15867,6 +16534,7 @@
               </a:defRPr>
             </a:lvl7pPr>
             <a:lvl8pPr algn="l">
+              <a:buNone/>
               <a:defRPr sz="1875" b="0">
                 <a:solidFill>
                   <a:srgbClr val="53647C"/>
@@ -15877,6 +16545,7 @@
               </a:defRPr>
             </a:lvl8pPr>
             <a:lvl9pPr algn="l">
+              <a:buNone/>
               <a:defRPr sz="1875" b="0">
                 <a:solidFill>
                   <a:srgbClr val="53647C"/>
@@ -15889,6 +16558,7 @@
           </a:lstStyle>
           <a:p xmlns:a="http://schemas.openxmlformats.org/drawingml/2006/main">
             <a:pPr algn="l">
+              <a:buNone/>
               <a:defRPr sz="1875" b="0">
                 <a:solidFill>
                   <a:srgbClr val="53647C"/>
@@ -15956,6 +16626,7 @@
               </a:defRPr>
             </a:defPPr>
             <a:lvl1pPr algn="l">
+              <a:buNone/>
               <a:defRPr sz="1275" b="0">
                 <a:solidFill>
                   <a:srgbClr val="53647C"/>
@@ -15966,6 +16637,7 @@
               </a:defRPr>
             </a:lvl1pPr>
             <a:lvl2pPr algn="l">
+              <a:buNone/>
               <a:defRPr sz="1275" b="0">
                 <a:solidFill>
                   <a:srgbClr val="53647C"/>
@@ -15976,6 +16648,7 @@
               </a:defRPr>
             </a:lvl2pPr>
             <a:lvl3pPr algn="l">
+              <a:buNone/>
               <a:defRPr sz="1275" b="0">
                 <a:solidFill>
                   <a:srgbClr val="53647C"/>
@@ -15986,6 +16659,7 @@
               </a:defRPr>
             </a:lvl3pPr>
             <a:lvl4pPr algn="l">
+              <a:buNone/>
               <a:defRPr sz="1275" b="0">
                 <a:solidFill>
                   <a:srgbClr val="53647C"/>
@@ -15996,6 +16670,7 @@
               </a:defRPr>
             </a:lvl4pPr>
             <a:lvl5pPr algn="l">
+              <a:buNone/>
               <a:defRPr sz="1275" b="0">
                 <a:solidFill>
                   <a:srgbClr val="53647C"/>
@@ -16006,6 +16681,7 @@
               </a:defRPr>
             </a:lvl5pPr>
             <a:lvl6pPr algn="l">
+              <a:buNone/>
               <a:defRPr sz="1275" b="0">
                 <a:solidFill>
                   <a:srgbClr val="53647C"/>
@@ -16016,6 +16692,7 @@
               </a:defRPr>
             </a:lvl6pPr>
             <a:lvl7pPr algn="l">
+              <a:buNone/>
               <a:defRPr sz="1275" b="0">
                 <a:solidFill>
                   <a:srgbClr val="53647C"/>
@@ -16026,6 +16703,7 @@
               </a:defRPr>
             </a:lvl7pPr>
             <a:lvl8pPr algn="l">
+              <a:buNone/>
               <a:defRPr sz="1275" b="0">
                 <a:solidFill>
                   <a:srgbClr val="53647C"/>
@@ -16036,6 +16714,7 @@
               </a:defRPr>
             </a:lvl8pPr>
             <a:lvl9pPr algn="l">
+              <a:buNone/>
               <a:defRPr sz="1275" b="0">
                 <a:solidFill>
                   <a:srgbClr val="53647C"/>
@@ -16048,6 +16727,7 @@
           </a:lstStyle>
           <a:p xmlns:a="http://schemas.openxmlformats.org/drawingml/2006/main">
             <a:pPr algn="l">
+              <a:buNone/>
               <a:defRPr sz="1275" b="0">
                 <a:solidFill>
                   <a:srgbClr val="53647C"/>
@@ -16115,6 +16795,7 @@
               </a:defRPr>
             </a:defPPr>
             <a:lvl1pPr algn="r">
+              <a:buNone/>
               <a:defRPr sz="1350" b="0">
                 <a:solidFill>
                   <a:srgbClr val="285AD6"/>
@@ -16125,6 +16806,7 @@
               </a:defRPr>
             </a:lvl1pPr>
             <a:lvl2pPr algn="r">
+              <a:buNone/>
               <a:defRPr sz="1350" b="0">
                 <a:solidFill>
                   <a:srgbClr val="285AD6"/>
@@ -16135,6 +16817,7 @@
               </a:defRPr>
             </a:lvl2pPr>
             <a:lvl3pPr algn="r">
+              <a:buNone/>
               <a:defRPr sz="1350" b="0">
                 <a:solidFill>
                   <a:srgbClr val="285AD6"/>
@@ -16145,6 +16828,7 @@
               </a:defRPr>
             </a:lvl3pPr>
             <a:lvl4pPr algn="r">
+              <a:buNone/>
               <a:defRPr sz="1350" b="0">
                 <a:solidFill>
                   <a:srgbClr val="285AD6"/>
@@ -16155,6 +16839,7 @@
               </a:defRPr>
             </a:lvl4pPr>
             <a:lvl5pPr algn="r">
+              <a:buNone/>
               <a:defRPr sz="1350" b="0">
                 <a:solidFill>
                   <a:srgbClr val="285AD6"/>
@@ -16165,6 +16850,7 @@
               </a:defRPr>
             </a:lvl5pPr>
             <a:lvl6pPr algn="r">
+              <a:buNone/>
               <a:defRPr sz="1350" b="0">
                 <a:solidFill>
                   <a:srgbClr val="285AD6"/>
@@ -16175,6 +16861,7 @@
               </a:defRPr>
             </a:lvl6pPr>
             <a:lvl7pPr algn="r">
+              <a:buNone/>
               <a:defRPr sz="1350" b="0">
                 <a:solidFill>
                   <a:srgbClr val="285AD6"/>
@@ -16185,6 +16872,7 @@
               </a:defRPr>
             </a:lvl7pPr>
             <a:lvl8pPr algn="r">
+              <a:buNone/>
               <a:defRPr sz="1350" b="0">
                 <a:solidFill>
                   <a:srgbClr val="285AD6"/>
@@ -16195,6 +16883,7 @@
               </a:defRPr>
             </a:lvl8pPr>
             <a:lvl9pPr algn="r">
+              <a:buNone/>
               <a:defRPr sz="1350" b="0">
                 <a:solidFill>
                   <a:srgbClr val="285AD6"/>
@@ -16207,6 +16896,7 @@
           </a:lstStyle>
           <a:p xmlns:a="http://schemas.openxmlformats.org/drawingml/2006/main">
             <a:pPr algn="r">
+              <a:buNone/>
               <a:defRPr sz="1350" b="0">
                 <a:solidFill>
                   <a:srgbClr val="285AD6"/>
@@ -16235,7 +16925,7 @@
           <p:cNvPr id="5" name="">
             <a:extLst xmlns:a="http://schemas.openxmlformats.org/drawingml/2006/main">
               <a:ext uri="{FF2B5EF4-FFF2-40B4-BE49-F238E27FC236}">
-                <a16:creationId xmlns:a16="http://schemas.microsoft.com/office/drawing/2014/main" id="{7D7D188F-3FA8-4135-ABA8-5887231F4E71}"/>
+                <a16:creationId xmlns:a16="http://schemas.microsoft.com/office/drawing/2014/main" id="{D22DBA72-DB66-4A45-B220-D87E51694A43}"/>
               </a:ext>
             </a:extLst>
           </p:cNvPr>
@@ -16262,7 +16952,9 @@
                     </a:bodyPr>
                     <a:lstStyle/>
                     <a:p>
-                      <a:pPr algn="ctr"/>
+                      <a:pPr algn="ctr">
+                        <a:buNone/>
+                      </a:pPr>
                       <a:r>
                         <a:rPr sz="1875" b="1">
                           <a:solidFill>
@@ -16313,7 +17005,9 @@
                     </a:bodyPr>
                     <a:lstStyle/>
                     <a:p>
-                      <a:pPr algn="ctr"/>
+                      <a:pPr algn="ctr">
+                        <a:buNone/>
+                      </a:pPr>
                       <a:r>
                         <a:rPr sz="1875" b="1">
                           <a:solidFill>
@@ -16360,7 +17054,9 @@
                     </a:bodyPr>
                     <a:lstStyle/>
                     <a:p>
-                      <a:pPr algn="ctr"/>
+                      <a:pPr algn="ctr">
+                        <a:buNone/>
+                      </a:pPr>
                       <a:r>
                         <a:rPr sz="1875" b="0">
                           <a:solidFill>
@@ -16405,7 +17101,9 @@
                     </a:bodyPr>
                     <a:lstStyle/>
                     <a:p>
-                      <a:pPr algn="ctr"/>
+                      <a:pPr algn="ctr">
+                        <a:buNone/>
+                      </a:pPr>
                       <a:r>
                         <a:rPr sz="1875" b="0">
                           <a:solidFill>
@@ -16446,7 +17144,9 @@
                     </a:bodyPr>
                     <a:lstStyle/>
                     <a:p>
-                      <a:pPr algn="ctr"/>
+                      <a:pPr algn="ctr">
+                        <a:buNone/>
+                      </a:pPr>
                       <a:r>
                         <a:rPr sz="1875" b="0">
                           <a:solidFill>
@@ -16491,7 +17191,9 @@
                     </a:bodyPr>
                     <a:lstStyle/>
                     <a:p>
-                      <a:pPr algn="ctr"/>
+                      <a:pPr algn="ctr">
+                        <a:buNone/>
+                      </a:pPr>
                       <a:r>
                         <a:rPr sz="1875" b="0">
                           <a:solidFill>
@@ -16532,7 +17234,9 @@
                     </a:bodyPr>
                     <a:lstStyle/>
                     <a:p>
-                      <a:pPr algn="ctr"/>
+                      <a:pPr algn="ctr">
+                        <a:buNone/>
+                      </a:pPr>
                       <a:r>
                         <a:rPr sz="1875" b="0">
                           <a:solidFill>
@@ -16577,7 +17281,9 @@
                     </a:bodyPr>
                     <a:lstStyle/>
                     <a:p>
-                      <a:pPr algn="ctr"/>
+                      <a:pPr algn="ctr">
+                        <a:buNone/>
+                      </a:pPr>
                       <a:r>
                         <a:rPr sz="1875" b="0">
                           <a:solidFill>
@@ -16618,7 +17324,9 @@
                     </a:bodyPr>
                     <a:lstStyle/>
                     <a:p>
-                      <a:pPr algn="ctr"/>
+                      <a:pPr algn="ctr">
+                        <a:buNone/>
+                      </a:pPr>
                       <a:r>
                         <a:rPr sz="1875" b="0">
                           <a:solidFill>
@@ -16663,7 +17371,9 @@
                     </a:bodyPr>
                     <a:lstStyle/>
                     <a:p>
-                      <a:pPr algn="ctr"/>
+                      <a:pPr algn="ctr">
+                        <a:buNone/>
+                      </a:pPr>
                       <a:r>
                         <a:rPr sz="1875" b="0">
                           <a:solidFill>
@@ -16744,6 +17454,7 @@
               </a:defRPr>
             </a:defPPr>
             <a:lvl1pPr algn="l">
+              <a:buNone/>
               <a:defRPr sz="1425" b="0">
                 <a:solidFill>
                   <a:srgbClr val="53647C"/>
@@ -16754,6 +17465,7 @@
               </a:defRPr>
             </a:lvl1pPr>
             <a:lvl2pPr algn="l">
+              <a:buNone/>
               <a:defRPr sz="1425" b="0">
                 <a:solidFill>
                   <a:srgbClr val="53647C"/>
@@ -16764,6 +17476,7 @@
               </a:defRPr>
             </a:lvl2pPr>
             <a:lvl3pPr algn="l">
+              <a:buNone/>
               <a:defRPr sz="1425" b="0">
                 <a:solidFill>
                   <a:srgbClr val="53647C"/>
@@ -16774,6 +17487,7 @@
               </a:defRPr>
             </a:lvl3pPr>
             <a:lvl4pPr algn="l">
+              <a:buNone/>
               <a:defRPr sz="1425" b="0">
                 <a:solidFill>
                   <a:srgbClr val="53647C"/>
@@ -16784,6 +17498,7 @@
               </a:defRPr>
             </a:lvl4pPr>
             <a:lvl5pPr algn="l">
+              <a:buNone/>
               <a:defRPr sz="1425" b="0">
                 <a:solidFill>
                   <a:srgbClr val="53647C"/>
@@ -16794,6 +17509,7 @@
               </a:defRPr>
             </a:lvl5pPr>
             <a:lvl6pPr algn="l">
+              <a:buNone/>
               <a:defRPr sz="1425" b="0">
                 <a:solidFill>
                   <a:srgbClr val="53647C"/>
@@ -16804,6 +17520,7 @@
               </a:defRPr>
             </a:lvl6pPr>
             <a:lvl7pPr algn="l">
+              <a:buNone/>
               <a:defRPr sz="1425" b="0">
                 <a:solidFill>
                   <a:srgbClr val="53647C"/>
@@ -16814,6 +17531,7 @@
               </a:defRPr>
             </a:lvl7pPr>
             <a:lvl8pPr algn="l">
+              <a:buNone/>
               <a:defRPr sz="1425" b="0">
                 <a:solidFill>
                   <a:srgbClr val="53647C"/>
@@ -16824,6 +17542,7 @@
               </a:defRPr>
             </a:lvl8pPr>
             <a:lvl9pPr algn="l">
+              <a:buNone/>
               <a:defRPr sz="1425" b="0">
                 <a:solidFill>
                   <a:srgbClr val="53647C"/>
@@ -16836,6 +17555,7 @@
           </a:lstStyle>
           <a:p xmlns:a="http://schemas.openxmlformats.org/drawingml/2006/main">
             <a:pPr algn="l">
+              <a:buNone/>
               <a:defRPr sz="1425" b="0">
                 <a:solidFill>
                   <a:srgbClr val="53647C"/>
@@ -16859,6 +17579,7 @@
           </a:p>
           <a:p xmlns:a="http://schemas.openxmlformats.org/drawingml/2006/main">
             <a:pPr algn="l">
+              <a:buNone/>
               <a:defRPr sz="1425" b="0">
                 <a:solidFill>
                   <a:srgbClr val="53647C"/>
@@ -16955,6 +17676,7 @@
               </a:defRPr>
             </a:defPPr>
             <a:lvl1pPr algn="l">
+              <a:buNone/>
               <a:defRPr sz="3300" b="1">
                 <a:solidFill>
                   <a:srgbClr val="152B4B"/>
@@ -16965,6 +17687,7 @@
               </a:defRPr>
             </a:lvl1pPr>
             <a:lvl2pPr algn="l">
+              <a:buNone/>
               <a:defRPr sz="3300" b="1">
                 <a:solidFill>
                   <a:srgbClr val="152B4B"/>
@@ -16975,6 +17698,7 @@
               </a:defRPr>
             </a:lvl2pPr>
             <a:lvl3pPr algn="l">
+              <a:buNone/>
               <a:defRPr sz="3300" b="1">
                 <a:solidFill>
                   <a:srgbClr val="152B4B"/>
@@ -16985,6 +17709,7 @@
               </a:defRPr>
             </a:lvl3pPr>
             <a:lvl4pPr algn="l">
+              <a:buNone/>
               <a:defRPr sz="3300" b="1">
                 <a:solidFill>
                   <a:srgbClr val="152B4B"/>
@@ -16995,6 +17720,7 @@
               </a:defRPr>
             </a:lvl4pPr>
             <a:lvl5pPr algn="l">
+              <a:buNone/>
               <a:defRPr sz="3300" b="1">
                 <a:solidFill>
                   <a:srgbClr val="152B4B"/>
@@ -17005,6 +17731,7 @@
               </a:defRPr>
             </a:lvl5pPr>
             <a:lvl6pPr algn="l">
+              <a:buNone/>
               <a:defRPr sz="3300" b="1">
                 <a:solidFill>
                   <a:srgbClr val="152B4B"/>
@@ -17015,6 +17742,7 @@
               </a:defRPr>
             </a:lvl6pPr>
             <a:lvl7pPr algn="l">
+              <a:buNone/>
               <a:defRPr sz="3300" b="1">
                 <a:solidFill>
                   <a:srgbClr val="152B4B"/>
@@ -17025,6 +17753,7 @@
               </a:defRPr>
             </a:lvl7pPr>
             <a:lvl8pPr algn="l">
+              <a:buNone/>
               <a:defRPr sz="3300" b="1">
                 <a:solidFill>
                   <a:srgbClr val="152B4B"/>
@@ -17035,6 +17764,7 @@
               </a:defRPr>
             </a:lvl8pPr>
             <a:lvl9pPr algn="l">
+              <a:buNone/>
               <a:defRPr sz="3300" b="1">
                 <a:solidFill>
                   <a:srgbClr val="152B4B"/>
@@ -17047,6 +17777,7 @@
           </a:lstStyle>
           <a:p xmlns:a="http://schemas.openxmlformats.org/drawingml/2006/main">
             <a:pPr algn="l">
+              <a:buNone/>
               <a:defRPr sz="3300" b="1">
                 <a:solidFill>
                   <a:srgbClr val="152B4B"/>
@@ -17114,6 +17845,7 @@
               </a:defRPr>
             </a:defPPr>
             <a:lvl1pPr algn="l">
+              <a:buNone/>
               <a:defRPr sz="1875" b="0">
                 <a:solidFill>
                   <a:srgbClr val="53647C"/>
@@ -17124,6 +17856,7 @@
               </a:defRPr>
             </a:lvl1pPr>
             <a:lvl2pPr algn="l">
+              <a:buNone/>
               <a:defRPr sz="1875" b="0">
                 <a:solidFill>
                   <a:srgbClr val="53647C"/>
@@ -17134,6 +17867,7 @@
               </a:defRPr>
             </a:lvl2pPr>
             <a:lvl3pPr algn="l">
+              <a:buNone/>
               <a:defRPr sz="1875" b="0">
                 <a:solidFill>
                   <a:srgbClr val="53647C"/>
@@ -17144,6 +17878,7 @@
               </a:defRPr>
             </a:lvl3pPr>
             <a:lvl4pPr algn="l">
+              <a:buNone/>
               <a:defRPr sz="1875" b="0">
                 <a:solidFill>
                   <a:srgbClr val="53647C"/>
@@ -17154,6 +17889,7 @@
               </a:defRPr>
             </a:lvl4pPr>
             <a:lvl5pPr algn="l">
+              <a:buNone/>
               <a:defRPr sz="1875" b="0">
                 <a:solidFill>
                   <a:srgbClr val="53647C"/>
@@ -17164,6 +17900,7 @@
               </a:defRPr>
             </a:lvl5pPr>
             <a:lvl6pPr algn="l">
+              <a:buNone/>
               <a:defRPr sz="1875" b="0">
                 <a:solidFill>
                   <a:srgbClr val="53647C"/>
@@ -17174,6 +17911,7 @@
               </a:defRPr>
             </a:lvl6pPr>
             <a:lvl7pPr algn="l">
+              <a:buNone/>
               <a:defRPr sz="1875" b="0">
                 <a:solidFill>
                   <a:srgbClr val="53647C"/>
@@ -17184,6 +17922,7 @@
               </a:defRPr>
             </a:lvl7pPr>
             <a:lvl8pPr algn="l">
+              <a:buNone/>
               <a:defRPr sz="1875" b="0">
                 <a:solidFill>
                   <a:srgbClr val="53647C"/>
@@ -17194,6 +17933,7 @@
               </a:defRPr>
             </a:lvl8pPr>
             <a:lvl9pPr algn="l">
+              <a:buNone/>
               <a:defRPr sz="1875" b="0">
                 <a:solidFill>
                   <a:srgbClr val="53647C"/>
@@ -17206,6 +17946,7 @@
           </a:lstStyle>
           <a:p xmlns:a="http://schemas.openxmlformats.org/drawingml/2006/main">
             <a:pPr algn="l">
+              <a:buNone/>
               <a:defRPr sz="1875" b="0">
                 <a:solidFill>
                   <a:srgbClr val="53647C"/>
@@ -17273,6 +18014,7 @@
               </a:defRPr>
             </a:defPPr>
             <a:lvl1pPr algn="l">
+              <a:buNone/>
               <a:defRPr sz="1275" b="0">
                 <a:solidFill>
                   <a:srgbClr val="53647C"/>
@@ -17283,6 +18025,7 @@
               </a:defRPr>
             </a:lvl1pPr>
             <a:lvl2pPr algn="l">
+              <a:buNone/>
               <a:defRPr sz="1275" b="0">
                 <a:solidFill>
                   <a:srgbClr val="53647C"/>
@@ -17293,6 +18036,7 @@
               </a:defRPr>
             </a:lvl2pPr>
             <a:lvl3pPr algn="l">
+              <a:buNone/>
               <a:defRPr sz="1275" b="0">
                 <a:solidFill>
                   <a:srgbClr val="53647C"/>
@@ -17303,6 +18047,7 @@
               </a:defRPr>
             </a:lvl3pPr>
             <a:lvl4pPr algn="l">
+              <a:buNone/>
               <a:defRPr sz="1275" b="0">
                 <a:solidFill>
                   <a:srgbClr val="53647C"/>
@@ -17313,6 +18058,7 @@
               </a:defRPr>
             </a:lvl4pPr>
             <a:lvl5pPr algn="l">
+              <a:buNone/>
               <a:defRPr sz="1275" b="0">
                 <a:solidFill>
                   <a:srgbClr val="53647C"/>
@@ -17323,6 +18069,7 @@
               </a:defRPr>
             </a:lvl5pPr>
             <a:lvl6pPr algn="l">
+              <a:buNone/>
               <a:defRPr sz="1275" b="0">
                 <a:solidFill>
                   <a:srgbClr val="53647C"/>
@@ -17333,6 +18080,7 @@
               </a:defRPr>
             </a:lvl6pPr>
             <a:lvl7pPr algn="l">
+              <a:buNone/>
               <a:defRPr sz="1275" b="0">
                 <a:solidFill>
                   <a:srgbClr val="53647C"/>
@@ -17343,6 +18091,7 @@
               </a:defRPr>
             </a:lvl7pPr>
             <a:lvl8pPr algn="l">
+              <a:buNone/>
               <a:defRPr sz="1275" b="0">
                 <a:solidFill>
                   <a:srgbClr val="53647C"/>
@@ -17353,6 +18102,7 @@
               </a:defRPr>
             </a:lvl8pPr>
             <a:lvl9pPr algn="l">
+              <a:buNone/>
               <a:defRPr sz="1275" b="0">
                 <a:solidFill>
                   <a:srgbClr val="53647C"/>
@@ -17365,6 +18115,7 @@
           </a:lstStyle>
           <a:p xmlns:a="http://schemas.openxmlformats.org/drawingml/2006/main">
             <a:pPr algn="l">
+              <a:buNone/>
               <a:defRPr sz="1275" b="0">
                 <a:solidFill>
                   <a:srgbClr val="53647C"/>
@@ -17432,6 +18183,7 @@
               </a:defRPr>
             </a:defPPr>
             <a:lvl1pPr algn="r">
+              <a:buNone/>
               <a:defRPr sz="1350" b="0">
                 <a:solidFill>
                   <a:srgbClr val="285AD6"/>
@@ -17442,6 +18194,7 @@
               </a:defRPr>
             </a:lvl1pPr>
             <a:lvl2pPr algn="r">
+              <a:buNone/>
               <a:defRPr sz="1350" b="0">
                 <a:solidFill>
                   <a:srgbClr val="285AD6"/>
@@ -17452,6 +18205,7 @@
               </a:defRPr>
             </a:lvl2pPr>
             <a:lvl3pPr algn="r">
+              <a:buNone/>
               <a:defRPr sz="1350" b="0">
                 <a:solidFill>
                   <a:srgbClr val="285AD6"/>
@@ -17462,6 +18216,7 @@
               </a:defRPr>
             </a:lvl3pPr>
             <a:lvl4pPr algn="r">
+              <a:buNone/>
               <a:defRPr sz="1350" b="0">
                 <a:solidFill>
                   <a:srgbClr val="285AD6"/>
@@ -17472,6 +18227,7 @@
               </a:defRPr>
             </a:lvl4pPr>
             <a:lvl5pPr algn="r">
+              <a:buNone/>
               <a:defRPr sz="1350" b="0">
                 <a:solidFill>
                   <a:srgbClr val="285AD6"/>
@@ -17482,6 +18238,7 @@
               </a:defRPr>
             </a:lvl5pPr>
             <a:lvl6pPr algn="r">
+              <a:buNone/>
               <a:defRPr sz="1350" b="0">
                 <a:solidFill>
                   <a:srgbClr val="285AD6"/>
@@ -17492,6 +18249,7 @@
               </a:defRPr>
             </a:lvl6pPr>
             <a:lvl7pPr algn="r">
+              <a:buNone/>
               <a:defRPr sz="1350" b="0">
                 <a:solidFill>
                   <a:srgbClr val="285AD6"/>
@@ -17502,6 +18260,7 @@
               </a:defRPr>
             </a:lvl7pPr>
             <a:lvl8pPr algn="r">
+              <a:buNone/>
               <a:defRPr sz="1350" b="0">
                 <a:solidFill>
                   <a:srgbClr val="285AD6"/>
@@ -17512,6 +18271,7 @@
               </a:defRPr>
             </a:lvl8pPr>
             <a:lvl9pPr algn="r">
+              <a:buNone/>
               <a:defRPr sz="1350" b="0">
                 <a:solidFill>
                   <a:srgbClr val="285AD6"/>
@@ -17524,6 +18284,7 @@
           </a:lstStyle>
           <a:p xmlns:a="http://schemas.openxmlformats.org/drawingml/2006/main">
             <a:pPr algn="r">
+              <a:buNone/>
               <a:defRPr sz="1350" b="0">
                 <a:solidFill>
                   <a:srgbClr val="285AD6"/>
@@ -17591,6 +18352,7 @@
               </a:defRPr>
             </a:defPPr>
             <a:lvl1pPr algn="l">
+              <a:buNone/>
               <a:defRPr sz="2325" b="1">
                 <a:solidFill>
                   <a:srgbClr val="285AD6"/>
@@ -17601,6 +18363,7 @@
               </a:defRPr>
             </a:lvl1pPr>
             <a:lvl2pPr algn="l">
+              <a:buNone/>
               <a:defRPr sz="2325" b="1">
                 <a:solidFill>
                   <a:srgbClr val="285AD6"/>
@@ -17611,6 +18374,7 @@
               </a:defRPr>
             </a:lvl2pPr>
             <a:lvl3pPr algn="l">
+              <a:buNone/>
               <a:defRPr sz="2325" b="1">
                 <a:solidFill>
                   <a:srgbClr val="285AD6"/>
@@ -17621,6 +18385,7 @@
               </a:defRPr>
             </a:lvl3pPr>
             <a:lvl4pPr algn="l">
+              <a:buNone/>
               <a:defRPr sz="2325" b="1">
                 <a:solidFill>
                   <a:srgbClr val="285AD6"/>
@@ -17631,6 +18396,7 @@
               </a:defRPr>
             </a:lvl4pPr>
             <a:lvl5pPr algn="l">
+              <a:buNone/>
               <a:defRPr sz="2325" b="1">
                 <a:solidFill>
                   <a:srgbClr val="285AD6"/>
@@ -17641,6 +18407,7 @@
               </a:defRPr>
             </a:lvl5pPr>
             <a:lvl6pPr algn="l">
+              <a:buNone/>
               <a:defRPr sz="2325" b="1">
                 <a:solidFill>
                   <a:srgbClr val="285AD6"/>
@@ -17651,6 +18418,7 @@
               </a:defRPr>
             </a:lvl6pPr>
             <a:lvl7pPr algn="l">
+              <a:buNone/>
               <a:defRPr sz="2325" b="1">
                 <a:solidFill>
                   <a:srgbClr val="285AD6"/>
@@ -17661,6 +18429,7 @@
               </a:defRPr>
             </a:lvl7pPr>
             <a:lvl8pPr algn="l">
+              <a:buNone/>
               <a:defRPr sz="2325" b="1">
                 <a:solidFill>
                   <a:srgbClr val="285AD6"/>
@@ -17671,6 +18440,7 @@
               </a:defRPr>
             </a:lvl8pPr>
             <a:lvl9pPr algn="l">
+              <a:buNone/>
               <a:defRPr sz="2325" b="1">
                 <a:solidFill>
                   <a:srgbClr val="285AD6"/>
@@ -17683,6 +18453,7 @@
           </a:lstStyle>
           <a:p xmlns:a="http://schemas.openxmlformats.org/drawingml/2006/main">
             <a:pPr algn="l">
+              <a:buNone/>
               <a:defRPr sz="2325" b="1">
                 <a:solidFill>
                   <a:srgbClr val="285AD6"/>
@@ -17750,6 +18521,7 @@
               </a:defRPr>
             </a:defPPr>
             <a:lvl1pPr algn="l">
+              <a:buNone/>
               <a:defRPr sz="2100" b="0">
                 <a:solidFill>
                   <a:srgbClr val="152B4B"/>
@@ -17760,6 +18532,7 @@
               </a:defRPr>
             </a:lvl1pPr>
             <a:lvl2pPr algn="l">
+              <a:buNone/>
               <a:defRPr sz="2100" b="0">
                 <a:solidFill>
                   <a:srgbClr val="152B4B"/>
@@ -17770,6 +18543,7 @@
               </a:defRPr>
             </a:lvl2pPr>
             <a:lvl3pPr algn="l">
+              <a:buNone/>
               <a:defRPr sz="2100" b="0">
                 <a:solidFill>
                   <a:srgbClr val="152B4B"/>
@@ -17780,6 +18554,7 @@
               </a:defRPr>
             </a:lvl3pPr>
             <a:lvl4pPr algn="l">
+              <a:buNone/>
               <a:defRPr sz="2100" b="0">
                 <a:solidFill>
                   <a:srgbClr val="152B4B"/>
@@ -17790,6 +18565,7 @@
               </a:defRPr>
             </a:lvl4pPr>
             <a:lvl5pPr algn="l">
+              <a:buNone/>
               <a:defRPr sz="2100" b="0">
                 <a:solidFill>
                   <a:srgbClr val="152B4B"/>
@@ -17800,6 +18576,7 @@
               </a:defRPr>
             </a:lvl5pPr>
             <a:lvl6pPr algn="l">
+              <a:buNone/>
               <a:defRPr sz="2100" b="0">
                 <a:solidFill>
                   <a:srgbClr val="152B4B"/>
@@ -17810,6 +18587,7 @@
               </a:defRPr>
             </a:lvl6pPr>
             <a:lvl7pPr algn="l">
+              <a:buNone/>
               <a:defRPr sz="2100" b="0">
                 <a:solidFill>
                   <a:srgbClr val="152B4B"/>
@@ -17820,6 +18598,7 @@
               </a:defRPr>
             </a:lvl7pPr>
             <a:lvl8pPr algn="l">
+              <a:buNone/>
               <a:defRPr sz="2100" b="0">
                 <a:solidFill>
                   <a:srgbClr val="152B4B"/>
@@ -17830,6 +18609,7 @@
               </a:defRPr>
             </a:lvl8pPr>
             <a:lvl9pPr algn="l">
+              <a:buNone/>
               <a:defRPr sz="2100" b="0">
                 <a:solidFill>
                   <a:srgbClr val="152B4B"/>
@@ -17842,6 +18622,7 @@
           </a:lstStyle>
           <a:p xmlns:a="http://schemas.openxmlformats.org/drawingml/2006/main">
             <a:pPr algn="l">
+              <a:buNone/>
               <a:defRPr sz="2100" b="0">
                 <a:solidFill>
                   <a:srgbClr val="152B4B"/>
@@ -17865,6 +18646,7 @@
           </a:p>
           <a:p xmlns:a="http://schemas.openxmlformats.org/drawingml/2006/main">
             <a:pPr algn="l">
+              <a:buNone/>
               <a:defRPr sz="2100" b="0">
                 <a:solidFill>
                   <a:srgbClr val="152B4B"/>
@@ -17888,6 +18670,7 @@
           </a:p>
           <a:p xmlns:a="http://schemas.openxmlformats.org/drawingml/2006/main">
             <a:pPr algn="l">
+              <a:buNone/>
               <a:defRPr sz="2100" b="0">
                 <a:solidFill>
                   <a:srgbClr val="152B4B"/>
@@ -17911,6 +18694,7 @@
           </a:p>
           <a:p xmlns:a="http://schemas.openxmlformats.org/drawingml/2006/main">
             <a:pPr algn="l">
+              <a:buNone/>
               <a:defRPr sz="2100" b="0">
                 <a:solidFill>
                   <a:srgbClr val="152B4B"/>
@@ -17939,7 +18723,7 @@
           <p:cNvPr id="7" name="">
             <a:extLst xmlns:a="http://schemas.openxmlformats.org/drawingml/2006/main">
               <a:ext uri="{FF2B5EF4-FFF2-40B4-BE49-F238E27FC236}">
-                <a16:creationId xmlns:a16="http://schemas.microsoft.com/office/drawing/2014/main" id="{8C9BF875-9798-49FE-B5F8-6BEFAE5548A9}"/>
+                <a16:creationId xmlns:a16="http://schemas.microsoft.com/office/drawing/2014/main" id="{545F0997-F45D-4D68-865A-8703C5CA386E}"/>
               </a:ext>
             </a:extLst>
           </p:cNvPr>
@@ -17966,7 +18750,9 @@
                     </a:bodyPr>
                     <a:lstStyle/>
                     <a:p>
-                      <a:pPr algn="ctr"/>
+                      <a:pPr algn="ctr">
+                        <a:buNone/>
+                      </a:pPr>
                       <a:r>
                         <a:rPr sz="1725" b="1">
                           <a:solidFill>
@@ -18017,7 +18803,9 @@
                     </a:bodyPr>
                     <a:lstStyle/>
                     <a:p>
-                      <a:pPr algn="ctr"/>
+                      <a:pPr algn="ctr">
+                        <a:buNone/>
+                      </a:pPr>
                       <a:r>
                         <a:rPr sz="1725" b="1">
                           <a:solidFill>
@@ -18064,7 +18852,9 @@
                     </a:bodyPr>
                     <a:lstStyle/>
                     <a:p>
-                      <a:pPr algn="ctr"/>
+                      <a:pPr algn="ctr">
+                        <a:buNone/>
+                      </a:pPr>
                       <a:r>
                         <a:rPr sz="1725" b="0">
                           <a:solidFill>
@@ -18109,7 +18899,9 @@
                     </a:bodyPr>
                     <a:lstStyle/>
                     <a:p>
-                      <a:pPr algn="ctr"/>
+                      <a:pPr algn="ctr">
+                        <a:buNone/>
+                      </a:pPr>
                       <a:r>
                         <a:rPr sz="1725" b="0">
                           <a:solidFill>
@@ -18150,7 +18942,9 @@
                     </a:bodyPr>
                     <a:lstStyle/>
                     <a:p>
-                      <a:pPr algn="ctr"/>
+                      <a:pPr algn="ctr">
+                        <a:buNone/>
+                      </a:pPr>
                       <a:r>
                         <a:rPr sz="1725" b="0">
                           <a:solidFill>
@@ -18195,7 +18989,9 @@
                     </a:bodyPr>
                     <a:lstStyle/>
                     <a:p>
-                      <a:pPr algn="ctr"/>
+                      <a:pPr algn="ctr">
+                        <a:buNone/>
+                      </a:pPr>
                       <a:r>
                         <a:rPr sz="1725" b="0">
                           <a:solidFill>
@@ -18236,7 +19032,9 @@
                     </a:bodyPr>
                     <a:lstStyle/>
                     <a:p>
-                      <a:pPr algn="ctr"/>
+                      <a:pPr algn="ctr">
+                        <a:buNone/>
+                      </a:pPr>
                       <a:r>
                         <a:rPr sz="1725" b="0">
                           <a:solidFill>
@@ -18281,7 +19079,9 @@
                     </a:bodyPr>
                     <a:lstStyle/>
                     <a:p>
-                      <a:pPr algn="ctr"/>
+                      <a:pPr algn="ctr">
+                        <a:buNone/>
+                      </a:pPr>
                       <a:r>
                         <a:rPr sz="1725" b="0">
                           <a:solidFill>
@@ -18362,6 +19162,7 @@
               </a:defRPr>
             </a:defPPr>
             <a:lvl1pPr algn="l">
+              <a:buNone/>
               <a:defRPr sz="1425" b="0">
                 <a:solidFill>
                   <a:srgbClr val="53647C"/>
@@ -18372,6 +19173,7 @@
               </a:defRPr>
             </a:lvl1pPr>
             <a:lvl2pPr algn="l">
+              <a:buNone/>
               <a:defRPr sz="1425" b="0">
                 <a:solidFill>
                   <a:srgbClr val="53647C"/>
@@ -18382,6 +19184,7 @@
               </a:defRPr>
             </a:lvl2pPr>
             <a:lvl3pPr algn="l">
+              <a:buNone/>
               <a:defRPr sz="1425" b="0">
                 <a:solidFill>
                   <a:srgbClr val="53647C"/>
@@ -18392,6 +19195,7 @@
               </a:defRPr>
             </a:lvl3pPr>
             <a:lvl4pPr algn="l">
+              <a:buNone/>
               <a:defRPr sz="1425" b="0">
                 <a:solidFill>
                   <a:srgbClr val="53647C"/>
@@ -18402,6 +19206,7 @@
               </a:defRPr>
             </a:lvl4pPr>
             <a:lvl5pPr algn="l">
+              <a:buNone/>
               <a:defRPr sz="1425" b="0">
                 <a:solidFill>
                   <a:srgbClr val="53647C"/>
@@ -18412,6 +19217,7 @@
               </a:defRPr>
             </a:lvl5pPr>
             <a:lvl6pPr algn="l">
+              <a:buNone/>
               <a:defRPr sz="1425" b="0">
                 <a:solidFill>
                   <a:srgbClr val="53647C"/>
@@ -18422,6 +19228,7 @@
               </a:defRPr>
             </a:lvl6pPr>
             <a:lvl7pPr algn="l">
+              <a:buNone/>
               <a:defRPr sz="1425" b="0">
                 <a:solidFill>
                   <a:srgbClr val="53647C"/>
@@ -18432,6 +19239,7 @@
               </a:defRPr>
             </a:lvl7pPr>
             <a:lvl8pPr algn="l">
+              <a:buNone/>
               <a:defRPr sz="1425" b="0">
                 <a:solidFill>
                   <a:srgbClr val="53647C"/>
@@ -18442,6 +19250,7 @@
               </a:defRPr>
             </a:lvl8pPr>
             <a:lvl9pPr algn="l">
+              <a:buNone/>
               <a:defRPr sz="1425" b="0">
                 <a:solidFill>
                   <a:srgbClr val="53647C"/>
@@ -18454,6 +19263,7 @@
           </a:lstStyle>
           <a:p xmlns:a="http://schemas.openxmlformats.org/drawingml/2006/main">
             <a:pPr algn="l">
+              <a:buNone/>
               <a:defRPr sz="1425" b="0">
                 <a:solidFill>
                   <a:srgbClr val="53647C"/>
@@ -18550,6 +19360,7 @@
               </a:defRPr>
             </a:defPPr>
             <a:lvl1pPr algn="l">
+              <a:buNone/>
               <a:defRPr sz="3300" b="1">
                 <a:solidFill>
                   <a:srgbClr val="152B4B"/>
@@ -18560,6 +19371,7 @@
               </a:defRPr>
             </a:lvl1pPr>
             <a:lvl2pPr algn="l">
+              <a:buNone/>
               <a:defRPr sz="3300" b="1">
                 <a:solidFill>
                   <a:srgbClr val="152B4B"/>
@@ -18570,6 +19382,7 @@
               </a:defRPr>
             </a:lvl2pPr>
             <a:lvl3pPr algn="l">
+              <a:buNone/>
               <a:defRPr sz="3300" b="1">
                 <a:solidFill>
                   <a:srgbClr val="152B4B"/>
@@ -18580,6 +19393,7 @@
               </a:defRPr>
             </a:lvl3pPr>
             <a:lvl4pPr algn="l">
+              <a:buNone/>
               <a:defRPr sz="3300" b="1">
                 <a:solidFill>
                   <a:srgbClr val="152B4B"/>
@@ -18590,6 +19404,7 @@
               </a:defRPr>
             </a:lvl4pPr>
             <a:lvl5pPr algn="l">
+              <a:buNone/>
               <a:defRPr sz="3300" b="1">
                 <a:solidFill>
                   <a:srgbClr val="152B4B"/>
@@ -18600,6 +19415,7 @@
               </a:defRPr>
             </a:lvl5pPr>
             <a:lvl6pPr algn="l">
+              <a:buNone/>
               <a:defRPr sz="3300" b="1">
                 <a:solidFill>
                   <a:srgbClr val="152B4B"/>
@@ -18610,6 +19426,7 @@
               </a:defRPr>
             </a:lvl6pPr>
             <a:lvl7pPr algn="l">
+              <a:buNone/>
               <a:defRPr sz="3300" b="1">
                 <a:solidFill>
                   <a:srgbClr val="152B4B"/>
@@ -18620,6 +19437,7 @@
               </a:defRPr>
             </a:lvl7pPr>
             <a:lvl8pPr algn="l">
+              <a:buNone/>
               <a:defRPr sz="3300" b="1">
                 <a:solidFill>
                   <a:srgbClr val="152B4B"/>
@@ -18630,6 +19448,7 @@
               </a:defRPr>
             </a:lvl8pPr>
             <a:lvl9pPr algn="l">
+              <a:buNone/>
               <a:defRPr sz="3300" b="1">
                 <a:solidFill>
                   <a:srgbClr val="152B4B"/>
@@ -18642,6 +19461,7 @@
           </a:lstStyle>
           <a:p xmlns:a="http://schemas.openxmlformats.org/drawingml/2006/main">
             <a:pPr algn="l">
+              <a:buNone/>
               <a:defRPr sz="3300" b="1">
                 <a:solidFill>
                   <a:srgbClr val="152B4B"/>
@@ -18709,6 +19529,7 @@
               </a:defRPr>
             </a:defPPr>
             <a:lvl1pPr algn="l">
+              <a:buNone/>
               <a:defRPr sz="1875" b="0">
                 <a:solidFill>
                   <a:srgbClr val="53647C"/>
@@ -18719,6 +19540,7 @@
               </a:defRPr>
             </a:lvl1pPr>
             <a:lvl2pPr algn="l">
+              <a:buNone/>
               <a:defRPr sz="1875" b="0">
                 <a:solidFill>
                   <a:srgbClr val="53647C"/>
@@ -18729,6 +19551,7 @@
               </a:defRPr>
             </a:lvl2pPr>
             <a:lvl3pPr algn="l">
+              <a:buNone/>
               <a:defRPr sz="1875" b="0">
                 <a:solidFill>
                   <a:srgbClr val="53647C"/>
@@ -18739,6 +19562,7 @@
               </a:defRPr>
             </a:lvl3pPr>
             <a:lvl4pPr algn="l">
+              <a:buNone/>
               <a:defRPr sz="1875" b="0">
                 <a:solidFill>
                   <a:srgbClr val="53647C"/>
@@ -18749,6 +19573,7 @@
               </a:defRPr>
             </a:lvl4pPr>
             <a:lvl5pPr algn="l">
+              <a:buNone/>
               <a:defRPr sz="1875" b="0">
                 <a:solidFill>
                   <a:srgbClr val="53647C"/>
@@ -18759,6 +19584,7 @@
               </a:defRPr>
             </a:lvl5pPr>
             <a:lvl6pPr algn="l">
+              <a:buNone/>
               <a:defRPr sz="1875" b="0">
                 <a:solidFill>
                   <a:srgbClr val="53647C"/>
@@ -18769,6 +19595,7 @@
               </a:defRPr>
             </a:lvl6pPr>
             <a:lvl7pPr algn="l">
+              <a:buNone/>
               <a:defRPr sz="1875" b="0">
                 <a:solidFill>
                   <a:srgbClr val="53647C"/>
@@ -18779,6 +19606,7 @@
               </a:defRPr>
             </a:lvl7pPr>
             <a:lvl8pPr algn="l">
+              <a:buNone/>
               <a:defRPr sz="1875" b="0">
                 <a:solidFill>
                   <a:srgbClr val="53647C"/>
@@ -18789,6 +19617,7 @@
               </a:defRPr>
             </a:lvl8pPr>
             <a:lvl9pPr algn="l">
+              <a:buNone/>
               <a:defRPr sz="1875" b="0">
                 <a:solidFill>
                   <a:srgbClr val="53647C"/>
@@ -18801,6 +19630,7 @@
           </a:lstStyle>
           <a:p xmlns:a="http://schemas.openxmlformats.org/drawingml/2006/main">
             <a:pPr algn="l">
+              <a:buNone/>
               <a:defRPr sz="1875" b="0">
                 <a:solidFill>
                   <a:srgbClr val="53647C"/>
@@ -18868,6 +19698,7 @@
               </a:defRPr>
             </a:defPPr>
             <a:lvl1pPr algn="l">
+              <a:buNone/>
               <a:defRPr sz="1275" b="0">
                 <a:solidFill>
                   <a:srgbClr val="53647C"/>
@@ -18878,6 +19709,7 @@
               </a:defRPr>
             </a:lvl1pPr>
             <a:lvl2pPr algn="l">
+              <a:buNone/>
               <a:defRPr sz="1275" b="0">
                 <a:solidFill>
                   <a:srgbClr val="53647C"/>
@@ -18888,6 +19720,7 @@
               </a:defRPr>
             </a:lvl2pPr>
             <a:lvl3pPr algn="l">
+              <a:buNone/>
               <a:defRPr sz="1275" b="0">
                 <a:solidFill>
                   <a:srgbClr val="53647C"/>
@@ -18898,6 +19731,7 @@
               </a:defRPr>
             </a:lvl3pPr>
             <a:lvl4pPr algn="l">
+              <a:buNone/>
               <a:defRPr sz="1275" b="0">
                 <a:solidFill>
                   <a:srgbClr val="53647C"/>
@@ -18908,6 +19742,7 @@
               </a:defRPr>
             </a:lvl4pPr>
             <a:lvl5pPr algn="l">
+              <a:buNone/>
               <a:defRPr sz="1275" b="0">
                 <a:solidFill>
                   <a:srgbClr val="53647C"/>
@@ -18918,6 +19753,7 @@
               </a:defRPr>
             </a:lvl5pPr>
             <a:lvl6pPr algn="l">
+              <a:buNone/>
               <a:defRPr sz="1275" b="0">
                 <a:solidFill>
                   <a:srgbClr val="53647C"/>
@@ -18928,6 +19764,7 @@
               </a:defRPr>
             </a:lvl6pPr>
             <a:lvl7pPr algn="l">
+              <a:buNone/>
               <a:defRPr sz="1275" b="0">
                 <a:solidFill>
                   <a:srgbClr val="53647C"/>
@@ -18938,6 +19775,7 @@
               </a:defRPr>
             </a:lvl7pPr>
             <a:lvl8pPr algn="l">
+              <a:buNone/>
               <a:defRPr sz="1275" b="0">
                 <a:solidFill>
                   <a:srgbClr val="53647C"/>
@@ -18948,6 +19786,7 @@
               </a:defRPr>
             </a:lvl8pPr>
             <a:lvl9pPr algn="l">
+              <a:buNone/>
               <a:defRPr sz="1275" b="0">
                 <a:solidFill>
                   <a:srgbClr val="53647C"/>
@@ -18960,6 +19799,7 @@
           </a:lstStyle>
           <a:p xmlns:a="http://schemas.openxmlformats.org/drawingml/2006/main">
             <a:pPr algn="l">
+              <a:buNone/>
               <a:defRPr sz="1275" b="0">
                 <a:solidFill>
                   <a:srgbClr val="53647C"/>
@@ -19027,6 +19867,7 @@
               </a:defRPr>
             </a:defPPr>
             <a:lvl1pPr algn="r">
+              <a:buNone/>
               <a:defRPr sz="1350" b="0">
                 <a:solidFill>
                   <a:srgbClr val="285AD6"/>
@@ -19037,6 +19878,7 @@
               </a:defRPr>
             </a:lvl1pPr>
             <a:lvl2pPr algn="r">
+              <a:buNone/>
               <a:defRPr sz="1350" b="0">
                 <a:solidFill>
                   <a:srgbClr val="285AD6"/>
@@ -19047,6 +19889,7 @@
               </a:defRPr>
             </a:lvl2pPr>
             <a:lvl3pPr algn="r">
+              <a:buNone/>
               <a:defRPr sz="1350" b="0">
                 <a:solidFill>
                   <a:srgbClr val="285AD6"/>
@@ -19057,6 +19900,7 @@
               </a:defRPr>
             </a:lvl3pPr>
             <a:lvl4pPr algn="r">
+              <a:buNone/>
               <a:defRPr sz="1350" b="0">
                 <a:solidFill>
                   <a:srgbClr val="285AD6"/>
@@ -19067,6 +19911,7 @@
               </a:defRPr>
             </a:lvl4pPr>
             <a:lvl5pPr algn="r">
+              <a:buNone/>
               <a:defRPr sz="1350" b="0">
                 <a:solidFill>
                   <a:srgbClr val="285AD6"/>
@@ -19077,6 +19922,7 @@
               </a:defRPr>
             </a:lvl5pPr>
             <a:lvl6pPr algn="r">
+              <a:buNone/>
               <a:defRPr sz="1350" b="0">
                 <a:solidFill>
                   <a:srgbClr val="285AD6"/>
@@ -19087,6 +19933,7 @@
               </a:defRPr>
             </a:lvl6pPr>
             <a:lvl7pPr algn="r">
+              <a:buNone/>
               <a:defRPr sz="1350" b="0">
                 <a:solidFill>
                   <a:srgbClr val="285AD6"/>
@@ -19097,6 +19944,7 @@
               </a:defRPr>
             </a:lvl7pPr>
             <a:lvl8pPr algn="r">
+              <a:buNone/>
               <a:defRPr sz="1350" b="0">
                 <a:solidFill>
                   <a:srgbClr val="285AD6"/>
@@ -19107,6 +19955,7 @@
               </a:defRPr>
             </a:lvl8pPr>
             <a:lvl9pPr algn="r">
+              <a:buNone/>
               <a:defRPr sz="1350" b="0">
                 <a:solidFill>
                   <a:srgbClr val="285AD6"/>
@@ -19119,6 +19968,7 @@
           </a:lstStyle>
           <a:p xmlns:a="http://schemas.openxmlformats.org/drawingml/2006/main">
             <a:pPr algn="r">
+              <a:buNone/>
               <a:defRPr sz="1350" b="0">
                 <a:solidFill>
                   <a:srgbClr val="285AD6"/>
@@ -19147,7 +19997,7 @@
           <p:cNvPr id="5" name="">
             <a:extLst xmlns:a="http://schemas.openxmlformats.org/drawingml/2006/main">
               <a:ext uri="{FF2B5EF4-FFF2-40B4-BE49-F238E27FC236}">
-                <a16:creationId xmlns:a16="http://schemas.microsoft.com/office/drawing/2014/main" id="{97C0BCF4-C6EA-40D1-8116-99AB711CAC5C}"/>
+                <a16:creationId xmlns:a16="http://schemas.microsoft.com/office/drawing/2014/main" id="{49F9D535-1DE6-4F22-803C-8498E07972B9}"/>
               </a:ext>
             </a:extLst>
           </p:cNvPr>
@@ -19174,7 +20024,9 @@
                     </a:bodyPr>
                     <a:lstStyle/>
                     <a:p>
-                      <a:pPr algn="ctr"/>
+                      <a:pPr algn="ctr">
+                        <a:buNone/>
+                      </a:pPr>
                       <a:r>
                         <a:rPr sz="1800" b="1">
                           <a:solidFill>
@@ -19225,7 +20077,9 @@
                     </a:bodyPr>
                     <a:lstStyle/>
                     <a:p>
-                      <a:pPr algn="ctr"/>
+                      <a:pPr algn="ctr">
+                        <a:buNone/>
+                      </a:pPr>
                       <a:r>
                         <a:rPr sz="1800" b="1">
                           <a:solidFill>
@@ -19272,7 +20126,9 @@
                     </a:bodyPr>
                     <a:lstStyle/>
                     <a:p>
-                      <a:pPr algn="ctr"/>
+                      <a:pPr algn="ctr">
+                        <a:buNone/>
+                      </a:pPr>
                       <a:r>
                         <a:rPr sz="1800" b="0">
                           <a:solidFill>
@@ -19317,7 +20173,9 @@
                     </a:bodyPr>
                     <a:lstStyle/>
                     <a:p>
-                      <a:pPr algn="ctr"/>
+                      <a:pPr algn="ctr">
+                        <a:buNone/>
+                      </a:pPr>
                       <a:r>
                         <a:rPr sz="1800" b="0">
                           <a:solidFill>
@@ -19358,7 +20216,9 @@
                     </a:bodyPr>
                     <a:lstStyle/>
                     <a:p>
-                      <a:pPr algn="ctr"/>
+                      <a:pPr algn="ctr">
+                        <a:buNone/>
+                      </a:pPr>
                       <a:r>
                         <a:rPr sz="1800" b="0">
                           <a:solidFill>
@@ -19403,7 +20263,9 @@
                     </a:bodyPr>
                     <a:lstStyle/>
                     <a:p>
-                      <a:pPr algn="ctr"/>
+                      <a:pPr algn="ctr">
+                        <a:buNone/>
+                      </a:pPr>
                       <a:r>
                         <a:rPr sz="1800" b="0">
                           <a:solidFill>
@@ -19444,7 +20306,9 @@
                     </a:bodyPr>
                     <a:lstStyle/>
                     <a:p>
-                      <a:pPr algn="ctr"/>
+                      <a:pPr algn="ctr">
+                        <a:buNone/>
+                      </a:pPr>
                       <a:r>
                         <a:rPr sz="1800" b="0">
                           <a:solidFill>
@@ -19489,7 +20353,9 @@
                     </a:bodyPr>
                     <a:lstStyle/>
                     <a:p>
-                      <a:pPr algn="ctr"/>
+                      <a:pPr algn="ctr">
+                        <a:buNone/>
+                      </a:pPr>
                       <a:r>
                         <a:rPr sz="1800" b="0">
                           <a:solidFill>
@@ -19530,7 +20396,9 @@
                     </a:bodyPr>
                     <a:lstStyle/>
                     <a:p>
-                      <a:pPr algn="ctr"/>
+                      <a:pPr algn="ctr">
+                        <a:buNone/>
+                      </a:pPr>
                       <a:r>
                         <a:rPr sz="1800" b="0">
                           <a:solidFill>
@@ -19575,7 +20443,9 @@
                     </a:bodyPr>
                     <a:lstStyle/>
                     <a:p>
-                      <a:pPr algn="ctr"/>
+                      <a:pPr algn="ctr">
+                        <a:buNone/>
+                      </a:pPr>
                       <a:r>
                         <a:rPr sz="1800" b="0">
                           <a:solidFill>
@@ -19656,6 +20526,7 @@
               </a:defRPr>
             </a:defPPr>
             <a:lvl1pPr algn="l">
+              <a:buNone/>
               <a:defRPr sz="1425" b="0">
                 <a:solidFill>
                   <a:srgbClr val="53647C"/>
@@ -19666,6 +20537,7 @@
               </a:defRPr>
             </a:lvl1pPr>
             <a:lvl2pPr algn="l">
+              <a:buNone/>
               <a:defRPr sz="1425" b="0">
                 <a:solidFill>
                   <a:srgbClr val="53647C"/>
@@ -19676,6 +20548,7 @@
               </a:defRPr>
             </a:lvl2pPr>
             <a:lvl3pPr algn="l">
+              <a:buNone/>
               <a:defRPr sz="1425" b="0">
                 <a:solidFill>
                   <a:srgbClr val="53647C"/>
@@ -19686,6 +20559,7 @@
               </a:defRPr>
             </a:lvl3pPr>
             <a:lvl4pPr algn="l">
+              <a:buNone/>
               <a:defRPr sz="1425" b="0">
                 <a:solidFill>
                   <a:srgbClr val="53647C"/>
@@ -19696,6 +20570,7 @@
               </a:defRPr>
             </a:lvl4pPr>
             <a:lvl5pPr algn="l">
+              <a:buNone/>
               <a:defRPr sz="1425" b="0">
                 <a:solidFill>
                   <a:srgbClr val="53647C"/>
@@ -19706,6 +20581,7 @@
               </a:defRPr>
             </a:lvl5pPr>
             <a:lvl6pPr algn="l">
+              <a:buNone/>
               <a:defRPr sz="1425" b="0">
                 <a:solidFill>
                   <a:srgbClr val="53647C"/>
@@ -19716,6 +20592,7 @@
               </a:defRPr>
             </a:lvl6pPr>
             <a:lvl7pPr algn="l">
+              <a:buNone/>
               <a:defRPr sz="1425" b="0">
                 <a:solidFill>
                   <a:srgbClr val="53647C"/>
@@ -19726,6 +20603,7 @@
               </a:defRPr>
             </a:lvl7pPr>
             <a:lvl8pPr algn="l">
+              <a:buNone/>
               <a:defRPr sz="1425" b="0">
                 <a:solidFill>
                   <a:srgbClr val="53647C"/>
@@ -19736,6 +20614,7 @@
               </a:defRPr>
             </a:lvl8pPr>
             <a:lvl9pPr algn="l">
+              <a:buNone/>
               <a:defRPr sz="1425" b="0">
                 <a:solidFill>
                   <a:srgbClr val="53647C"/>
@@ -19748,6 +20627,7 @@
           </a:lstStyle>
           <a:p xmlns:a="http://schemas.openxmlformats.org/drawingml/2006/main">
             <a:pPr algn="l">
+              <a:buNone/>
               <a:defRPr sz="1425" b="0">
                 <a:solidFill>
                   <a:srgbClr val="53647C"/>
@@ -19844,6 +20724,7 @@
               </a:defRPr>
             </a:defPPr>
             <a:lvl1pPr algn="l">
+              <a:buNone/>
               <a:defRPr sz="3300" b="1">
                 <a:solidFill>
                   <a:srgbClr val="152B4B"/>
@@ -19854,6 +20735,7 @@
               </a:defRPr>
             </a:lvl1pPr>
             <a:lvl2pPr algn="l">
+              <a:buNone/>
               <a:defRPr sz="3300" b="1">
                 <a:solidFill>
                   <a:srgbClr val="152B4B"/>
@@ -19864,6 +20746,7 @@
               </a:defRPr>
             </a:lvl2pPr>
             <a:lvl3pPr algn="l">
+              <a:buNone/>
               <a:defRPr sz="3300" b="1">
                 <a:solidFill>
                   <a:srgbClr val="152B4B"/>
@@ -19874,6 +20757,7 @@
               </a:defRPr>
             </a:lvl3pPr>
             <a:lvl4pPr algn="l">
+              <a:buNone/>
               <a:defRPr sz="3300" b="1">
                 <a:solidFill>
                   <a:srgbClr val="152B4B"/>
@@ -19884,6 +20768,7 @@
               </a:defRPr>
             </a:lvl4pPr>
             <a:lvl5pPr algn="l">
+              <a:buNone/>
               <a:defRPr sz="3300" b="1">
                 <a:solidFill>
                   <a:srgbClr val="152B4B"/>
@@ -19894,6 +20779,7 @@
               </a:defRPr>
             </a:lvl5pPr>
             <a:lvl6pPr algn="l">
+              <a:buNone/>
               <a:defRPr sz="3300" b="1">
                 <a:solidFill>
                   <a:srgbClr val="152B4B"/>
@@ -19904,6 +20790,7 @@
               </a:defRPr>
             </a:lvl6pPr>
             <a:lvl7pPr algn="l">
+              <a:buNone/>
               <a:defRPr sz="3300" b="1">
                 <a:solidFill>
                   <a:srgbClr val="152B4B"/>
@@ -19914,6 +20801,7 @@
               </a:defRPr>
             </a:lvl7pPr>
             <a:lvl8pPr algn="l">
+              <a:buNone/>
               <a:defRPr sz="3300" b="1">
                 <a:solidFill>
                   <a:srgbClr val="152B4B"/>
@@ -19924,6 +20812,7 @@
               </a:defRPr>
             </a:lvl8pPr>
             <a:lvl9pPr algn="l">
+              <a:buNone/>
               <a:defRPr sz="3300" b="1">
                 <a:solidFill>
                   <a:srgbClr val="152B4B"/>
@@ -19936,6 +20825,7 @@
           </a:lstStyle>
           <a:p xmlns:a="http://schemas.openxmlformats.org/drawingml/2006/main">
             <a:pPr algn="l">
+              <a:buNone/>
               <a:defRPr sz="3300" b="1">
                 <a:solidFill>
                   <a:srgbClr val="152B4B"/>
@@ -20003,6 +20893,7 @@
               </a:defRPr>
             </a:defPPr>
             <a:lvl1pPr algn="l">
+              <a:buNone/>
               <a:defRPr sz="1875" b="0">
                 <a:solidFill>
                   <a:srgbClr val="53647C"/>
@@ -20013,6 +20904,7 @@
               </a:defRPr>
             </a:lvl1pPr>
             <a:lvl2pPr algn="l">
+              <a:buNone/>
               <a:defRPr sz="1875" b="0">
                 <a:solidFill>
                   <a:srgbClr val="53647C"/>
@@ -20023,6 +20915,7 @@
               </a:defRPr>
             </a:lvl2pPr>
             <a:lvl3pPr algn="l">
+              <a:buNone/>
               <a:defRPr sz="1875" b="0">
                 <a:solidFill>
                   <a:srgbClr val="53647C"/>
@@ -20033,6 +20926,7 @@
               </a:defRPr>
             </a:lvl3pPr>
             <a:lvl4pPr algn="l">
+              <a:buNone/>
               <a:defRPr sz="1875" b="0">
                 <a:solidFill>
                   <a:srgbClr val="53647C"/>
@@ -20043,6 +20937,7 @@
               </a:defRPr>
             </a:lvl4pPr>
             <a:lvl5pPr algn="l">
+              <a:buNone/>
               <a:defRPr sz="1875" b="0">
                 <a:solidFill>
                   <a:srgbClr val="53647C"/>
@@ -20053,6 +20948,7 @@
               </a:defRPr>
             </a:lvl5pPr>
             <a:lvl6pPr algn="l">
+              <a:buNone/>
               <a:defRPr sz="1875" b="0">
                 <a:solidFill>
                   <a:srgbClr val="53647C"/>
@@ -20063,6 +20959,7 @@
               </a:defRPr>
             </a:lvl6pPr>
             <a:lvl7pPr algn="l">
+              <a:buNone/>
               <a:defRPr sz="1875" b="0">
                 <a:solidFill>
                   <a:srgbClr val="53647C"/>
@@ -20073,6 +20970,7 @@
               </a:defRPr>
             </a:lvl7pPr>
             <a:lvl8pPr algn="l">
+              <a:buNone/>
               <a:defRPr sz="1875" b="0">
                 <a:solidFill>
                   <a:srgbClr val="53647C"/>
@@ -20083,6 +20981,7 @@
               </a:defRPr>
             </a:lvl8pPr>
             <a:lvl9pPr algn="l">
+              <a:buNone/>
               <a:defRPr sz="1875" b="0">
                 <a:solidFill>
                   <a:srgbClr val="53647C"/>
@@ -20095,6 +20994,7 @@
           </a:lstStyle>
           <a:p xmlns:a="http://schemas.openxmlformats.org/drawingml/2006/main">
             <a:pPr algn="l">
+              <a:buNone/>
               <a:defRPr sz="1875" b="0">
                 <a:solidFill>
                   <a:srgbClr val="53647C"/>
@@ -20162,6 +21062,7 @@
               </a:defRPr>
             </a:defPPr>
             <a:lvl1pPr algn="l">
+              <a:buNone/>
               <a:defRPr sz="1275" b="0">
                 <a:solidFill>
                   <a:srgbClr val="53647C"/>
@@ -20172,6 +21073,7 @@
               </a:defRPr>
             </a:lvl1pPr>
             <a:lvl2pPr algn="l">
+              <a:buNone/>
               <a:defRPr sz="1275" b="0">
                 <a:solidFill>
                   <a:srgbClr val="53647C"/>
@@ -20182,6 +21084,7 @@
               </a:defRPr>
             </a:lvl2pPr>
             <a:lvl3pPr algn="l">
+              <a:buNone/>
               <a:defRPr sz="1275" b="0">
                 <a:solidFill>
                   <a:srgbClr val="53647C"/>
@@ -20192,6 +21095,7 @@
               </a:defRPr>
             </a:lvl3pPr>
             <a:lvl4pPr algn="l">
+              <a:buNone/>
               <a:defRPr sz="1275" b="0">
                 <a:solidFill>
                   <a:srgbClr val="53647C"/>
@@ -20202,6 +21106,7 @@
               </a:defRPr>
             </a:lvl4pPr>
             <a:lvl5pPr algn="l">
+              <a:buNone/>
               <a:defRPr sz="1275" b="0">
                 <a:solidFill>
                   <a:srgbClr val="53647C"/>
@@ -20212,6 +21117,7 @@
               </a:defRPr>
             </a:lvl5pPr>
             <a:lvl6pPr algn="l">
+              <a:buNone/>
               <a:defRPr sz="1275" b="0">
                 <a:solidFill>
                   <a:srgbClr val="53647C"/>
@@ -20222,6 +21128,7 @@
               </a:defRPr>
             </a:lvl6pPr>
             <a:lvl7pPr algn="l">
+              <a:buNone/>
               <a:defRPr sz="1275" b="0">
                 <a:solidFill>
                   <a:srgbClr val="53647C"/>
@@ -20232,6 +21139,7 @@
               </a:defRPr>
             </a:lvl7pPr>
             <a:lvl8pPr algn="l">
+              <a:buNone/>
               <a:defRPr sz="1275" b="0">
                 <a:solidFill>
                   <a:srgbClr val="53647C"/>
@@ -20242,6 +21150,7 @@
               </a:defRPr>
             </a:lvl8pPr>
             <a:lvl9pPr algn="l">
+              <a:buNone/>
               <a:defRPr sz="1275" b="0">
                 <a:solidFill>
                   <a:srgbClr val="53647C"/>
@@ -20254,6 +21163,7 @@
           </a:lstStyle>
           <a:p xmlns:a="http://schemas.openxmlformats.org/drawingml/2006/main">
             <a:pPr algn="l">
+              <a:buNone/>
               <a:defRPr sz="1275" b="0">
                 <a:solidFill>
                   <a:srgbClr val="53647C"/>
@@ -20321,6 +21231,7 @@
               </a:defRPr>
             </a:defPPr>
             <a:lvl1pPr algn="r">
+              <a:buNone/>
               <a:defRPr sz="1350" b="0">
                 <a:solidFill>
                   <a:srgbClr val="285AD6"/>
@@ -20331,6 +21242,7 @@
               </a:defRPr>
             </a:lvl1pPr>
             <a:lvl2pPr algn="r">
+              <a:buNone/>
               <a:defRPr sz="1350" b="0">
                 <a:solidFill>
                   <a:srgbClr val="285AD6"/>
@@ -20341,6 +21253,7 @@
               </a:defRPr>
             </a:lvl2pPr>
             <a:lvl3pPr algn="r">
+              <a:buNone/>
               <a:defRPr sz="1350" b="0">
                 <a:solidFill>
                   <a:srgbClr val="285AD6"/>
@@ -20351,6 +21264,7 @@
               </a:defRPr>
             </a:lvl3pPr>
             <a:lvl4pPr algn="r">
+              <a:buNone/>
               <a:defRPr sz="1350" b="0">
                 <a:solidFill>
                   <a:srgbClr val="285AD6"/>
@@ -20361,6 +21275,7 @@
               </a:defRPr>
             </a:lvl4pPr>
             <a:lvl5pPr algn="r">
+              <a:buNone/>
               <a:defRPr sz="1350" b="0">
                 <a:solidFill>
                   <a:srgbClr val="285AD6"/>
@@ -20371,6 +21286,7 @@
               </a:defRPr>
             </a:lvl5pPr>
             <a:lvl6pPr algn="r">
+              <a:buNone/>
               <a:defRPr sz="1350" b="0">
                 <a:solidFill>
                   <a:srgbClr val="285AD6"/>
@@ -20381,6 +21297,7 @@
               </a:defRPr>
             </a:lvl6pPr>
             <a:lvl7pPr algn="r">
+              <a:buNone/>
               <a:defRPr sz="1350" b="0">
                 <a:solidFill>
                   <a:srgbClr val="285AD6"/>
@@ -20391,6 +21308,7 @@
               </a:defRPr>
             </a:lvl7pPr>
             <a:lvl8pPr algn="r">
+              <a:buNone/>
               <a:defRPr sz="1350" b="0">
                 <a:solidFill>
                   <a:srgbClr val="285AD6"/>
@@ -20401,6 +21319,7 @@
               </a:defRPr>
             </a:lvl8pPr>
             <a:lvl9pPr algn="r">
+              <a:buNone/>
               <a:defRPr sz="1350" b="0">
                 <a:solidFill>
                   <a:srgbClr val="285AD6"/>
@@ -20413,6 +21332,7 @@
           </a:lstStyle>
           <a:p xmlns:a="http://schemas.openxmlformats.org/drawingml/2006/main">
             <a:pPr algn="r">
+              <a:buNone/>
               <a:defRPr sz="1350" b="0">
                 <a:solidFill>
                   <a:srgbClr val="285AD6"/>
@@ -20441,7 +21361,7 @@
           <p:cNvPr id="5" name="">
             <a:extLst xmlns:a="http://schemas.openxmlformats.org/drawingml/2006/main">
               <a:ext uri="{FF2B5EF4-FFF2-40B4-BE49-F238E27FC236}">
-                <a16:creationId xmlns:a16="http://schemas.microsoft.com/office/drawing/2014/main" id="{090857CF-36F0-4EC3-8D75-95E14D41DE81}"/>
+                <a16:creationId xmlns:a16="http://schemas.microsoft.com/office/drawing/2014/main" id="{73F3B3CE-FF95-4125-8A56-E87D478AF6D8}"/>
               </a:ext>
             </a:extLst>
           </p:cNvPr>
@@ -20469,7 +21389,9 @@
                     </a:bodyPr>
                     <a:lstStyle/>
                     <a:p>
-                      <a:pPr algn="ctr"/>
+                      <a:pPr algn="ctr">
+                        <a:buNone/>
+                      </a:pPr>
                       <a:r>
                         <a:rPr sz="1725" b="1">
                           <a:solidFill>
@@ -20520,7 +21442,9 @@
                     </a:bodyPr>
                     <a:lstStyle/>
                     <a:p>
-                      <a:pPr algn="ctr"/>
+                      <a:pPr algn="ctr">
+                        <a:buNone/>
+                      </a:pPr>
                       <a:r>
                         <a:rPr sz="1725" b="1">
                           <a:solidFill>
@@ -20565,7 +21489,9 @@
                     </a:bodyPr>
                     <a:lstStyle/>
                     <a:p>
-                      <a:pPr algn="ctr"/>
+                      <a:pPr algn="ctr">
+                        <a:buNone/>
+                      </a:pPr>
                       <a:r>
                         <a:rPr sz="1725" b="1">
                           <a:solidFill>
@@ -20612,7 +21538,9 @@
                     </a:bodyPr>
                     <a:lstStyle/>
                     <a:p>
-                      <a:pPr algn="ctr"/>
+                      <a:pPr algn="ctr">
+                        <a:buNone/>
+                      </a:pPr>
                       <a:r>
                         <a:rPr sz="1725" b="0">
                           <a:solidFill>
@@ -20657,7 +21585,9 @@
                     </a:bodyPr>
                     <a:lstStyle/>
                     <a:p>
-                      <a:pPr algn="ctr"/>
+                      <a:pPr algn="ctr">
+                        <a:buNone/>
+                      </a:pPr>
                       <a:r>
                         <a:rPr sz="1725" b="0">
                           <a:solidFill>
@@ -20696,7 +21626,9 @@
                     </a:bodyPr>
                     <a:lstStyle/>
                     <a:p>
-                      <a:pPr algn="ctr"/>
+                      <a:pPr algn="ctr">
+                        <a:buNone/>
+                      </a:pPr>
                       <a:r>
                         <a:rPr sz="1725" b="0">
                           <a:solidFill>
@@ -20737,7 +21669,9 @@
                     </a:bodyPr>
                     <a:lstStyle/>
                     <a:p>
-                      <a:pPr algn="ctr"/>
+                      <a:pPr algn="ctr">
+                        <a:buNone/>
+                      </a:pPr>
                       <a:r>
                         <a:rPr sz="1725" b="0">
                           <a:solidFill>
@@ -20782,7 +21716,9 @@
                     </a:bodyPr>
                     <a:lstStyle/>
                     <a:p>
-                      <a:pPr algn="ctr"/>
+                      <a:pPr algn="ctr">
+                        <a:buNone/>
+                      </a:pPr>
                       <a:r>
                         <a:rPr sz="1725" b="0">
                           <a:solidFill>
@@ -20821,7 +21757,9 @@
                     </a:bodyPr>
                     <a:lstStyle/>
                     <a:p>
-                      <a:pPr algn="ctr"/>
+                      <a:pPr algn="ctr">
+                        <a:buNone/>
+                      </a:pPr>
                       <a:r>
                         <a:rPr sz="1725" b="0">
                           <a:solidFill>
@@ -20862,7 +21800,9 @@
                     </a:bodyPr>
                     <a:lstStyle/>
                     <a:p>
-                      <a:pPr algn="ctr"/>
+                      <a:pPr algn="ctr">
+                        <a:buNone/>
+                      </a:pPr>
                       <a:r>
                         <a:rPr sz="1725" b="0">
                           <a:solidFill>
@@ -20907,7 +21847,9 @@
                     </a:bodyPr>
                     <a:lstStyle/>
                     <a:p>
-                      <a:pPr algn="ctr"/>
+                      <a:pPr algn="ctr">
+                        <a:buNone/>
+                      </a:pPr>
                       <a:r>
                         <a:rPr sz="1725" b="0">
                           <a:solidFill>
@@ -20946,7 +21888,9 @@
                     </a:bodyPr>
                     <a:lstStyle/>
                     <a:p>
-                      <a:pPr algn="ctr"/>
+                      <a:pPr algn="ctr">
+                        <a:buNone/>
+                      </a:pPr>
                       <a:r>
                         <a:rPr sz="1725" b="0">
                           <a:solidFill>
@@ -20987,7 +21931,9 @@
                     </a:bodyPr>
                     <a:lstStyle/>
                     <a:p>
-                      <a:pPr algn="ctr"/>
+                      <a:pPr algn="ctr">
+                        <a:buNone/>
+                      </a:pPr>
                       <a:r>
                         <a:rPr sz="1725" b="0">
                           <a:solidFill>
@@ -21032,7 +21978,9 @@
                     </a:bodyPr>
                     <a:lstStyle/>
                     <a:p>
-                      <a:pPr algn="ctr"/>
+                      <a:pPr algn="ctr">
+                        <a:buNone/>
+                      </a:pPr>
                       <a:r>
                         <a:rPr sz="1725" b="0">
                           <a:solidFill>
@@ -21071,7 +22019,9 @@
                     </a:bodyPr>
                     <a:lstStyle/>
                     <a:p>
-                      <a:pPr algn="ctr"/>
+                      <a:pPr algn="ctr">
+                        <a:buNone/>
+                      </a:pPr>
                       <a:r>
                         <a:rPr sz="1725" b="0">
                           <a:solidFill>
@@ -21152,6 +22102,7 @@
               </a:defRPr>
             </a:defPPr>
             <a:lvl1pPr algn="l">
+              <a:buNone/>
               <a:defRPr sz="1425" b="0">
                 <a:solidFill>
                   <a:srgbClr val="53647C"/>
@@ -21162,6 +22113,7 @@
               </a:defRPr>
             </a:lvl1pPr>
             <a:lvl2pPr algn="l">
+              <a:buNone/>
               <a:defRPr sz="1425" b="0">
                 <a:solidFill>
                   <a:srgbClr val="53647C"/>
@@ -21172,6 +22124,7 @@
               </a:defRPr>
             </a:lvl2pPr>
             <a:lvl3pPr algn="l">
+              <a:buNone/>
               <a:defRPr sz="1425" b="0">
                 <a:solidFill>
                   <a:srgbClr val="53647C"/>
@@ -21182,6 +22135,7 @@
               </a:defRPr>
             </a:lvl3pPr>
             <a:lvl4pPr algn="l">
+              <a:buNone/>
               <a:defRPr sz="1425" b="0">
                 <a:solidFill>
                   <a:srgbClr val="53647C"/>
@@ -21192,6 +22146,7 @@
               </a:defRPr>
             </a:lvl4pPr>
             <a:lvl5pPr algn="l">
+              <a:buNone/>
               <a:defRPr sz="1425" b="0">
                 <a:solidFill>
                   <a:srgbClr val="53647C"/>
@@ -21202,6 +22157,7 @@
               </a:defRPr>
             </a:lvl5pPr>
             <a:lvl6pPr algn="l">
+              <a:buNone/>
               <a:defRPr sz="1425" b="0">
                 <a:solidFill>
                   <a:srgbClr val="53647C"/>
@@ -21212,6 +22168,7 @@
               </a:defRPr>
             </a:lvl6pPr>
             <a:lvl7pPr algn="l">
+              <a:buNone/>
               <a:defRPr sz="1425" b="0">
                 <a:solidFill>
                   <a:srgbClr val="53647C"/>
@@ -21222,6 +22179,7 @@
               </a:defRPr>
             </a:lvl7pPr>
             <a:lvl8pPr algn="l">
+              <a:buNone/>
               <a:defRPr sz="1425" b="0">
                 <a:solidFill>
                   <a:srgbClr val="53647C"/>
@@ -21232,6 +22190,7 @@
               </a:defRPr>
             </a:lvl8pPr>
             <a:lvl9pPr algn="l">
+              <a:buNone/>
               <a:defRPr sz="1425" b="0">
                 <a:solidFill>
                   <a:srgbClr val="53647C"/>
@@ -21244,6 +22203,7 @@
           </a:lstStyle>
           <a:p xmlns:a="http://schemas.openxmlformats.org/drawingml/2006/main">
             <a:pPr algn="l">
+              <a:buNone/>
               <a:defRPr sz="1425" b="0">
                 <a:solidFill>
                   <a:srgbClr val="53647C"/>
@@ -21340,6 +22300,7 @@
               </a:defRPr>
             </a:defPPr>
             <a:lvl1pPr algn="l">
+              <a:buNone/>
               <a:defRPr sz="3300" b="1">
                 <a:solidFill>
                   <a:srgbClr val="152B4B"/>
@@ -21350,6 +22311,7 @@
               </a:defRPr>
             </a:lvl1pPr>
             <a:lvl2pPr algn="l">
+              <a:buNone/>
               <a:defRPr sz="3300" b="1">
                 <a:solidFill>
                   <a:srgbClr val="152B4B"/>
@@ -21360,6 +22322,7 @@
               </a:defRPr>
             </a:lvl2pPr>
             <a:lvl3pPr algn="l">
+              <a:buNone/>
               <a:defRPr sz="3300" b="1">
                 <a:solidFill>
                   <a:srgbClr val="152B4B"/>
@@ -21370,6 +22333,7 @@
               </a:defRPr>
             </a:lvl3pPr>
             <a:lvl4pPr algn="l">
+              <a:buNone/>
               <a:defRPr sz="3300" b="1">
                 <a:solidFill>
                   <a:srgbClr val="152B4B"/>
@@ -21380,6 +22344,7 @@
               </a:defRPr>
             </a:lvl4pPr>
             <a:lvl5pPr algn="l">
+              <a:buNone/>
               <a:defRPr sz="3300" b="1">
                 <a:solidFill>
                   <a:srgbClr val="152B4B"/>
@@ -21390,6 +22355,7 @@
               </a:defRPr>
             </a:lvl5pPr>
             <a:lvl6pPr algn="l">
+              <a:buNone/>
               <a:defRPr sz="3300" b="1">
                 <a:solidFill>
                   <a:srgbClr val="152B4B"/>
@@ -21400,6 +22366,7 @@
               </a:defRPr>
             </a:lvl6pPr>
             <a:lvl7pPr algn="l">
+              <a:buNone/>
               <a:defRPr sz="3300" b="1">
                 <a:solidFill>
                   <a:srgbClr val="152B4B"/>
@@ -21410,6 +22377,7 @@
               </a:defRPr>
             </a:lvl7pPr>
             <a:lvl8pPr algn="l">
+              <a:buNone/>
               <a:defRPr sz="3300" b="1">
                 <a:solidFill>
                   <a:srgbClr val="152B4B"/>
@@ -21420,6 +22388,7 @@
               </a:defRPr>
             </a:lvl8pPr>
             <a:lvl9pPr algn="l">
+              <a:buNone/>
               <a:defRPr sz="3300" b="1">
                 <a:solidFill>
                   <a:srgbClr val="152B4B"/>
@@ -21432,6 +22401,7 @@
           </a:lstStyle>
           <a:p xmlns:a="http://schemas.openxmlformats.org/drawingml/2006/main">
             <a:pPr algn="l">
+              <a:buNone/>
               <a:defRPr sz="3300" b="1">
                 <a:solidFill>
                   <a:srgbClr val="152B4B"/>
@@ -21499,6 +22469,7 @@
               </a:defRPr>
             </a:defPPr>
             <a:lvl1pPr algn="l">
+              <a:buNone/>
               <a:defRPr sz="1875" b="0">
                 <a:solidFill>
                   <a:srgbClr val="53647C"/>
@@ -21509,6 +22480,7 @@
               </a:defRPr>
             </a:lvl1pPr>
             <a:lvl2pPr algn="l">
+              <a:buNone/>
               <a:defRPr sz="1875" b="0">
                 <a:solidFill>
                   <a:srgbClr val="53647C"/>
@@ -21519,6 +22491,7 @@
               </a:defRPr>
             </a:lvl2pPr>
             <a:lvl3pPr algn="l">
+              <a:buNone/>
               <a:defRPr sz="1875" b="0">
                 <a:solidFill>
                   <a:srgbClr val="53647C"/>
@@ -21529,6 +22502,7 @@
               </a:defRPr>
             </a:lvl3pPr>
             <a:lvl4pPr algn="l">
+              <a:buNone/>
               <a:defRPr sz="1875" b="0">
                 <a:solidFill>
                   <a:srgbClr val="53647C"/>
@@ -21539,6 +22513,7 @@
               </a:defRPr>
             </a:lvl4pPr>
             <a:lvl5pPr algn="l">
+              <a:buNone/>
               <a:defRPr sz="1875" b="0">
                 <a:solidFill>
                   <a:srgbClr val="53647C"/>
@@ -21549,6 +22524,7 @@
               </a:defRPr>
             </a:lvl5pPr>
             <a:lvl6pPr algn="l">
+              <a:buNone/>
               <a:defRPr sz="1875" b="0">
                 <a:solidFill>
                   <a:srgbClr val="53647C"/>
@@ -21559,6 +22535,7 @@
               </a:defRPr>
             </a:lvl6pPr>
             <a:lvl7pPr algn="l">
+              <a:buNone/>
               <a:defRPr sz="1875" b="0">
                 <a:solidFill>
                   <a:srgbClr val="53647C"/>
@@ -21569,6 +22546,7 @@
               </a:defRPr>
             </a:lvl7pPr>
             <a:lvl8pPr algn="l">
+              <a:buNone/>
               <a:defRPr sz="1875" b="0">
                 <a:solidFill>
                   <a:srgbClr val="53647C"/>
@@ -21579,6 +22557,7 @@
               </a:defRPr>
             </a:lvl8pPr>
             <a:lvl9pPr algn="l">
+              <a:buNone/>
               <a:defRPr sz="1875" b="0">
                 <a:solidFill>
                   <a:srgbClr val="53647C"/>
@@ -21591,6 +22570,7 @@
           </a:lstStyle>
           <a:p xmlns:a="http://schemas.openxmlformats.org/drawingml/2006/main">
             <a:pPr algn="l">
+              <a:buNone/>
               <a:defRPr sz="1875" b="0">
                 <a:solidFill>
                   <a:srgbClr val="53647C"/>
@@ -21658,6 +22638,7 @@
               </a:defRPr>
             </a:defPPr>
             <a:lvl1pPr algn="l">
+              <a:buNone/>
               <a:defRPr sz="1275" b="0">
                 <a:solidFill>
                   <a:srgbClr val="53647C"/>
@@ -21668,6 +22649,7 @@
               </a:defRPr>
             </a:lvl1pPr>
             <a:lvl2pPr algn="l">
+              <a:buNone/>
               <a:defRPr sz="1275" b="0">
                 <a:solidFill>
                   <a:srgbClr val="53647C"/>
@@ -21678,6 +22660,7 @@
               </a:defRPr>
             </a:lvl2pPr>
             <a:lvl3pPr algn="l">
+              <a:buNone/>
               <a:defRPr sz="1275" b="0">
                 <a:solidFill>
                   <a:srgbClr val="53647C"/>
@@ -21688,6 +22671,7 @@
               </a:defRPr>
             </a:lvl3pPr>
             <a:lvl4pPr algn="l">
+              <a:buNone/>
               <a:defRPr sz="1275" b="0">
                 <a:solidFill>
                   <a:srgbClr val="53647C"/>
@@ -21698,6 +22682,7 @@
               </a:defRPr>
             </a:lvl4pPr>
             <a:lvl5pPr algn="l">
+              <a:buNone/>
               <a:defRPr sz="1275" b="0">
                 <a:solidFill>
                   <a:srgbClr val="53647C"/>
@@ -21708,6 +22693,7 @@
               </a:defRPr>
             </a:lvl5pPr>
             <a:lvl6pPr algn="l">
+              <a:buNone/>
               <a:defRPr sz="1275" b="0">
                 <a:solidFill>
                   <a:srgbClr val="53647C"/>
@@ -21718,6 +22704,7 @@
               </a:defRPr>
             </a:lvl6pPr>
             <a:lvl7pPr algn="l">
+              <a:buNone/>
               <a:defRPr sz="1275" b="0">
                 <a:solidFill>
                   <a:srgbClr val="53647C"/>
@@ -21728,6 +22715,7 @@
               </a:defRPr>
             </a:lvl7pPr>
             <a:lvl8pPr algn="l">
+              <a:buNone/>
               <a:defRPr sz="1275" b="0">
                 <a:solidFill>
                   <a:srgbClr val="53647C"/>
@@ -21738,6 +22726,7 @@
               </a:defRPr>
             </a:lvl8pPr>
             <a:lvl9pPr algn="l">
+              <a:buNone/>
               <a:defRPr sz="1275" b="0">
                 <a:solidFill>
                   <a:srgbClr val="53647C"/>
@@ -21750,6 +22739,7 @@
           </a:lstStyle>
           <a:p xmlns:a="http://schemas.openxmlformats.org/drawingml/2006/main">
             <a:pPr algn="l">
+              <a:buNone/>
               <a:defRPr sz="1275" b="0">
                 <a:solidFill>
                   <a:srgbClr val="53647C"/>
@@ -21817,6 +22807,7 @@
               </a:defRPr>
             </a:defPPr>
             <a:lvl1pPr algn="r">
+              <a:buNone/>
               <a:defRPr sz="1350" b="0">
                 <a:solidFill>
                   <a:srgbClr val="285AD6"/>
@@ -21827,6 +22818,7 @@
               </a:defRPr>
             </a:lvl1pPr>
             <a:lvl2pPr algn="r">
+              <a:buNone/>
               <a:defRPr sz="1350" b="0">
                 <a:solidFill>
                   <a:srgbClr val="285AD6"/>
@@ -21837,6 +22829,7 @@
               </a:defRPr>
             </a:lvl2pPr>
             <a:lvl3pPr algn="r">
+              <a:buNone/>
               <a:defRPr sz="1350" b="0">
                 <a:solidFill>
                   <a:srgbClr val="285AD6"/>
@@ -21847,6 +22840,7 @@
               </a:defRPr>
             </a:lvl3pPr>
             <a:lvl4pPr algn="r">
+              <a:buNone/>
               <a:defRPr sz="1350" b="0">
                 <a:solidFill>
                   <a:srgbClr val="285AD6"/>
@@ -21857,6 +22851,7 @@
               </a:defRPr>
             </a:lvl4pPr>
             <a:lvl5pPr algn="r">
+              <a:buNone/>
               <a:defRPr sz="1350" b="0">
                 <a:solidFill>
                   <a:srgbClr val="285AD6"/>
@@ -21867,6 +22862,7 @@
               </a:defRPr>
             </a:lvl5pPr>
             <a:lvl6pPr algn="r">
+              <a:buNone/>
               <a:defRPr sz="1350" b="0">
                 <a:solidFill>
                   <a:srgbClr val="285AD6"/>
@@ -21877,6 +22873,7 @@
               </a:defRPr>
             </a:lvl6pPr>
             <a:lvl7pPr algn="r">
+              <a:buNone/>
               <a:defRPr sz="1350" b="0">
                 <a:solidFill>
                   <a:srgbClr val="285AD6"/>
@@ -21887,6 +22884,7 @@
               </a:defRPr>
             </a:lvl7pPr>
             <a:lvl8pPr algn="r">
+              <a:buNone/>
               <a:defRPr sz="1350" b="0">
                 <a:solidFill>
                   <a:srgbClr val="285AD6"/>
@@ -21897,6 +22895,7 @@
               </a:defRPr>
             </a:lvl8pPr>
             <a:lvl9pPr algn="r">
+              <a:buNone/>
               <a:defRPr sz="1350" b="0">
                 <a:solidFill>
                   <a:srgbClr val="285AD6"/>
@@ -21909,6 +22908,7 @@
           </a:lstStyle>
           <a:p xmlns:a="http://schemas.openxmlformats.org/drawingml/2006/main">
             <a:pPr algn="r">
+              <a:buNone/>
               <a:defRPr sz="1350" b="0">
                 <a:solidFill>
                   <a:srgbClr val="285AD6"/>
@@ -21937,7 +22937,7 @@
           <p:cNvPr id="5" name="">
             <a:extLst xmlns:a="http://schemas.openxmlformats.org/drawingml/2006/main">
               <a:ext uri="{FF2B5EF4-FFF2-40B4-BE49-F238E27FC236}">
-                <a16:creationId xmlns:a16="http://schemas.microsoft.com/office/drawing/2014/main" id="{34341243-CAF7-46A0-B24E-2AE9289160CB}"/>
+                <a16:creationId xmlns:a16="http://schemas.microsoft.com/office/drawing/2014/main" id="{53387AC6-6733-4870-9BD5-75212AD377CB}"/>
               </a:ext>
             </a:extLst>
           </p:cNvPr>
@@ -21947,7 +22947,7 @@
           <p:nvPr/>
         </p:nvPicPr>
         <p:blipFill>
-          <a:blip xmlns:r="http://schemas.openxmlformats.org/officeDocument/2006/relationships" xmlns:a="http://schemas.openxmlformats.org/drawingml/2006/main" r:embed="R65327a0362f04caa"/>
+          <a:blip xmlns:r="http://schemas.openxmlformats.org/officeDocument/2006/relationships" xmlns:a="http://schemas.openxmlformats.org/drawingml/2006/main" r:embed="R6db55ef0c8254eb5"/>
           <a:stretch xmlns:a="http://schemas.openxmlformats.org/drawingml/2006/main"/>
         </p:blipFill>
         <p:spPr>
@@ -22004,6 +23004,7 @@
               </a:defRPr>
             </a:defPPr>
             <a:lvl1pPr algn="l">
+              <a:buNone/>
               <a:defRPr sz="2250" b="1">
                 <a:solidFill>
                   <a:srgbClr val="285AD6"/>
@@ -22014,6 +23015,7 @@
               </a:defRPr>
             </a:lvl1pPr>
             <a:lvl2pPr algn="l">
+              <a:buNone/>
               <a:defRPr sz="2250" b="1">
                 <a:solidFill>
                   <a:srgbClr val="285AD6"/>
@@ -22024,6 +23026,7 @@
               </a:defRPr>
             </a:lvl2pPr>
             <a:lvl3pPr algn="l">
+              <a:buNone/>
               <a:defRPr sz="2250" b="1">
                 <a:solidFill>
                   <a:srgbClr val="285AD6"/>
@@ -22034,6 +23037,7 @@
               </a:defRPr>
             </a:lvl3pPr>
             <a:lvl4pPr algn="l">
+              <a:buNone/>
               <a:defRPr sz="2250" b="1">
                 <a:solidFill>
                   <a:srgbClr val="285AD6"/>
@@ -22044,6 +23048,7 @@
               </a:defRPr>
             </a:lvl4pPr>
             <a:lvl5pPr algn="l">
+              <a:buNone/>
               <a:defRPr sz="2250" b="1">
                 <a:solidFill>
                   <a:srgbClr val="285AD6"/>
@@ -22054,6 +23059,7 @@
               </a:defRPr>
             </a:lvl5pPr>
             <a:lvl6pPr algn="l">
+              <a:buNone/>
               <a:defRPr sz="2250" b="1">
                 <a:solidFill>
                   <a:srgbClr val="285AD6"/>
@@ -22064,6 +23070,7 @@
               </a:defRPr>
             </a:lvl6pPr>
             <a:lvl7pPr algn="l">
+              <a:buNone/>
               <a:defRPr sz="2250" b="1">
                 <a:solidFill>
                   <a:srgbClr val="285AD6"/>
@@ -22074,6 +23081,7 @@
               </a:defRPr>
             </a:lvl7pPr>
             <a:lvl8pPr algn="l">
+              <a:buNone/>
               <a:defRPr sz="2250" b="1">
                 <a:solidFill>
                   <a:srgbClr val="285AD6"/>
@@ -22084,6 +23092,7 @@
               </a:defRPr>
             </a:lvl8pPr>
             <a:lvl9pPr algn="l">
+              <a:buNone/>
               <a:defRPr sz="2250" b="1">
                 <a:solidFill>
                   <a:srgbClr val="285AD6"/>
@@ -22096,6 +23105,7 @@
           </a:lstStyle>
           <a:p xmlns:a="http://schemas.openxmlformats.org/drawingml/2006/main">
             <a:pPr algn="l">
+              <a:buNone/>
               <a:defRPr sz="2250" b="1">
                 <a:solidFill>
                   <a:srgbClr val="285AD6"/>
@@ -22163,6 +23173,7 @@
               </a:defRPr>
             </a:defPPr>
             <a:lvl1pPr algn="l">
+              <a:buNone/>
               <a:defRPr sz="2025" b="0">
                 <a:solidFill>
                   <a:srgbClr val="152B4B"/>
@@ -22173,6 +23184,7 @@
               </a:defRPr>
             </a:lvl1pPr>
             <a:lvl2pPr algn="l">
+              <a:buNone/>
               <a:defRPr sz="2025" b="0">
                 <a:solidFill>
                   <a:srgbClr val="152B4B"/>
@@ -22183,6 +23195,7 @@
               </a:defRPr>
             </a:lvl2pPr>
             <a:lvl3pPr algn="l">
+              <a:buNone/>
               <a:defRPr sz="2025" b="0">
                 <a:solidFill>
                   <a:srgbClr val="152B4B"/>
@@ -22193,6 +23206,7 @@
               </a:defRPr>
             </a:lvl3pPr>
             <a:lvl4pPr algn="l">
+              <a:buNone/>
               <a:defRPr sz="2025" b="0">
                 <a:solidFill>
                   <a:srgbClr val="152B4B"/>
@@ -22203,6 +23217,7 @@
               </a:defRPr>
             </a:lvl4pPr>
             <a:lvl5pPr algn="l">
+              <a:buNone/>
               <a:defRPr sz="2025" b="0">
                 <a:solidFill>
                   <a:srgbClr val="152B4B"/>
@@ -22213,6 +23228,7 @@
               </a:defRPr>
             </a:lvl5pPr>
             <a:lvl6pPr algn="l">
+              <a:buNone/>
               <a:defRPr sz="2025" b="0">
                 <a:solidFill>
                   <a:srgbClr val="152B4B"/>
@@ -22223,6 +23239,7 @@
               </a:defRPr>
             </a:lvl6pPr>
             <a:lvl7pPr algn="l">
+              <a:buNone/>
               <a:defRPr sz="2025" b="0">
                 <a:solidFill>
                   <a:srgbClr val="152B4B"/>
@@ -22233,6 +23250,7 @@
               </a:defRPr>
             </a:lvl7pPr>
             <a:lvl8pPr algn="l">
+              <a:buNone/>
               <a:defRPr sz="2025" b="0">
                 <a:solidFill>
                   <a:srgbClr val="152B4B"/>
@@ -22243,6 +23261,7 @@
               </a:defRPr>
             </a:lvl8pPr>
             <a:lvl9pPr algn="l">
+              <a:buNone/>
               <a:defRPr sz="2025" b="0">
                 <a:solidFill>
                   <a:srgbClr val="152B4B"/>
@@ -22255,6 +23274,7 @@
           </a:lstStyle>
           <a:p xmlns:a="http://schemas.openxmlformats.org/drawingml/2006/main">
             <a:pPr algn="l">
+              <a:buNone/>
               <a:defRPr sz="2025" b="0">
                 <a:solidFill>
                   <a:srgbClr val="152B4B"/>
@@ -22278,6 +23298,7 @@
           </a:p>
           <a:p xmlns:a="http://schemas.openxmlformats.org/drawingml/2006/main">
             <a:pPr algn="l">
+              <a:buNone/>
               <a:defRPr sz="2025" b="0">
                 <a:solidFill>
                   <a:srgbClr val="152B4B"/>
@@ -22306,6 +23327,7 @@
           </a:p>
           <a:p xmlns:a="http://schemas.openxmlformats.org/drawingml/2006/main">
             <a:pPr algn="l">
+              <a:buNone/>
               <a:defRPr sz="2025" b="0">
                 <a:solidFill>
                   <a:srgbClr val="152B4B"/>
@@ -22329,6 +23351,7 @@
           </a:p>
           <a:p xmlns:a="http://schemas.openxmlformats.org/drawingml/2006/main">
             <a:pPr algn="l">
+              <a:buNone/>
               <a:defRPr sz="2025" b="0">
                 <a:solidFill>
                   <a:srgbClr val="152B4B"/>
@@ -22357,6 +23380,7 @@
           </a:p>
           <a:p xmlns:a="http://schemas.openxmlformats.org/drawingml/2006/main">
             <a:pPr algn="l">
+              <a:buNone/>
               <a:defRPr sz="2025" b="0">
                 <a:solidFill>
                   <a:srgbClr val="152B4B"/>
@@ -22380,6 +23404,7 @@
           </a:p>
           <a:p xmlns:a="http://schemas.openxmlformats.org/drawingml/2006/main">
             <a:pPr algn="l">
+              <a:buNone/>
               <a:defRPr sz="2025" b="0">
                 <a:solidFill>
                   <a:srgbClr val="152B4B"/>
@@ -22447,6 +23472,7 @@
               </a:defRPr>
             </a:defPPr>
             <a:lvl1pPr algn="l">
+              <a:buNone/>
               <a:defRPr sz="1425" b="0">
                 <a:solidFill>
                   <a:srgbClr val="53647C"/>
@@ -22457,6 +23483,7 @@
               </a:defRPr>
             </a:lvl1pPr>
             <a:lvl2pPr algn="l">
+              <a:buNone/>
               <a:defRPr sz="1425" b="0">
                 <a:solidFill>
                   <a:srgbClr val="53647C"/>
@@ -22467,6 +23494,7 @@
               </a:defRPr>
             </a:lvl2pPr>
             <a:lvl3pPr algn="l">
+              <a:buNone/>
               <a:defRPr sz="1425" b="0">
                 <a:solidFill>
                   <a:srgbClr val="53647C"/>
@@ -22477,6 +23505,7 @@
               </a:defRPr>
             </a:lvl3pPr>
             <a:lvl4pPr algn="l">
+              <a:buNone/>
               <a:defRPr sz="1425" b="0">
                 <a:solidFill>
                   <a:srgbClr val="53647C"/>
@@ -22487,6 +23516,7 @@
               </a:defRPr>
             </a:lvl4pPr>
             <a:lvl5pPr algn="l">
+              <a:buNone/>
               <a:defRPr sz="1425" b="0">
                 <a:solidFill>
                   <a:srgbClr val="53647C"/>
@@ -22497,6 +23527,7 @@
               </a:defRPr>
             </a:lvl5pPr>
             <a:lvl6pPr algn="l">
+              <a:buNone/>
               <a:defRPr sz="1425" b="0">
                 <a:solidFill>
                   <a:srgbClr val="53647C"/>
@@ -22507,6 +23538,7 @@
               </a:defRPr>
             </a:lvl6pPr>
             <a:lvl7pPr algn="l">
+              <a:buNone/>
               <a:defRPr sz="1425" b="0">
                 <a:solidFill>
                   <a:srgbClr val="53647C"/>
@@ -22517,6 +23549,7 @@
               </a:defRPr>
             </a:lvl7pPr>
             <a:lvl8pPr algn="l">
+              <a:buNone/>
               <a:defRPr sz="1425" b="0">
                 <a:solidFill>
                   <a:srgbClr val="53647C"/>
@@ -22527,6 +23560,7 @@
               </a:defRPr>
             </a:lvl8pPr>
             <a:lvl9pPr algn="l">
+              <a:buNone/>
               <a:defRPr sz="1425" b="0">
                 <a:solidFill>
                   <a:srgbClr val="53647C"/>
@@ -22539,6 +23573,7 @@
           </a:lstStyle>
           <a:p xmlns:a="http://schemas.openxmlformats.org/drawingml/2006/main">
             <a:pPr algn="l">
+              <a:buNone/>
               <a:defRPr sz="1425" b="0">
                 <a:solidFill>
                   <a:srgbClr val="53647C"/>

--- a/docs/presentation/presentation.pptx
+++ b/docs/presentation/presentation.pptx
@@ -2,25 +2,25 @@
 <file path=ppt/presentation.xml><?xml version="1.0" encoding="utf-8"?>
 <p:presentation xmlns:p="http://schemas.openxmlformats.org/presentationml/2006/main">
   <p:sldMasterIdLst>
-    <p:sldMasterId xmlns:r="http://schemas.openxmlformats.org/officeDocument/2006/relationships" id="2147483648" r:id="R4da13af65beb4678"/>
+    <p:sldMasterId xmlns:r="http://schemas.openxmlformats.org/officeDocument/2006/relationships" id="2147483648" r:id="R71f53bac69b34993"/>
   </p:sldMasterIdLst>
   <p:notesMasterIdLst>
-    <p:notesMasterId xmlns:r="http://schemas.openxmlformats.org/officeDocument/2006/relationships" r:id="R4355ff762a1440ec"/>
+    <p:notesMasterId xmlns:r="http://schemas.openxmlformats.org/officeDocument/2006/relationships" r:id="R43033cfaa1554f52"/>
   </p:notesMasterIdLst>
   <p:sldIdLst>
-    <p:sldId xmlns:r="http://schemas.openxmlformats.org/officeDocument/2006/relationships" id="256" r:id="R106b14b5cccd4235"/>
-    <p:sldId xmlns:r="http://schemas.openxmlformats.org/officeDocument/2006/relationships" id="257" r:id="Re1643bbed6804875"/>
-    <p:sldId xmlns:r="http://schemas.openxmlformats.org/officeDocument/2006/relationships" id="258" r:id="R6b623cab93a942a0"/>
-    <p:sldId xmlns:r="http://schemas.openxmlformats.org/officeDocument/2006/relationships" id="259" r:id="R0d3d9d41c4c34566"/>
-    <p:sldId xmlns:r="http://schemas.openxmlformats.org/officeDocument/2006/relationships" id="260" r:id="Rfd1929290b0a440e"/>
-    <p:sldId xmlns:r="http://schemas.openxmlformats.org/officeDocument/2006/relationships" id="261" r:id="Rbfeb5b8aa25540a4"/>
-    <p:sldId xmlns:r="http://schemas.openxmlformats.org/officeDocument/2006/relationships" id="262" r:id="R6412bce29504498b"/>
-    <p:sldId xmlns:r="http://schemas.openxmlformats.org/officeDocument/2006/relationships" id="263" r:id="R71bb13d8a5dc409e"/>
-    <p:sldId xmlns:r="http://schemas.openxmlformats.org/officeDocument/2006/relationships" id="264" r:id="R3086453580354398"/>
-    <p:sldId xmlns:r="http://schemas.openxmlformats.org/officeDocument/2006/relationships" id="265" r:id="R352cd019573d449d"/>
-    <p:sldId xmlns:r="http://schemas.openxmlformats.org/officeDocument/2006/relationships" id="266" r:id="R6f29bfa3630d4487"/>
-    <p:sldId xmlns:r="http://schemas.openxmlformats.org/officeDocument/2006/relationships" id="267" r:id="Rc979b5b8602e49e4"/>
-    <p:sldId xmlns:r="http://schemas.openxmlformats.org/officeDocument/2006/relationships" id="268" r:id="R427906fdf21f42cf"/>
+    <p:sldId xmlns:r="http://schemas.openxmlformats.org/officeDocument/2006/relationships" id="256" r:id="R6411f445d9c4493c"/>
+    <p:sldId xmlns:r="http://schemas.openxmlformats.org/officeDocument/2006/relationships" id="257" r:id="Raff67e331a1e40c4"/>
+    <p:sldId xmlns:r="http://schemas.openxmlformats.org/officeDocument/2006/relationships" id="258" r:id="R6e317fbc5e8f4c23"/>
+    <p:sldId xmlns:r="http://schemas.openxmlformats.org/officeDocument/2006/relationships" id="259" r:id="Rfbab2f0678a64bae"/>
+    <p:sldId xmlns:r="http://schemas.openxmlformats.org/officeDocument/2006/relationships" id="260" r:id="R4137bc22fdf44d63"/>
+    <p:sldId xmlns:r="http://schemas.openxmlformats.org/officeDocument/2006/relationships" id="261" r:id="R31b3f980ac6b4ddb"/>
+    <p:sldId xmlns:r="http://schemas.openxmlformats.org/officeDocument/2006/relationships" id="262" r:id="R31a581d422054780"/>
+    <p:sldId xmlns:r="http://schemas.openxmlformats.org/officeDocument/2006/relationships" id="263" r:id="R970d163017374856"/>
+    <p:sldId xmlns:r="http://schemas.openxmlformats.org/officeDocument/2006/relationships" id="264" r:id="Rc09f88f4761942d7"/>
+    <p:sldId xmlns:r="http://schemas.openxmlformats.org/officeDocument/2006/relationships" id="265" r:id="Rf273c9cb4b154612"/>
+    <p:sldId xmlns:r="http://schemas.openxmlformats.org/officeDocument/2006/relationships" id="266" r:id="Raa64493e15774dfd"/>
+    <p:sldId xmlns:r="http://schemas.openxmlformats.org/officeDocument/2006/relationships" id="267" r:id="R820312024b2849e1"/>
+    <p:sldId xmlns:r="http://schemas.openxmlformats.org/officeDocument/2006/relationships" id="268" r:id="R953ec0c47d96474a"/>
   </p:sldIdLst>
   <p:sldSz cx="12192000" cy="6858000"/>
   <p:notesSz cx="6858000" cy="9144000"/>
@@ -3802,12 +3802,12 @@
   </p:cSld>
   <p:clrMap bg1="lt1" tx1="dk1" bg2="lt2" tx2="dk2" accent1="accent1" accent2="accent2" accent3="accent3" accent4="accent4" accent5="accent5" accent6="accent6" hlink="hlink" folHlink="folHlink"/>
   <p:sldLayoutIdLst>
-    <p:sldLayoutId xmlns:r="http://schemas.openxmlformats.org/officeDocument/2006/relationships" id="2147483649" r:id="R0d9003992f864c7f"/>
-    <p:sldLayoutId xmlns:r="http://schemas.openxmlformats.org/officeDocument/2006/relationships" id="2147483650" r:id="R3fcb98c018f5447a"/>
-    <p:sldLayoutId xmlns:r="http://schemas.openxmlformats.org/officeDocument/2006/relationships" id="2147483651" r:id="R27eaf4a6897d4ee9"/>
-    <p:sldLayoutId xmlns:r="http://schemas.openxmlformats.org/officeDocument/2006/relationships" id="2147483652" r:id="R7cdb0962858149f1"/>
-    <p:sldLayoutId xmlns:r="http://schemas.openxmlformats.org/officeDocument/2006/relationships" id="2147483653" r:id="R570fd0e274094010"/>
-    <p:sldLayoutId xmlns:r="http://schemas.openxmlformats.org/officeDocument/2006/relationships" id="2147483654" r:id="Rbbbca8813f604274"/>
+    <p:sldLayoutId xmlns:r="http://schemas.openxmlformats.org/officeDocument/2006/relationships" id="2147483649" r:id="R7fa4d22e98ae44e3"/>
+    <p:sldLayoutId xmlns:r="http://schemas.openxmlformats.org/officeDocument/2006/relationships" id="2147483650" r:id="R83583782afa1416c"/>
+    <p:sldLayoutId xmlns:r="http://schemas.openxmlformats.org/officeDocument/2006/relationships" id="2147483651" r:id="Rd4f827288f254ccc"/>
+    <p:sldLayoutId xmlns:r="http://schemas.openxmlformats.org/officeDocument/2006/relationships" id="2147483652" r:id="R67832741aa1f4601"/>
+    <p:sldLayoutId xmlns:r="http://schemas.openxmlformats.org/officeDocument/2006/relationships" id="2147483653" r:id="R13b01eac85244474"/>
+    <p:sldLayoutId xmlns:r="http://schemas.openxmlformats.org/officeDocument/2006/relationships" id="2147483654" r:id="R6ec6d2315f394bcd"/>
   </p:sldLayoutIdLst>
   <p:txStyles>
     <p:titleStyle>
@@ -6048,7 +6048,7 @@
                 <a:ea typeface="Noto Sans KR"/>
                 <a:cs typeface="Noto Sans KR"/>
               </a:rPr>
-              <a:t>2026.10.28 이용·응답. 전원 취업 준비생, 팀원 제외, 익명 평가 활용 동의.</a:t>
+              <a:t>2026.10.28 이용·응답. 개발 직무 준비생 5명, 팀원 제외·익명 활용 동의.</a:t>
             </a:r>
           </a:p>
         </p:txBody>
@@ -6396,7 +6396,7 @@
           <p:cNvPr id="5" name="">
             <a:extLst xmlns:a="http://schemas.openxmlformats.org/drawingml/2006/main">
               <a:ext uri="{FF2B5EF4-FFF2-40B4-BE49-F238E27FC236}">
-                <a16:creationId xmlns:a16="http://schemas.microsoft.com/office/drawing/2014/main" id="{141E1353-F46E-4BF0-B456-6234E181A05B}"/>
+                <a16:creationId xmlns:a16="http://schemas.microsoft.com/office/drawing/2014/main" id="{186FF293-605B-403C-B109-04E7EE3EB342}"/>
               </a:ext>
             </a:extLst>
           </p:cNvPr>
@@ -8262,7 +8262,7 @@
                 <a:ea typeface="Noto Sans KR"/>
                 <a:cs typeface="Noto Sans KR"/>
               </a:rPr>
-              <a:t>피드백 이후 서비스 기능 수정 없음</a:t>
+              <a:t>피드백에 따른 기능 수정 없음</a:t>
             </a:r>
           </a:p>
         </p:txBody>
@@ -8624,7 +8624,7 @@
                 <a:ea typeface="Noto Sans KR"/>
                 <a:cs typeface="Noto Sans KR"/>
               </a:rPr>
-              <a:t>의견 원문과 유지 판단을 문서에 남겼습니다.</a:t>
+              <a:t>긍정적 의견은 기능 유지로 반영했습니다.</a:t>
             </a:r>
           </a:p>
           <a:p xmlns:a="http://schemas.openxmlformats.org/drawingml/2006/main">
@@ -8648,7 +8648,7 @@
                 <a:ea typeface="Noto Sans KR"/>
                 <a:cs typeface="Noto Sans KR"/>
               </a:rPr>
-              <a:t>기존 공고 필터 수정을 이번 사용자 피드백의 성과로 소급하지 않았습니다.</a:t>
+              <a:t>후속 bb1885e 수정은 별도 기술 시험에서 발견한 상담·검색 오류에 따른 작업입니다.</a:t>
             </a:r>
           </a:p>
         </p:txBody>
@@ -9363,7 +9363,7 @@
           <p:cNvPr id="5" name="">
             <a:extLst xmlns:a="http://schemas.openxmlformats.org/drawingml/2006/main">
               <a:ext uri="{FF2B5EF4-FFF2-40B4-BE49-F238E27FC236}">
-                <a16:creationId xmlns:a16="http://schemas.microsoft.com/office/drawing/2014/main" id="{9DBD9C71-7727-4CD1-A710-02DF34519C30}"/>
+                <a16:creationId xmlns:a16="http://schemas.microsoft.com/office/drawing/2014/main" id="{DFD45A0A-671D-443F-AA33-9A0C464D1BE8}"/>
               </a:ext>
             </a:extLst>
           </p:cNvPr>
@@ -10093,7 +10093,7 @@
                 <a:ea typeface="Noto Sans KR"/>
                 <a:cs typeface="Noto Sans KR"/>
               </a:rPr>
-              <a:t>AI 생성 정보 고지와 외부 전송 동의, 서버의 미동의 차단을 적용했습니다.</a:t>
+              <a:t>AI 고지·화면 동의 차단·서버 미동의 403 응답 3회를 확인했습니다.</a:t>
             </a:r>
           </a:p>
           <a:p xmlns:a="http://schemas.openxmlformats.org/drawingml/2006/main">
@@ -10117,18 +10117,7 @@
                 <a:ea typeface="Noto Sans KR"/>
                 <a:cs typeface="Noto Sans KR"/>
               </a:rPr>
-              <a:t>피드백은 T1~T5로 기록합니다. </a:t>
-            </a:r>
-            <a:r>
-              <a:rPr sz="1875" b="0">
-                <a:solidFill>
-                  <a:srgbClr val="152B4B"/>
-                </a:solidFill>
-                <a:latin typeface="Noto Sans KR"/>
-                <a:ea typeface="Noto Sans KR"/>
-                <a:cs typeface="Noto Sans KR"/>
-              </a:rPr>
-              <a:t>세 명의 본인 기여 요약과 대표 커밋을 문서로 남겼습니다.</a:t>
+              <a:t>세 명의 기여 요약을 작성했고, 키 폐기·피드백 익명 처리는 담당자가 확인했습니다.</a:t>
             </a:r>
           </a:p>
         </p:txBody>
@@ -11195,7 +11184,7 @@
                 <a:ea typeface="Noto Sans KR"/>
                 <a:cs typeface="Noto Sans KR"/>
               </a:rPr>
-              <a:t>이미지 답변의 무관한 출처와 Markdown 원문 표시가 남아 있습니다.</a:t>
+              <a:t>무관한 출처·Markdown 원문·내부 처리 표시·민감 정보 질문은 개선점입니다.</a:t>
             </a:r>
           </a:p>
           <a:p xmlns:a="http://schemas.openxmlformats.org/drawingml/2006/main">
@@ -11219,7 +11208,7 @@
                 <a:ea typeface="Noto Sans KR"/>
                 <a:cs typeface="Noto Sans KR"/>
               </a:rPr>
-              <a:t>원래 직무 추천 요구와 현재 공고 후보 검색의 범위를 최종 대조해야 합니다.</a:t>
+              <a:t>초기 명세의 공고 추천 범위를 기준으로 구현·검증 결과를 정리했습니다.</a:t>
             </a:r>
           </a:p>
           <a:p xmlns:a="http://schemas.openxmlformats.org/drawingml/2006/main">
@@ -11243,7 +11232,7 @@
                 <a:ea typeface="Noto Sans KR"/>
                 <a:cs typeface="Noto Sans KR"/>
               </a:rPr>
-              <a:t>Must 최종 검증·타깃 근거·수집 질문·익명 처리·키 폐기를 확인합니다.</a:t>
+              <a:t>남은 텍스트 회귀 확인과 제출 링크·서비스 유지 상태를 최종 점검합니다.</a:t>
             </a:r>
           </a:p>
         </p:txBody>
@@ -13773,7 +13762,7 @@
           <p:cNvPr id="5" name="">
             <a:extLst xmlns:a="http://schemas.openxmlformats.org/drawingml/2006/main">
               <a:ext uri="{FF2B5EF4-FFF2-40B4-BE49-F238E27FC236}">
-                <a16:creationId xmlns:a16="http://schemas.microsoft.com/office/drawing/2014/main" id="{DE92A8EE-C8DE-4964-8B8A-88999589BB40}"/>
+                <a16:creationId xmlns:a16="http://schemas.microsoft.com/office/drawing/2014/main" id="{24B1DC82-5330-4CD7-BAE5-DFC79BFE7303}"/>
               </a:ext>
             </a:extLst>
           </p:cNvPr>
@@ -15349,7 +15338,7 @@
           <p:cNvPr id="5" name="">
             <a:extLst xmlns:a="http://schemas.openxmlformats.org/drawingml/2006/main">
               <a:ext uri="{FF2B5EF4-FFF2-40B4-BE49-F238E27FC236}">
-                <a16:creationId xmlns:a16="http://schemas.microsoft.com/office/drawing/2014/main" id="{EF78BEE1-2146-4708-9A65-ABDFE1829CBD}"/>
+                <a16:creationId xmlns:a16="http://schemas.microsoft.com/office/drawing/2014/main" id="{8228A59C-DBB8-4D60-81E8-C218C1408190}"/>
               </a:ext>
             </a:extLst>
           </p:cNvPr>
@@ -16925,7 +16914,7 @@
           <p:cNvPr id="5" name="">
             <a:extLst xmlns:a="http://schemas.openxmlformats.org/drawingml/2006/main">
               <a:ext uri="{FF2B5EF4-FFF2-40B4-BE49-F238E27FC236}">
-                <a16:creationId xmlns:a16="http://schemas.microsoft.com/office/drawing/2014/main" id="{D22DBA72-DB66-4A45-B220-D87E51694A43}"/>
+                <a16:creationId xmlns:a16="http://schemas.microsoft.com/office/drawing/2014/main" id="{0340CA27-F10B-4990-BB98-F9B28967A427}"/>
               </a:ext>
             </a:extLst>
           </p:cNvPr>
@@ -18723,7 +18712,7 @@
           <p:cNvPr id="7" name="">
             <a:extLst xmlns:a="http://schemas.openxmlformats.org/drawingml/2006/main">
               <a:ext uri="{FF2B5EF4-FFF2-40B4-BE49-F238E27FC236}">
-                <a16:creationId xmlns:a16="http://schemas.microsoft.com/office/drawing/2014/main" id="{545F0997-F45D-4D68-865A-8703C5CA386E}"/>
+                <a16:creationId xmlns:a16="http://schemas.microsoft.com/office/drawing/2014/main" id="{4272FD53-C9E3-4825-A8A0-16E6C825C3A9}"/>
               </a:ext>
             </a:extLst>
           </p:cNvPr>
@@ -19649,7 +19638,7 @@
                 <a:ea typeface="Noto Sans KR"/>
                 <a:cs typeface="Noto Sans KR"/>
               </a:rPr>
-              <a:t>아래 수정은 사용자 피드백 수집 이전의 기술 검증에 따른 작업입니다.</a:t>
+              <a:t>초기 검색 필터와 후속 상담 오류를 기술 검증으로 보완했습니다.</a:t>
             </a:r>
           </a:p>
         </p:txBody>
@@ -19997,7 +19986,7 @@
           <p:cNvPr id="5" name="">
             <a:extLst xmlns:a="http://schemas.openxmlformats.org/drawingml/2006/main">
               <a:ext uri="{FF2B5EF4-FFF2-40B4-BE49-F238E27FC236}">
-                <a16:creationId xmlns:a16="http://schemas.microsoft.com/office/drawing/2014/main" id="{49F9D535-1DE6-4F22-803C-8498E07972B9}"/>
+                <a16:creationId xmlns:a16="http://schemas.microsoft.com/office/drawing/2014/main" id="{B0198857-54CE-4107-8787-125690D35F45}"/>
               </a:ext>
             </a:extLst>
           </p:cNvPr>
@@ -20408,7 +20397,7 @@
                           <a:ea typeface="Noto Sans KR"/>
                           <a:cs typeface="Noto Sans KR"/>
                         </a:rPr>
-                        <a:t>인크루트 ASP 검색 목록 누락</a:t>
+                        <a:t>목록 누락·일반 상담 계획 오류</a:t>
                       </a:r>
                     </a:p>
                   </a:txBody>
@@ -20455,7 +20444,7 @@
                           <a:ea typeface="Noto Sans KR"/>
                           <a:cs typeface="Noto Sans KR"/>
                         </a:rPr>
-                        <a:t>jobdb_list 경로 제외와 재현 검사 추가</a:t>
+                        <a:t>목록 필터·도구 없는 상담·검색 거부 처리</a:t>
                       </a:r>
                     </a:p>
                   </a:txBody>
@@ -20646,7 +20635,7 @@
                 <a:ea typeface="Noto Sans KR"/>
                 <a:cs typeface="Noto Sans KR"/>
               </a:rPr>
-              <a:t>인크루트 보완 후 배포 재검증에서 해당 목록의 미노출을 확인했습니다. 모든 사이트를 보장하지는 않습니다.</a:t>
+              <a:t>초기 필터 보완 후 bb1885e에서 상담·검색 의도 처리를 보완했습니다. 모든 사이트를 보장하지는 않습니다.</a:t>
             </a:r>
           </a:p>
         </p:txBody>
@@ -21013,7 +21002,7 @@
                 <a:ea typeface="Noto Sans KR"/>
                 <a:cs typeface="Noto Sans KR"/>
               </a:rPr>
-              <a:t>자동 검사와 실제 서비스 시험을 구분해 기록했습니다.</a:t>
+              <a:t>수정 전 시험과 bb1885e의 선택 회귀 시험을 구분했습니다.</a:t>
             </a:r>
           </a:p>
         </p:txBody>
@@ -21361,7 +21350,7 @@
           <p:cNvPr id="5" name="">
             <a:extLst xmlns:a="http://schemas.openxmlformats.org/drawingml/2006/main">
               <a:ext uri="{FF2B5EF4-FFF2-40B4-BE49-F238E27FC236}">
-                <a16:creationId xmlns:a16="http://schemas.microsoft.com/office/drawing/2014/main" id="{73F3B3CE-FF95-4125-8A56-E87D478AF6D8}"/>
+                <a16:creationId xmlns:a16="http://schemas.microsoft.com/office/drawing/2014/main" id="{F8F87CDB-BFA0-4631-AA14-D5CDD3D98D50}"/>
               </a:ext>
             </a:extLst>
           </p:cNvPr>
@@ -21597,7 +21586,7 @@
                           <a:ea typeface="Noto Sans KR"/>
                           <a:cs typeface="Noto Sans KR"/>
                         </a:rPr>
-                        <a:t>백엔드·프론트엔드·pandas 질문</a:t>
+                        <a:t>수정 전 백엔드·프론트·pandas 3회</a:t>
                       </a:r>
                     </a:p>
                   </a:txBody>
@@ -21638,7 +21627,7 @@
                           <a:ea typeface="Noto Sans KR"/>
                           <a:cs typeface="Noto Sans KR"/>
                         </a:rPr>
-                        <a:t>관련 문단·출처 확인</a:t>
+                        <a:t>3/3 문단·출처·조언 확인</a:t>
                       </a:r>
                     </a:p>
                   </a:txBody>
@@ -21728,7 +21717,7 @@
                           <a:ea typeface="Noto Sans KR"/>
                           <a:cs typeface="Noto Sans KR"/>
                         </a:rPr>
-                        <a:t>3종 검색과 목록 누락 재검증</a:t>
+                        <a:t>수정 전 3종 / 수정 후 Python 1회</a:t>
                       </a:r>
                     </a:p>
                   </a:txBody>
@@ -21769,7 +21758,7 @@
                           <a:ea typeface="Noto Sans KR"/>
                           <a:cs typeface="Noto Sans KR"/>
                         </a:rPr>
-                        <a:t>필터 동작 확인 / 모집 상태는 미확인</a:t>
+                        <a:t>후보·링크 확인 / 모집 상태 미확인</a:t>
                       </a:r>
                     </a:p>
                   </a:txBody>
@@ -21859,7 +21848,7 @@
                           <a:ea typeface="Noto Sans KR"/>
                           <a:cs typeface="Noto Sans KR"/>
                         </a:rPr>
-                        <a:t>3개 입력 사례</a:t>
+                        <a:t>수정 전 3개 입력 사례</a:t>
                       </a:r>
                     </a:p>
                   </a:txBody>
@@ -21900,7 +21889,7 @@
                           <a:ea typeface="Noto Sans KR"/>
                           <a:cs typeface="Noto Sans KR"/>
                         </a:rPr>
-                        <a:t>일치·차이·정보 부족 분류 확인</a:t>
+                        <a:t>2/3 충족·1회 부분 충족</a:t>
                       </a:r>
                     </a:p>
                   </a:txBody>
@@ -22222,7 +22211,7 @@
                 <a:ea typeface="Noto Sans KR"/>
                 <a:cs typeface="Noto Sans KR"/>
               </a:rPr>
-              <a:t>자동 검사 74개 통과 기록이 있습니다. 버전별 실패·부분 성공은 보존하며, 실사용자 피드백과 합산하지 않습니다.</a:t>
+              <a:t>기존 74개·보완 97개 자동 검사 기록. 수정 전 시험과 최신 회귀 결과는 합산하지 않습니다.</a:t>
             </a:r>
           </a:p>
         </p:txBody>
@@ -22937,7 +22926,7 @@
           <p:cNvPr id="5" name="">
             <a:extLst xmlns:a="http://schemas.openxmlformats.org/drawingml/2006/main">
               <a:ext uri="{FF2B5EF4-FFF2-40B4-BE49-F238E27FC236}">
-                <a16:creationId xmlns:a16="http://schemas.microsoft.com/office/drawing/2014/main" id="{53387AC6-6733-4870-9BD5-75212AD377CB}"/>
+                <a16:creationId xmlns:a16="http://schemas.microsoft.com/office/drawing/2014/main" id="{B81951E7-1FB8-4E64-8E57-1ACDDFED0514}"/>
               </a:ext>
             </a:extLst>
           </p:cNvPr>
@@ -22947,7 +22936,7 @@
           <p:nvPr/>
         </p:nvPicPr>
         <p:blipFill>
-          <a:blip xmlns:r="http://schemas.openxmlformats.org/officeDocument/2006/relationships" xmlns:a="http://schemas.openxmlformats.org/drawingml/2006/main" r:embed="R6db55ef0c8254eb5"/>
+          <a:blip xmlns:r="http://schemas.openxmlformats.org/officeDocument/2006/relationships" xmlns:a="http://schemas.openxmlformats.org/drawingml/2006/main" r:embed="R6056c86905764d42"/>
           <a:stretch xmlns:a="http://schemas.openxmlformats.org/drawingml/2006/main"/>
         </p:blipFill>
         <p:spPr>

--- a/docs/presentation/presentation.pptx
+++ b/docs/presentation/presentation.pptx
@@ -2,25 +2,25 @@
 <file path=ppt/presentation.xml><?xml version="1.0" encoding="utf-8"?>
 <p:presentation xmlns:p="http://schemas.openxmlformats.org/presentationml/2006/main">
   <p:sldMasterIdLst>
-    <p:sldMasterId xmlns:r="http://schemas.openxmlformats.org/officeDocument/2006/relationships" id="2147483648" r:id="R71f53bac69b34993"/>
+    <p:sldMasterId xmlns:r="http://schemas.openxmlformats.org/officeDocument/2006/relationships" id="2147483648" r:id="R9045f5373f184d15"/>
   </p:sldMasterIdLst>
   <p:notesMasterIdLst>
-    <p:notesMasterId xmlns:r="http://schemas.openxmlformats.org/officeDocument/2006/relationships" r:id="R43033cfaa1554f52"/>
+    <p:notesMasterId xmlns:r="http://schemas.openxmlformats.org/officeDocument/2006/relationships" r:id="Ra58a87526853478a"/>
   </p:notesMasterIdLst>
   <p:sldIdLst>
-    <p:sldId xmlns:r="http://schemas.openxmlformats.org/officeDocument/2006/relationships" id="256" r:id="R6411f445d9c4493c"/>
-    <p:sldId xmlns:r="http://schemas.openxmlformats.org/officeDocument/2006/relationships" id="257" r:id="Raff67e331a1e40c4"/>
-    <p:sldId xmlns:r="http://schemas.openxmlformats.org/officeDocument/2006/relationships" id="258" r:id="R6e317fbc5e8f4c23"/>
-    <p:sldId xmlns:r="http://schemas.openxmlformats.org/officeDocument/2006/relationships" id="259" r:id="Rfbab2f0678a64bae"/>
-    <p:sldId xmlns:r="http://schemas.openxmlformats.org/officeDocument/2006/relationships" id="260" r:id="R4137bc22fdf44d63"/>
-    <p:sldId xmlns:r="http://schemas.openxmlformats.org/officeDocument/2006/relationships" id="261" r:id="R31b3f980ac6b4ddb"/>
-    <p:sldId xmlns:r="http://schemas.openxmlformats.org/officeDocument/2006/relationships" id="262" r:id="R31a581d422054780"/>
-    <p:sldId xmlns:r="http://schemas.openxmlformats.org/officeDocument/2006/relationships" id="263" r:id="R970d163017374856"/>
-    <p:sldId xmlns:r="http://schemas.openxmlformats.org/officeDocument/2006/relationships" id="264" r:id="Rc09f88f4761942d7"/>
-    <p:sldId xmlns:r="http://schemas.openxmlformats.org/officeDocument/2006/relationships" id="265" r:id="Rf273c9cb4b154612"/>
-    <p:sldId xmlns:r="http://schemas.openxmlformats.org/officeDocument/2006/relationships" id="266" r:id="Raa64493e15774dfd"/>
-    <p:sldId xmlns:r="http://schemas.openxmlformats.org/officeDocument/2006/relationships" id="267" r:id="R820312024b2849e1"/>
-    <p:sldId xmlns:r="http://schemas.openxmlformats.org/officeDocument/2006/relationships" id="268" r:id="R953ec0c47d96474a"/>
+    <p:sldId xmlns:r="http://schemas.openxmlformats.org/officeDocument/2006/relationships" id="256" r:id="Re89b53c03b664748"/>
+    <p:sldId xmlns:r="http://schemas.openxmlformats.org/officeDocument/2006/relationships" id="257" r:id="Re2136ef7367b47ad"/>
+    <p:sldId xmlns:r="http://schemas.openxmlformats.org/officeDocument/2006/relationships" id="258" r:id="Rad409e6d288443e3"/>
+    <p:sldId xmlns:r="http://schemas.openxmlformats.org/officeDocument/2006/relationships" id="259" r:id="R9e21099f526d4c2e"/>
+    <p:sldId xmlns:r="http://schemas.openxmlformats.org/officeDocument/2006/relationships" id="260" r:id="R4101a32b0c28406d"/>
+    <p:sldId xmlns:r="http://schemas.openxmlformats.org/officeDocument/2006/relationships" id="261" r:id="Rb5a8b14635484f61"/>
+    <p:sldId xmlns:r="http://schemas.openxmlformats.org/officeDocument/2006/relationships" id="262" r:id="Rff0daa595e9145b7"/>
+    <p:sldId xmlns:r="http://schemas.openxmlformats.org/officeDocument/2006/relationships" id="263" r:id="R543570dc08074003"/>
+    <p:sldId xmlns:r="http://schemas.openxmlformats.org/officeDocument/2006/relationships" id="264" r:id="Reae3fd6ee0f74285"/>
+    <p:sldId xmlns:r="http://schemas.openxmlformats.org/officeDocument/2006/relationships" id="265" r:id="Rdb61409a960545b6"/>
+    <p:sldId xmlns:r="http://schemas.openxmlformats.org/officeDocument/2006/relationships" id="266" r:id="R1a70af13fae3484b"/>
+    <p:sldId xmlns:r="http://schemas.openxmlformats.org/officeDocument/2006/relationships" id="267" r:id="Rc1fe51597feb4584"/>
+    <p:sldId xmlns:r="http://schemas.openxmlformats.org/officeDocument/2006/relationships" id="268" r:id="R0fe67e8af96c481a"/>
   </p:sldIdLst>
   <p:sldSz cx="12192000" cy="6858000"/>
   <p:notesSz cx="6858000" cy="9144000"/>
@@ -607,6 +607,16 @@
               <a:t>출처: https://github.com/SonJH0/aisupport/blob/main/docs/사용자-피드백-기록.md</a:t>
             </a:r>
           </a:p>
+          <a:p xmlns:a="http://schemas.openxmlformats.org/drawingml/2006/main">
+            <a:r>
+              <a:t>최신 원문·판정: https://github.com/SonJH0/aisupport/blob/main/docs/verification/latest-text-revalidation.md</a:t>
+            </a:r>
+          </a:p>
+          <a:p xmlns:a="http://schemas.openxmlformats.org/drawingml/2006/main">
+            <a:r>
+              <a:t>수집 스크립트는 실행 중 배포 SHA를 독립 관찰하지 않았다. 최신 비교 3/3, 상담 1건·검색 2건의 선택 시험. 전체 기능 새 3회 시험으로 합산하지 않는다.</a:t>
+            </a:r>
+          </a:p>
         </p:txBody>
       </p:sp>
       <p:sp>
@@ -760,6 +770,16 @@
           <a:p xmlns:a="http://schemas.openxmlformats.org/drawingml/2006/main">
             <a:r>
               <a:t>출처: https://github.com/SonJH0/aisupport/blob/main/docs/요구사항-정의서.md</a:t>
+            </a:r>
+          </a:p>
+          <a:p xmlns:a="http://schemas.openxmlformats.org/drawingml/2006/main">
+            <a:r>
+              <a:t>최신 원문·판정: https://github.com/SonJH0/aisupport/blob/main/docs/verification/latest-text-revalidation.md</a:t>
+            </a:r>
+          </a:p>
+          <a:p xmlns:a="http://schemas.openxmlformats.org/drawingml/2006/main">
+            <a:r>
+              <a:t>수집 스크립트는 실행 중 배포 SHA를 독립 관찰하지 않았다. 최신 비교 3/3, 상담 1건·검색 2건의 선택 시험. 전체 기능 새 3회 시험으로 합산하지 않는다.</a:t>
             </a:r>
           </a:p>
         </p:txBody>
@@ -1207,6 +1227,16 @@
               <a:t>출처: https://github.com/SonJH0/aisupport/commit/e101485</a:t>
             </a:r>
           </a:p>
+          <a:p xmlns:a="http://schemas.openxmlformats.org/drawingml/2006/main">
+            <a:r>
+              <a:t>최신 원문·판정: https://github.com/SonJH0/aisupport/blob/main/docs/verification/latest-text-revalidation.md</a:t>
+            </a:r>
+          </a:p>
+          <a:p xmlns:a="http://schemas.openxmlformats.org/drawingml/2006/main">
+            <a:r>
+              <a:t>수집 스크립트는 실행 중 배포 SHA를 독립 관찰하지 않았다. 최신 비교 3/3, 상담 1건·검색 2건의 선택 시험. 전체 기능 새 3회 시험으로 합산하지 않는다.</a:t>
+            </a:r>
+          </a:p>
         </p:txBody>
       </p:sp>
       <p:sp>
@@ -1285,6 +1315,16 @@
           <a:p xmlns:a="http://schemas.openxmlformats.org/drawingml/2006/main">
             <a:r>
               <a:t>출처: https://github.com/SonJH0/aisupport/blob/main/docs/image-validation/image-validation.md</a:t>
+            </a:r>
+          </a:p>
+          <a:p xmlns:a="http://schemas.openxmlformats.org/drawingml/2006/main">
+            <a:r>
+              <a:t>최신 원문·판정: https://github.com/SonJH0/aisupport/blob/main/docs/verification/latest-text-revalidation.md</a:t>
+            </a:r>
+          </a:p>
+          <a:p xmlns:a="http://schemas.openxmlformats.org/drawingml/2006/main">
+            <a:r>
+              <a:t>수집 스크립트는 실행 중 배포 SHA를 독립 관찰하지 않았다. 최신 비교 3/3, 상담 1건·검색 2건의 선택 시험. 전체 기능 새 3회 시험으로 합산하지 않는다.</a:t>
             </a:r>
           </a:p>
         </p:txBody>
@@ -3802,12 +3842,12 @@
   </p:cSld>
   <p:clrMap bg1="lt1" tx1="dk1" bg2="lt2" tx2="dk2" accent1="accent1" accent2="accent2" accent3="accent3" accent4="accent4" accent5="accent5" accent6="accent6" hlink="hlink" folHlink="folHlink"/>
   <p:sldLayoutIdLst>
-    <p:sldLayoutId xmlns:r="http://schemas.openxmlformats.org/officeDocument/2006/relationships" id="2147483649" r:id="R7fa4d22e98ae44e3"/>
-    <p:sldLayoutId xmlns:r="http://schemas.openxmlformats.org/officeDocument/2006/relationships" id="2147483650" r:id="R83583782afa1416c"/>
-    <p:sldLayoutId xmlns:r="http://schemas.openxmlformats.org/officeDocument/2006/relationships" id="2147483651" r:id="Rd4f827288f254ccc"/>
-    <p:sldLayoutId xmlns:r="http://schemas.openxmlformats.org/officeDocument/2006/relationships" id="2147483652" r:id="R67832741aa1f4601"/>
-    <p:sldLayoutId xmlns:r="http://schemas.openxmlformats.org/officeDocument/2006/relationships" id="2147483653" r:id="R13b01eac85244474"/>
-    <p:sldLayoutId xmlns:r="http://schemas.openxmlformats.org/officeDocument/2006/relationships" id="2147483654" r:id="R6ec6d2315f394bcd"/>
+    <p:sldLayoutId xmlns:r="http://schemas.openxmlformats.org/officeDocument/2006/relationships" id="2147483649" r:id="R6affb155d87b4819"/>
+    <p:sldLayoutId xmlns:r="http://schemas.openxmlformats.org/officeDocument/2006/relationships" id="2147483650" r:id="R5fb6e2c6e91548a9"/>
+    <p:sldLayoutId xmlns:r="http://schemas.openxmlformats.org/officeDocument/2006/relationships" id="2147483651" r:id="Rd72d9e2c1a954df4"/>
+    <p:sldLayoutId xmlns:r="http://schemas.openxmlformats.org/officeDocument/2006/relationships" id="2147483652" r:id="Re8c6646021124c21"/>
+    <p:sldLayoutId xmlns:r="http://schemas.openxmlformats.org/officeDocument/2006/relationships" id="2147483653" r:id="R2546bd52a8444b8d"/>
+    <p:sldLayoutId xmlns:r="http://schemas.openxmlformats.org/officeDocument/2006/relationships" id="2147483654" r:id="R990ad2c2d6dd4b50"/>
   </p:sldLayoutIdLst>
   <p:txStyles>
     <p:titleStyle>
@@ -6396,7 +6436,7 @@
           <p:cNvPr id="5" name="">
             <a:extLst xmlns:a="http://schemas.openxmlformats.org/drawingml/2006/main">
               <a:ext uri="{FF2B5EF4-FFF2-40B4-BE49-F238E27FC236}">
-                <a16:creationId xmlns:a16="http://schemas.microsoft.com/office/drawing/2014/main" id="{186FF293-605B-403C-B109-04E7EE3EB342}"/>
+                <a16:creationId xmlns:a16="http://schemas.microsoft.com/office/drawing/2014/main" id="{80EED100-1172-46B6-8C84-F8A34270381F}"/>
               </a:ext>
             </a:extLst>
           </p:cNvPr>
@@ -8648,7 +8688,7 @@
                 <a:ea typeface="Noto Sans KR"/>
                 <a:cs typeface="Noto Sans KR"/>
               </a:rPr>
-              <a:t>후속 bb1885e 수정은 별도 기술 시험에서 발견한 상담·검색 오류에 따른 작업입니다.</a:t>
+              <a:t>후속 bb1885e·4d0295b 수정은 별도 기술 시험에서 발견한 오류에 따른 작업입니다.</a:t>
             </a:r>
           </a:p>
         </p:txBody>
@@ -9363,7 +9403,7 @@
           <p:cNvPr id="5" name="">
             <a:extLst xmlns:a="http://schemas.openxmlformats.org/drawingml/2006/main">
               <a:ext uri="{FF2B5EF4-FFF2-40B4-BE49-F238E27FC236}">
-                <a16:creationId xmlns:a16="http://schemas.microsoft.com/office/drawing/2014/main" id="{DFD45A0A-671D-443F-AA33-9A0C464D1BE8}"/>
+                <a16:creationId xmlns:a16="http://schemas.microsoft.com/office/drawing/2014/main" id="{85AC70AE-2789-4F19-AF2E-17B643471212}"/>
               </a:ext>
             </a:extLst>
           </p:cNvPr>
@@ -11232,7 +11272,7 @@
                 <a:ea typeface="Noto Sans KR"/>
                 <a:cs typeface="Noto Sans KR"/>
               </a:rPr>
-              <a:t>남은 텍스트 회귀 확인과 제출 링크·서비스 유지 상태를 최종 점검합니다.</a:t>
+              <a:t>버전별 검증 범위를 구분하고 제출 링크·서비스 유지 상태를 최종 점검합니다.</a:t>
             </a:r>
           </a:p>
         </p:txBody>
@@ -13762,7 +13802,7 @@
           <p:cNvPr id="5" name="">
             <a:extLst xmlns:a="http://schemas.openxmlformats.org/drawingml/2006/main">
               <a:ext uri="{FF2B5EF4-FFF2-40B4-BE49-F238E27FC236}">
-                <a16:creationId xmlns:a16="http://schemas.microsoft.com/office/drawing/2014/main" id="{24B1DC82-5330-4CD7-BAE5-DFC79BFE7303}"/>
+                <a16:creationId xmlns:a16="http://schemas.microsoft.com/office/drawing/2014/main" id="{16AD35BE-F467-4E53-B900-95142217EF41}"/>
               </a:ext>
             </a:extLst>
           </p:cNvPr>
@@ -15338,7 +15378,7 @@
           <p:cNvPr id="5" name="">
             <a:extLst xmlns:a="http://schemas.openxmlformats.org/drawingml/2006/main">
               <a:ext uri="{FF2B5EF4-FFF2-40B4-BE49-F238E27FC236}">
-                <a16:creationId xmlns:a16="http://schemas.microsoft.com/office/drawing/2014/main" id="{8228A59C-DBB8-4D60-81E8-C218C1408190}"/>
+                <a16:creationId xmlns:a16="http://schemas.microsoft.com/office/drawing/2014/main" id="{E3CA4CCD-E02C-42F3-8FB4-871BCA97A708}"/>
               </a:ext>
             </a:extLst>
           </p:cNvPr>
@@ -16914,7 +16954,7 @@
           <p:cNvPr id="5" name="">
             <a:extLst xmlns:a="http://schemas.openxmlformats.org/drawingml/2006/main">
               <a:ext uri="{FF2B5EF4-FFF2-40B4-BE49-F238E27FC236}">
-                <a16:creationId xmlns:a16="http://schemas.microsoft.com/office/drawing/2014/main" id="{0340CA27-F10B-4990-BB98-F9B28967A427}"/>
+                <a16:creationId xmlns:a16="http://schemas.microsoft.com/office/drawing/2014/main" id="{6E737F0D-C781-465D-AABA-CC8E399FAC3A}"/>
               </a:ext>
             </a:extLst>
           </p:cNvPr>
@@ -18630,7 +18670,7 @@
                 <a:ea typeface="Noto Sans KR"/>
                 <a:cs typeface="Noto Sans KR"/>
               </a:rPr>
-              <a:t>질문마다 TF-IDF·코사인 유사도로</a:t>
+              <a:t>학습 질문마다 TF-IDF·코사인 유사도로</a:t>
             </a:r>
           </a:p>
           <a:p xmlns:a="http://schemas.openxmlformats.org/drawingml/2006/main">
@@ -18712,7 +18752,7 @@
           <p:cNvPr id="7" name="">
             <a:extLst xmlns:a="http://schemas.openxmlformats.org/drawingml/2006/main">
               <a:ext uri="{FF2B5EF4-FFF2-40B4-BE49-F238E27FC236}">
-                <a16:creationId xmlns:a16="http://schemas.microsoft.com/office/drawing/2014/main" id="{4272FD53-C9E3-4825-A8A0-16E6C825C3A9}"/>
+                <a16:creationId xmlns:a16="http://schemas.microsoft.com/office/drawing/2014/main" id="{CA866131-FA99-4641-8FDA-6C191FD1D402}"/>
               </a:ext>
             </a:extLst>
           </p:cNvPr>
@@ -19638,7 +19678,7 @@
                 <a:ea typeface="Noto Sans KR"/>
                 <a:cs typeface="Noto Sans KR"/>
               </a:rPr>
-              <a:t>초기 검색 필터와 후속 상담 오류를 기술 검증으로 보완했습니다.</a:t>
+              <a:t>홈페이지 혼입과 경험 분류를 후속 기술 시험으로 보완했습니다.</a:t>
             </a:r>
           </a:p>
         </p:txBody>
@@ -19986,7 +20026,7 @@
           <p:cNvPr id="5" name="">
             <a:extLst xmlns:a="http://schemas.openxmlformats.org/drawingml/2006/main">
               <a:ext uri="{FF2B5EF4-FFF2-40B4-BE49-F238E27FC236}">
-                <a16:creationId xmlns:a16="http://schemas.microsoft.com/office/drawing/2014/main" id="{B0198857-54CE-4107-8787-125690D35F45}"/>
+                <a16:creationId xmlns:a16="http://schemas.microsoft.com/office/drawing/2014/main" id="{DA7A6B20-7B74-4758-8718-5C64E01163A5}"/>
               </a:ext>
             </a:extLst>
           </p:cNvPr>
@@ -20127,7 +20167,7 @@
                           <a:ea typeface="Noto Sans KR"/>
                           <a:cs typeface="Noto Sans KR"/>
                         </a:rPr>
-                        <a:t>강의·검색 목록이 공고에 혼입</a:t>
+                        <a:t>홈페이지·검색 목록이 공고에 혼입</a:t>
                       </a:r>
                     </a:p>
                   </a:txBody>
@@ -20174,7 +20214,7 @@
                           <a:ea typeface="Noto Sans KR"/>
                           <a:cs typeface="Noto Sans KR"/>
                         </a:rPr>
-                        <a:t>페이지 유형 필터와 개별 후보 표시</a:t>
+                        <a:t>루트 홈페이지 제외·개별 공고 유지</a:t>
                       </a:r>
                     </a:p>
                   </a:txBody>
@@ -20217,7 +20257,7 @@
                           <a:ea typeface="Noto Sans KR"/>
                           <a:cs typeface="Noto Sans KR"/>
                         </a:rPr>
-                        <a:t>신입 제목과 경력 하한의 충돌</a:t>
+                        <a:t>경험 유무와 숙련도 혼합</a:t>
                       </a:r>
                     </a:p>
                   </a:txBody>
@@ -20264,7 +20304,7 @@
                           <a:ea typeface="Noto Sans KR"/>
                           <a:cs typeface="Noto Sans KR"/>
                         </a:rPr>
-                        <a:t>경력 하한을 확인해 충돌 결과 제외</a:t>
+                        <a:t>경험 상태와 숙련도 확인 분리</a:t>
                       </a:r>
                     </a:p>
                   </a:txBody>
@@ -20397,7 +20437,7 @@
                           <a:ea typeface="Noto Sans KR"/>
                           <a:cs typeface="Noto Sans KR"/>
                         </a:rPr>
-                        <a:t>목록 누락·일반 상담 계획 오류</a:t>
+                        <a:t>원치 않는 검색·비교 출처 혼입</a:t>
                       </a:r>
                     </a:p>
                   </a:txBody>
@@ -20444,7 +20484,7 @@
                           <a:ea typeface="Noto Sans KR"/>
                           <a:cs typeface="Noto Sans KR"/>
                         </a:rPr>
-                        <a:t>목록 필터·도구 없는 상담·검색 거부 처리</a:t>
+                        <a:t>검색 의도 확인·비교 초기 검색 생략</a:t>
                       </a:r>
                     </a:p>
                   </a:txBody>
@@ -20635,7 +20675,7 @@
                 <a:ea typeface="Noto Sans KR"/>
                 <a:cs typeface="Noto Sans KR"/>
               </a:rPr>
-              <a:t>초기 필터 보완 후 bb1885e에서 상담·검색 의도 처리를 보완했습니다. 모든 사이트를 보장하지는 않습니다.</a:t>
+              <a:t>bb1885e 상담 보완 후 4d0295b에서 홈페이지·경험 분류를 보완했습니다. 이전 실패도 보존합니다.</a:t>
             </a:r>
           </a:p>
         </p:txBody>
@@ -21002,7 +21042,7 @@
                 <a:ea typeface="Noto Sans KR"/>
                 <a:cs typeface="Noto Sans KR"/>
               </a:rPr>
-              <a:t>수정 전 시험과 bb1885e의 선택 회귀 시험을 구분했습니다.</a:t>
+              <a:t>최신 선택 API 6건과 기존 이미지 시험을 구분해 기록했습니다.</a:t>
             </a:r>
           </a:p>
         </p:txBody>
@@ -21350,7 +21390,7 @@
           <p:cNvPr id="5" name="">
             <a:extLst xmlns:a="http://schemas.openxmlformats.org/drawingml/2006/main">
               <a:ext uri="{FF2B5EF4-FFF2-40B4-BE49-F238E27FC236}">
-                <a16:creationId xmlns:a16="http://schemas.microsoft.com/office/drawing/2014/main" id="{F8F87CDB-BFA0-4631-AA14-D5CDD3D98D50}"/>
+                <a16:creationId xmlns:a16="http://schemas.microsoft.com/office/drawing/2014/main" id="{9F265B96-1A4D-429A-AB3D-FD5F13A6E9E4}"/>
               </a:ext>
             </a:extLst>
           </p:cNvPr>
@@ -21586,7 +21626,7 @@
                           <a:ea typeface="Noto Sans KR"/>
                           <a:cs typeface="Noto Sans KR"/>
                         </a:rPr>
-                        <a:t>수정 전 백엔드·프론트·pandas 3회</a:t>
+                        <a:t>이전 MDN·pandas / 최신 FastAPI 1건</a:t>
                       </a:r>
                     </a:p>
                   </a:txBody>
@@ -21627,7 +21667,7 @@
                           <a:ea typeface="Noto Sans KR"/>
                           <a:cs typeface="Noto Sans KR"/>
                         </a:rPr>
-                        <a:t>3/3 문단·출처·조언 확인</a:t>
+                        <a:t>관련 문단·출처·학습 조언 확인</a:t>
                       </a:r>
                     </a:p>
                   </a:txBody>
@@ -21717,7 +21757,7 @@
                           <a:ea typeface="Noto Sans KR"/>
                           <a:cs typeface="Noto Sans KR"/>
                         </a:rPr>
-                        <a:t>수정 전 3종 / 수정 후 Python 1회</a:t>
+                        <a:t>최신 Java·React 검색 2건</a:t>
                       </a:r>
                     </a:p>
                   </a:txBody>
@@ -21758,7 +21798,7 @@
                           <a:ea typeface="Noto Sans KR"/>
                           <a:cs typeface="Noto Sans KR"/>
                         </a:rPr>
-                        <a:t>후보·링크 확인 / 모집 상태 미확인</a:t>
+                        <a:t>개별 후보·링크·홈페이지 미노출</a:t>
                       </a:r>
                     </a:p>
                   </a:txBody>
@@ -21848,7 +21888,7 @@
                           <a:ea typeface="Noto Sans KR"/>
                           <a:cs typeface="Noto Sans KR"/>
                         </a:rPr>
-                        <a:t>수정 전 3개 입력 사례</a:t>
+                        <a:t>최신 비교 입력 3건</a:t>
                       </a:r>
                     </a:p>
                   </a:txBody>
@@ -21889,7 +21929,7 @@
                           <a:ea typeface="Noto Sans KR"/>
                           <a:cs typeface="Noto Sans KR"/>
                         </a:rPr>
-                        <a:t>2/3 충족·1회 부분 충족</a:t>
+                        <a:t>3/3 핵심 기대 결과 충족</a:t>
                       </a:r>
                     </a:p>
                   </a:txBody>
@@ -21979,7 +22019,7 @@
                           <a:ea typeface="Noto Sans KR"/>
                           <a:cs typeface="Noto Sans KR"/>
                         </a:rPr>
-                        <a:t>API 3회 / 사용자 화면 3회</a:t>
+                        <a:t>기존 API 3회 / 사용자 화면 3회</a:t>
                       </a:r>
                     </a:p>
                   </a:txBody>
@@ -22211,7 +22251,7 @@
                 <a:ea typeface="Noto Sans KR"/>
                 <a:cs typeface="Noto Sans KR"/>
               </a:rPr>
-              <a:t>기존 74개·보완 97개 자동 검사 기록. 수정 전 시험과 최신 회귀 결과는 합산하지 않습니다.</a:t>
+              <a:t>자동 검사 113개. 최신 API 6건의 핵심 기대 결과 확인. 502는 이번에 미재현, 원인은 미확정입니다.</a:t>
             </a:r>
           </a:p>
         </p:txBody>
@@ -22926,7 +22966,7 @@
           <p:cNvPr id="5" name="">
             <a:extLst xmlns:a="http://schemas.openxmlformats.org/drawingml/2006/main">
               <a:ext uri="{FF2B5EF4-FFF2-40B4-BE49-F238E27FC236}">
-                <a16:creationId xmlns:a16="http://schemas.microsoft.com/office/drawing/2014/main" id="{B81951E7-1FB8-4E64-8E57-1ACDDFED0514}"/>
+                <a16:creationId xmlns:a16="http://schemas.microsoft.com/office/drawing/2014/main" id="{717162B8-8DF8-4949-8039-1ACDD96B78A7}"/>
               </a:ext>
             </a:extLst>
           </p:cNvPr>
@@ -22936,7 +22976,7 @@
           <p:nvPr/>
         </p:nvPicPr>
         <p:blipFill>
-          <a:blip xmlns:r="http://schemas.openxmlformats.org/officeDocument/2006/relationships" xmlns:a="http://schemas.openxmlformats.org/drawingml/2006/main" r:embed="R6056c86905764d42"/>
+          <a:blip xmlns:r="http://schemas.openxmlformats.org/officeDocument/2006/relationships" xmlns:a="http://schemas.openxmlformats.org/drawingml/2006/main" r:embed="Rd92ba9575d014b2c"/>
           <a:stretch xmlns:a="http://schemas.openxmlformats.org/drawingml/2006/main"/>
         </p:blipFill>
         <p:spPr>

--- a/docs/presentation/presentation.pptx
+++ b/docs/presentation/presentation.pptx
@@ -2,25 +2,25 @@
 <file path=ppt/presentation.xml><?xml version="1.0" encoding="utf-8"?>
 <p:presentation xmlns:p="http://schemas.openxmlformats.org/presentationml/2006/main">
   <p:sldMasterIdLst>
-    <p:sldMasterId xmlns:r="http://schemas.openxmlformats.org/officeDocument/2006/relationships" id="2147483648" r:id="R9045f5373f184d15"/>
+    <p:sldMasterId xmlns:r="http://schemas.openxmlformats.org/officeDocument/2006/relationships" id="2147483648" r:id="R4c5f2552b5fe471d"/>
   </p:sldMasterIdLst>
   <p:notesMasterIdLst>
-    <p:notesMasterId xmlns:r="http://schemas.openxmlformats.org/officeDocument/2006/relationships" r:id="Ra58a87526853478a"/>
+    <p:notesMasterId xmlns:r="http://schemas.openxmlformats.org/officeDocument/2006/relationships" r:id="Rb606214eb9d84d5a"/>
   </p:notesMasterIdLst>
   <p:sldIdLst>
-    <p:sldId xmlns:r="http://schemas.openxmlformats.org/officeDocument/2006/relationships" id="256" r:id="Re89b53c03b664748"/>
-    <p:sldId xmlns:r="http://schemas.openxmlformats.org/officeDocument/2006/relationships" id="257" r:id="Re2136ef7367b47ad"/>
-    <p:sldId xmlns:r="http://schemas.openxmlformats.org/officeDocument/2006/relationships" id="258" r:id="Rad409e6d288443e3"/>
-    <p:sldId xmlns:r="http://schemas.openxmlformats.org/officeDocument/2006/relationships" id="259" r:id="R9e21099f526d4c2e"/>
-    <p:sldId xmlns:r="http://schemas.openxmlformats.org/officeDocument/2006/relationships" id="260" r:id="R4101a32b0c28406d"/>
-    <p:sldId xmlns:r="http://schemas.openxmlformats.org/officeDocument/2006/relationships" id="261" r:id="Rb5a8b14635484f61"/>
-    <p:sldId xmlns:r="http://schemas.openxmlformats.org/officeDocument/2006/relationships" id="262" r:id="Rff0daa595e9145b7"/>
-    <p:sldId xmlns:r="http://schemas.openxmlformats.org/officeDocument/2006/relationships" id="263" r:id="R543570dc08074003"/>
-    <p:sldId xmlns:r="http://schemas.openxmlformats.org/officeDocument/2006/relationships" id="264" r:id="Reae3fd6ee0f74285"/>
-    <p:sldId xmlns:r="http://schemas.openxmlformats.org/officeDocument/2006/relationships" id="265" r:id="Rdb61409a960545b6"/>
-    <p:sldId xmlns:r="http://schemas.openxmlformats.org/officeDocument/2006/relationships" id="266" r:id="R1a70af13fae3484b"/>
-    <p:sldId xmlns:r="http://schemas.openxmlformats.org/officeDocument/2006/relationships" id="267" r:id="Rc1fe51597feb4584"/>
-    <p:sldId xmlns:r="http://schemas.openxmlformats.org/officeDocument/2006/relationships" id="268" r:id="R0fe67e8af96c481a"/>
+    <p:sldId xmlns:r="http://schemas.openxmlformats.org/officeDocument/2006/relationships" id="256" r:id="Rb44e79c88acb4d1c"/>
+    <p:sldId xmlns:r="http://schemas.openxmlformats.org/officeDocument/2006/relationships" id="257" r:id="R8249e785210f4a51"/>
+    <p:sldId xmlns:r="http://schemas.openxmlformats.org/officeDocument/2006/relationships" id="258" r:id="Re401e1d80266475c"/>
+    <p:sldId xmlns:r="http://schemas.openxmlformats.org/officeDocument/2006/relationships" id="259" r:id="R37414435c01c4533"/>
+    <p:sldId xmlns:r="http://schemas.openxmlformats.org/officeDocument/2006/relationships" id="260" r:id="Rf7ff9a97f1d24dfd"/>
+    <p:sldId xmlns:r="http://schemas.openxmlformats.org/officeDocument/2006/relationships" id="261" r:id="R5233978b1fa241e3"/>
+    <p:sldId xmlns:r="http://schemas.openxmlformats.org/officeDocument/2006/relationships" id="262" r:id="Re207cf53e93c41cc"/>
+    <p:sldId xmlns:r="http://schemas.openxmlformats.org/officeDocument/2006/relationships" id="263" r:id="R971793d235724488"/>
+    <p:sldId xmlns:r="http://schemas.openxmlformats.org/officeDocument/2006/relationships" id="264" r:id="R37c0dd1173744259"/>
+    <p:sldId xmlns:r="http://schemas.openxmlformats.org/officeDocument/2006/relationships" id="265" r:id="R7d52039b75414a09"/>
+    <p:sldId xmlns:r="http://schemas.openxmlformats.org/officeDocument/2006/relationships" id="266" r:id="R3bc1d6c1110e4ae4"/>
+    <p:sldId xmlns:r="http://schemas.openxmlformats.org/officeDocument/2006/relationships" id="267" r:id="R53a15d4bc4714216"/>
+    <p:sldId xmlns:r="http://schemas.openxmlformats.org/officeDocument/2006/relationships" id="268" r:id="R88aa007ac916417d"/>
   </p:sldIdLst>
   <p:sldSz cx="12192000" cy="6858000"/>
   <p:notesSz cx="6858000" cy="9144000"/>
@@ -617,6 +617,16 @@
               <a:t>수집 스크립트는 실행 중 배포 SHA를 독립 관찰하지 않았다. 최신 비교 3/3, 상담 1건·검색 2건의 선택 시험. 전체 기능 새 3회 시험으로 합산하지 않는다.</a:t>
             </a:r>
           </a:p>
+          <a:p xmlns:a="http://schemas.openxmlformats.org/drawingml/2006/main">
+            <a:r>
+              <a:t>최신 원문·판정: https://github.com/SonJH0/aisupport/blob/main/docs/verification/postdeploy-3719c28.md</a:t>
+            </a:r>
+          </a:p>
+          <a:p xmlns:a="http://schemas.openxmlformats.org/drawingml/2006/main">
+            <a:r>
+              <a:t>사용자 제공 Render 화면에서 source 3719c28·Live 확인. 배포 후 학습 상담 UI 3회·동의 절차 3회, 기존 검색·비교·이미지는 별도 시점의 기록으로 구분한다.</a:t>
+            </a:r>
+          </a:p>
         </p:txBody>
       </p:sp>
       <p:sp>
@@ -780,6 +790,16 @@
           <a:p xmlns:a="http://schemas.openxmlformats.org/drawingml/2006/main">
             <a:r>
               <a:t>수집 스크립트는 실행 중 배포 SHA를 독립 관찰하지 않았다. 최신 비교 3/3, 상담 1건·검색 2건의 선택 시험. 전체 기능 새 3회 시험으로 합산하지 않는다.</a:t>
+            </a:r>
+          </a:p>
+          <a:p xmlns:a="http://schemas.openxmlformats.org/drawingml/2006/main">
+            <a:r>
+              <a:t>최신 원문·판정: https://github.com/SonJH0/aisupport/blob/main/docs/verification/postdeploy-3719c28.md</a:t>
+            </a:r>
+          </a:p>
+          <a:p xmlns:a="http://schemas.openxmlformats.org/drawingml/2006/main">
+            <a:r>
+              <a:t>사용자 제공 Render 화면에서 source 3719c28·Live 확인. 배포 후 학습 상담 UI 3회·동의 절차 3회, 기존 검색·비교·이미지는 별도 시점의 기록으로 구분한다.</a:t>
             </a:r>
           </a:p>
         </p:txBody>
@@ -1237,6 +1257,16 @@
               <a:t>수집 스크립트는 실행 중 배포 SHA를 독립 관찰하지 않았다. 최신 비교 3/3, 상담 1건·검색 2건의 선택 시험. 전체 기능 새 3회 시험으로 합산하지 않는다.</a:t>
             </a:r>
           </a:p>
+          <a:p xmlns:a="http://schemas.openxmlformats.org/drawingml/2006/main">
+            <a:r>
+              <a:t>최신 원문·판정: https://github.com/SonJH0/aisupport/blob/main/docs/verification/postdeploy-3719c28.md</a:t>
+            </a:r>
+          </a:p>
+          <a:p xmlns:a="http://schemas.openxmlformats.org/drawingml/2006/main">
+            <a:r>
+              <a:t>사용자 제공 Render 화면에서 source 3719c28·Live 확인. 배포 후 학습 상담 UI 3회·동의 절차 3회, 기존 검색·비교·이미지는 별도 시점의 기록으로 구분한다.</a:t>
+            </a:r>
+          </a:p>
         </p:txBody>
       </p:sp>
       <p:sp>
@@ -1325,6 +1355,16 @@
           <a:p xmlns:a="http://schemas.openxmlformats.org/drawingml/2006/main">
             <a:r>
               <a:t>수집 스크립트는 실행 중 배포 SHA를 독립 관찰하지 않았다. 최신 비교 3/3, 상담 1건·검색 2건의 선택 시험. 전체 기능 새 3회 시험으로 합산하지 않는다.</a:t>
+            </a:r>
+          </a:p>
+          <a:p xmlns:a="http://schemas.openxmlformats.org/drawingml/2006/main">
+            <a:r>
+              <a:t>최신 원문·판정: https://github.com/SonJH0/aisupport/blob/main/docs/verification/postdeploy-3719c28.md</a:t>
+            </a:r>
+          </a:p>
+          <a:p xmlns:a="http://schemas.openxmlformats.org/drawingml/2006/main">
+            <a:r>
+              <a:t>사용자 제공 Render 화면에서 source 3719c28·Live 확인. 배포 후 학습 상담 UI 3회·동의 절차 3회, 기존 검색·비교·이미지는 별도 시점의 기록으로 구분한다.</a:t>
             </a:r>
           </a:p>
         </p:txBody>
@@ -3842,12 +3882,12 @@
   </p:cSld>
   <p:clrMap bg1="lt1" tx1="dk1" bg2="lt2" tx2="dk2" accent1="accent1" accent2="accent2" accent3="accent3" accent4="accent4" accent5="accent5" accent6="accent6" hlink="hlink" folHlink="folHlink"/>
   <p:sldLayoutIdLst>
-    <p:sldLayoutId xmlns:r="http://schemas.openxmlformats.org/officeDocument/2006/relationships" id="2147483649" r:id="R6affb155d87b4819"/>
-    <p:sldLayoutId xmlns:r="http://schemas.openxmlformats.org/officeDocument/2006/relationships" id="2147483650" r:id="R5fb6e2c6e91548a9"/>
-    <p:sldLayoutId xmlns:r="http://schemas.openxmlformats.org/officeDocument/2006/relationships" id="2147483651" r:id="Rd72d9e2c1a954df4"/>
-    <p:sldLayoutId xmlns:r="http://schemas.openxmlformats.org/officeDocument/2006/relationships" id="2147483652" r:id="Re8c6646021124c21"/>
-    <p:sldLayoutId xmlns:r="http://schemas.openxmlformats.org/officeDocument/2006/relationships" id="2147483653" r:id="R2546bd52a8444b8d"/>
-    <p:sldLayoutId xmlns:r="http://schemas.openxmlformats.org/officeDocument/2006/relationships" id="2147483654" r:id="R990ad2c2d6dd4b50"/>
+    <p:sldLayoutId xmlns:r="http://schemas.openxmlformats.org/officeDocument/2006/relationships" id="2147483649" r:id="R398ee19d82784925"/>
+    <p:sldLayoutId xmlns:r="http://schemas.openxmlformats.org/officeDocument/2006/relationships" id="2147483650" r:id="R31c7e5e8ecd94dc4"/>
+    <p:sldLayoutId xmlns:r="http://schemas.openxmlformats.org/officeDocument/2006/relationships" id="2147483651" r:id="R423277639b50412c"/>
+    <p:sldLayoutId xmlns:r="http://schemas.openxmlformats.org/officeDocument/2006/relationships" id="2147483652" r:id="R7d8917daffa74e1f"/>
+    <p:sldLayoutId xmlns:r="http://schemas.openxmlformats.org/officeDocument/2006/relationships" id="2147483653" r:id="Red5fd12f668d4906"/>
+    <p:sldLayoutId xmlns:r="http://schemas.openxmlformats.org/officeDocument/2006/relationships" id="2147483654" r:id="Rb9e6211a77f2428d"/>
   </p:sldLayoutIdLst>
   <p:txStyles>
     <p:titleStyle>
@@ -6436,7 +6476,7 @@
           <p:cNvPr id="5" name="">
             <a:extLst xmlns:a="http://schemas.openxmlformats.org/drawingml/2006/main">
               <a:ext uri="{FF2B5EF4-FFF2-40B4-BE49-F238E27FC236}">
-                <a16:creationId xmlns:a16="http://schemas.microsoft.com/office/drawing/2014/main" id="{80EED100-1172-46B6-8C84-F8A34270381F}"/>
+                <a16:creationId xmlns:a16="http://schemas.microsoft.com/office/drawing/2014/main" id="{AA929DDF-4FC5-4886-984C-2605403E98DF}"/>
               </a:ext>
             </a:extLst>
           </p:cNvPr>
@@ -9403,7 +9443,7 @@
           <p:cNvPr id="5" name="">
             <a:extLst xmlns:a="http://schemas.openxmlformats.org/drawingml/2006/main">
               <a:ext uri="{FF2B5EF4-FFF2-40B4-BE49-F238E27FC236}">
-                <a16:creationId xmlns:a16="http://schemas.microsoft.com/office/drawing/2014/main" id="{85AC70AE-2789-4F19-AF2E-17B643471212}"/>
+                <a16:creationId xmlns:a16="http://schemas.microsoft.com/office/drawing/2014/main" id="{9F98D037-4A83-4F3B-A039-BCC921E9D9FB}"/>
               </a:ext>
             </a:extLst>
           </p:cNvPr>
@@ -10133,7 +10173,7 @@
                 <a:ea typeface="Noto Sans KR"/>
                 <a:cs typeface="Noto Sans KR"/>
               </a:rPr>
-              <a:t>AI 고지·화면 동의 차단·서버 미동의 403 응답 3회를 확인했습니다.</a:t>
+              <a:t>AI 고지·미동의 화면 차단·동의 후 상담 3회, 서버 403·안내 본문 3회를 확인했습니다.</a:t>
             </a:r>
           </a:p>
           <a:p xmlns:a="http://schemas.openxmlformats.org/drawingml/2006/main">
@@ -13802,7 +13842,7 @@
           <p:cNvPr id="5" name="">
             <a:extLst xmlns:a="http://schemas.openxmlformats.org/drawingml/2006/main">
               <a:ext uri="{FF2B5EF4-FFF2-40B4-BE49-F238E27FC236}">
-                <a16:creationId xmlns:a16="http://schemas.microsoft.com/office/drawing/2014/main" id="{16AD35BE-F467-4E53-B900-95142217EF41}"/>
+                <a16:creationId xmlns:a16="http://schemas.microsoft.com/office/drawing/2014/main" id="{811C3681-94A2-45A8-8A1E-93DF8DB6556C}"/>
               </a:ext>
             </a:extLst>
           </p:cNvPr>
@@ -15378,7 +15418,7 @@
           <p:cNvPr id="5" name="">
             <a:extLst xmlns:a="http://schemas.openxmlformats.org/drawingml/2006/main">
               <a:ext uri="{FF2B5EF4-FFF2-40B4-BE49-F238E27FC236}">
-                <a16:creationId xmlns:a16="http://schemas.microsoft.com/office/drawing/2014/main" id="{E3CA4CCD-E02C-42F3-8FB4-871BCA97A708}"/>
+                <a16:creationId xmlns:a16="http://schemas.microsoft.com/office/drawing/2014/main" id="{0BEB5DFA-50AC-4D9E-B72C-BE6377868319}"/>
               </a:ext>
             </a:extLst>
           </p:cNvPr>
@@ -16954,7 +16994,7 @@
           <p:cNvPr id="5" name="">
             <a:extLst xmlns:a="http://schemas.openxmlformats.org/drawingml/2006/main">
               <a:ext uri="{FF2B5EF4-FFF2-40B4-BE49-F238E27FC236}">
-                <a16:creationId xmlns:a16="http://schemas.microsoft.com/office/drawing/2014/main" id="{6E737F0D-C781-465D-AABA-CC8E399FAC3A}"/>
+                <a16:creationId xmlns:a16="http://schemas.microsoft.com/office/drawing/2014/main" id="{D8489A91-5C4E-4F37-8E2F-F7B96B167F83}"/>
               </a:ext>
             </a:extLst>
           </p:cNvPr>
@@ -18752,7 +18792,7 @@
           <p:cNvPr id="7" name="">
             <a:extLst xmlns:a="http://schemas.openxmlformats.org/drawingml/2006/main">
               <a:ext uri="{FF2B5EF4-FFF2-40B4-BE49-F238E27FC236}">
-                <a16:creationId xmlns:a16="http://schemas.microsoft.com/office/drawing/2014/main" id="{CA866131-FA99-4641-8FDA-6C191FD1D402}"/>
+                <a16:creationId xmlns:a16="http://schemas.microsoft.com/office/drawing/2014/main" id="{4C96083D-072C-4E12-B3FC-E32E1048BFED}"/>
               </a:ext>
             </a:extLst>
           </p:cNvPr>
@@ -20026,7 +20066,7 @@
           <p:cNvPr id="5" name="">
             <a:extLst xmlns:a="http://schemas.openxmlformats.org/drawingml/2006/main">
               <a:ext uri="{FF2B5EF4-FFF2-40B4-BE49-F238E27FC236}">
-                <a16:creationId xmlns:a16="http://schemas.microsoft.com/office/drawing/2014/main" id="{DA7A6B20-7B74-4758-8718-5C64E01163A5}"/>
+                <a16:creationId xmlns:a16="http://schemas.microsoft.com/office/drawing/2014/main" id="{3399F7C6-BED0-4A08-80E8-B9B19F6BAAA3}"/>
               </a:ext>
             </a:extLst>
           </p:cNvPr>
@@ -20675,7 +20715,7 @@
                 <a:ea typeface="Noto Sans KR"/>
                 <a:cs typeface="Noto Sans KR"/>
               </a:rPr>
-              <a:t>bb1885e 상담 보완 후 4d0295b에서 홈페이지·경험 분류를 보완했습니다. 이전 실패도 보존합니다.</a:t>
+              <a:t>홈페이지·경험 분류 보완 후 3719c28에서 학습 계획 복구를 추가했습니다. 이전 실패도 보존합니다.</a:t>
             </a:r>
           </a:p>
         </p:txBody>
@@ -21042,7 +21082,7 @@
                 <a:ea typeface="Noto Sans KR"/>
                 <a:cs typeface="Noto Sans KR"/>
               </a:rPr>
-              <a:t>최신 선택 API 6건과 기존 이미지 시험을 구분해 기록했습니다.</a:t>
+              <a:t>3719c28 배포 후 상담 화면 3회와 기존 기능 검증을 구분했습니다.</a:t>
             </a:r>
           </a:p>
         </p:txBody>
@@ -21390,7 +21430,7 @@
           <p:cNvPr id="5" name="">
             <a:extLst xmlns:a="http://schemas.openxmlformats.org/drawingml/2006/main">
               <a:ext uri="{FF2B5EF4-FFF2-40B4-BE49-F238E27FC236}">
-                <a16:creationId xmlns:a16="http://schemas.microsoft.com/office/drawing/2014/main" id="{9F265B96-1A4D-429A-AB3D-FD5F13A6E9E4}"/>
+                <a16:creationId xmlns:a16="http://schemas.microsoft.com/office/drawing/2014/main" id="{7988813D-76C4-400A-82D2-5B40AF2A7D17}"/>
               </a:ext>
             </a:extLst>
           </p:cNvPr>
@@ -21626,7 +21666,7 @@
                           <a:ea typeface="Noto Sans KR"/>
                           <a:cs typeface="Noto Sans KR"/>
                         </a:rPr>
-                        <a:t>이전 MDN·pandas / 최신 FastAPI 1건</a:t>
+                        <a:t>배포 후 FastAPI·MDN·pandas 3회</a:t>
                       </a:r>
                     </a:p>
                   </a:txBody>
@@ -21667,7 +21707,7 @@
                           <a:ea typeface="Noto Sans KR"/>
                           <a:cs typeface="Noto Sans KR"/>
                         </a:rPr>
-                        <a:t>관련 문단·출처·학습 조언 확인</a:t>
+                        <a:t>3/3 관련 자료·출처·조언 확인</a:t>
                       </a:r>
                     </a:p>
                   </a:txBody>
@@ -21757,7 +21797,7 @@
                           <a:ea typeface="Noto Sans KR"/>
                           <a:cs typeface="Noto Sans KR"/>
                         </a:rPr>
-                        <a:t>최신 Java·React 검색 2건</a:t>
+                        <a:t>Java·React API / 후속 Python 화면</a:t>
                       </a:r>
                     </a:p>
                   </a:txBody>
@@ -22251,7 +22291,7 @@
                 <a:ea typeface="Noto Sans KR"/>
                 <a:cs typeface="Noto Sans KR"/>
               </a:rPr>
-              <a:t>자동 검사 113개. 최신 API 6건의 핵심 기대 결과 확인. 502는 이번에 미재현, 원인은 미확정입니다.</a:t>
+              <a:t>자동 검사 120개. 배포 후 학습 상담·동의 절차 3/3 확인. 과거 계획 오류·502 기록은 보존합니다.</a:t>
             </a:r>
           </a:p>
         </p:txBody>
@@ -22966,7 +23006,7 @@
           <p:cNvPr id="5" name="">
             <a:extLst xmlns:a="http://schemas.openxmlformats.org/drawingml/2006/main">
               <a:ext uri="{FF2B5EF4-FFF2-40B4-BE49-F238E27FC236}">
-                <a16:creationId xmlns:a16="http://schemas.microsoft.com/office/drawing/2014/main" id="{717162B8-8DF8-4949-8039-1ACDD96B78A7}"/>
+                <a16:creationId xmlns:a16="http://schemas.microsoft.com/office/drawing/2014/main" id="{8376254C-1424-44D7-A890-A9B1C2603958}"/>
               </a:ext>
             </a:extLst>
           </p:cNvPr>
@@ -22976,7 +23016,7 @@
           <p:nvPr/>
         </p:nvPicPr>
         <p:blipFill>
-          <a:blip xmlns:r="http://schemas.openxmlformats.org/officeDocument/2006/relationships" xmlns:a="http://schemas.openxmlformats.org/drawingml/2006/main" r:embed="Rd92ba9575d014b2c"/>
+          <a:blip xmlns:r="http://schemas.openxmlformats.org/officeDocument/2006/relationships" xmlns:a="http://schemas.openxmlformats.org/drawingml/2006/main" r:embed="Rba30aee1e2194648"/>
           <a:stretch xmlns:a="http://schemas.openxmlformats.org/drawingml/2006/main"/>
         </p:blipFill>
         <p:spPr>
